--- a/presentasjoner/Nautech - Investorpresentasjon v2.pptx
+++ b/presentasjoner/Nautech - Investorpresentasjon v2.pptx
@@ -119,7 +119,7 @@
   <p:extLst>
     <p:ext uri="{521415D9-36F7-43E2-AB2F-B90AF26B5E84}">
       <p14:sectionLst xmlns:p14="http://schemas.microsoft.com/office/powerpoint/2010/main">
-        <p14:section name="Problem og løsning" id="{ceed070d-3532-31f5-6826-395022b5978f}">
+        <p14:section name="Problem og løsning" id="{a060b11a-3eae-a531-ad3e-437ee1c608dc}">
           <p14:sldIdLst>
             <p14:sldId id="256"/>
             <p14:sldId id="257"/>
@@ -129,21 +129,21 @@
             <p14:sldId id="261"/>
           </p14:sldIdLst>
         </p14:section>
-        <p14:section name="Marked og konkurranse" id="{656b5d65-3944-77c1-bdf9-36845bd1b813}">
+        <p14:section name="Marked og konkurranse" id="{eb10bd58-3f99-e55c-014e-048973ebbc93}">
           <p14:sldIdLst>
             <p14:sldId id="262"/>
             <p14:sldId id="263"/>
             <p14:sldId id="264"/>
           </p14:sldIdLst>
         </p14:section>
-        <p14:section name="Selskap og plan" id="{15d0b194-39eb-c04a-8962-4c785d8851b4}">
+        <p14:section name="Selskap og plan" id="{145fdd4e-02cb-1b54-0ff2-208c16b4b6fb}">
           <p14:sldIdLst>
             <p14:sldId id="265"/>
             <p14:sldId id="266"/>
             <p14:sldId id="267"/>
           </p14:sldIdLst>
         </p14:section>
-        <p14:section name="Vedlegg" id="{b1409484-1f0a-947b-882f-103eea6e0e30}">
+        <p14:section name="Vedlegg" id="{05e605cd-2d34-efcd-7ee8-3b86406472cb}">
           <p14:sldIdLst>
             <p14:sldId id="268"/>
           </p14:sldIdLst>
@@ -272,16 +272,16 @@
                 <c:formatCode>General</c:formatCode>
                 <c:ptCount val="4"/>
                 <c:pt idx="0">
-                  <c:v>1.2</c:v>
+                  <c:v>1.68</c:v>
                 </c:pt>
                 <c:pt idx="1">
-                  <c:v>6</c:v>
+                  <c:v>8.4</c:v>
                 </c:pt>
                 <c:pt idx="2">
-                  <c:v>12</c:v>
+                  <c:v>16.8</c:v>
                 </c:pt>
                 <c:pt idx="3">
-                  <c:v>31.2</c:v>
+                  <c:v>43.68</c:v>
                 </c:pt>
               </c:numCache>
             </c:numRef>
@@ -816,7 +816,7 @@
           <a:p>
             <a:r>
               <a:rPr lang="en-US" dirty="0"/>
-              <a:t>Nautech er et komplett system for drift og vedlikehold av fiskefartøy. Det er laget av folk som har jobbet om bord, og har en KI-assistent som svarer ut fra rederiets egne data. Produktet er ferdig utviklet, og vi er i samtaler med de første rederiene.</a:t>
+              <a:t>Nautech er et komplett system for drift og vedlikehold av fiskefartøy. Det er laget av folk som har jobbet om bord, og har en KI-assistent som svarer ut fra rederiets egne data. MVP-en er klar, vi har kontaktet rederier i hele Norge, og flere har vist interesse.</a:t>
             </a:r>
             <a:endParaRPr lang="en-US" dirty="0"/>
           </a:p>
@@ -904,7 +904,7 @@
           <a:p>
             <a:r>
               <a:rPr lang="en-US" dirty="0"/>
-              <a:t>Produktet er ferdig utviklet. Nå er vi i samtaler med rederier. Neste milepæl er en pilot på ett fartøy, deretter første betalende rederi. Innen 18 måneder vil vi ha et antall fartøy i drift og den første kunden utenfor Norge.</a:t>
+              <a:t>MVP-en er klar, og vi har kontaktet rederier i hele Norge. Flere har vist interesse, og vi jobber nå med å signere intensjonsavtaler. De utløser også neste støtterunde fra Innovasjon Norge. Deretter kommer pilot og første betalende kunde. Produktet er bygget etter DNVs krav, og vi søker godkjenning når det er ferdig utviklet.</a:t>
             </a:r>
             <a:endParaRPr lang="en-US" dirty="0"/>
           </a:p>
@@ -1784,7 +1784,7 @@
           <a:p>
             <a:r>
               <a:rPr lang="en-US" dirty="0"/>
-              <a:t>Norge er hjemmemarkedet vårt, med rundt 260 fiskefartøy over 28 meter. Det tilsvarer rundt 31 millioner i årlig abonnement. Samme type fartøy finnes i EU, med rundt 2 270 fartøy over 24 meter. Til sammen er første målgruppe rundt 300 millioner kroner i året, før vi regner med havbruk og andre land.</a:t>
+              <a:t>Norge er hjemmemarkedet vårt, med rundt 260 fiskefartøy over 28 meter. Med full dekning tilsvarer det rundt 44 millioner i årlig abonnement. Samme type fartøy finnes i EU, med rundt 2 270 fartøy over 24 meter. Til sammen er første målgruppe rundt 425 millioner kroner i året, før vi regner med havbruk og andre land.</a:t>
             </a:r>
             <a:endParaRPr lang="en-US" dirty="0"/>
           </a:p>
@@ -1872,7 +1872,7 @@
           <a:p>
             <a:r>
               <a:rPr lang="en-US" dirty="0"/>
-              <a:t>Modellen er enkel: et fast abonnement per fartøy. Ti fartøy gir 1,2 millioner i året. Når et rederi først har tatt i bruk et vedlikeholdssystem, bytter de sjelden, så inntektene er stabile.</a:t>
+              <a:t>Modellen er enkel: 1 000 kroner per modul per fartøy i måneden, 14 000 for alle modulene. Ti fartøy med full dekning gir 1,7 millioner i året. Når et rederi først har tatt i bruk et vedlikeholdssystem, bytter de sjelden, så inntektene er stabile.</a:t>
             </a:r>
             <a:endParaRPr lang="en-US" dirty="0"/>
           </a:p>
@@ -2846,7 +2846,7 @@
                 <a:ea typeface="Calibri" pitchFamily="34" charset="-122"/>
                 <a:cs typeface="Calibri" pitchFamily="34" charset="-120"/>
               </a:rPr>
-              <a:t>Bygget av en maskinsjef fra fiskeflåten. Ferdig utviklet. Klar for de første rederiene.</a:t>
+              <a:t>Bygget av en maskinsjef fra fiskeflåten. MVP klar. Rederier i hele Norge er kontaktet.</a:t>
             </a:r>
             <a:endParaRPr lang="en-US" sz="1800" dirty="0"/>
           </a:p>
@@ -3195,7 +3195,7 @@
                 <a:ea typeface="Calibri" pitchFamily="34" charset="-122"/>
                 <a:cs typeface="Calibri" pitchFamily="34" charset="-120"/>
               </a:rPr>
-              <a:t>Data i Norge/EU</a:t>
+              <a:t>Data i Norge</a:t>
             </a:r>
             <a:endParaRPr lang="en-US" sz="1800" dirty="0"/>
           </a:p>
@@ -3397,7 +3397,7 @@
                 <a:ea typeface="Arial" pitchFamily="34" charset="-122"/>
                 <a:cs typeface="Arial" pitchFamily="34" charset="-120"/>
               </a:rPr>
-              <a:t>Produktet er ferdig. Nå skal det i drift hos de første rederiene</a:t>
+              <a:t>MVP-en er klar. Nå skal den i drift hos de første rederiene</a:t>
             </a:r>
             <a:endParaRPr lang="en-US" sz="3000" dirty="0"/>
           </a:p>
@@ -3523,7 +3523,7 @@
                 <a:ea typeface="Calibri" pitchFamily="34" charset="-122"/>
                 <a:cs typeface="Calibri" pitchFamily="34" charset="-120"/>
               </a:rPr>
-              <a:t>Nautech utviklet: 14 moduler og KI-assistent</a:t>
+              <a:t>MVP med 14 moduler og KI-assistent</a:t>
             </a:r>
             <a:endParaRPr lang="en-US" sz="1500" dirty="0"/>
           </a:p>
@@ -3626,35 +3626,7 @@
                 <a:ea typeface="Calibri" pitchFamily="34" charset="-122"/>
                 <a:cs typeface="Calibri" pitchFamily="34" charset="-120"/>
               </a:rPr>
-              <a:t>Samtaler med </a:t>
-            </a:r>
-            <a:pPr algn="ctr" indent="0" marL="0">
-              <a:buNone/>
-            </a:pPr>
-            <a:r>
-              <a:rPr lang="en-US" sz="1500" b="1" dirty="0">
-                <a:solidFill>
-                  <a:srgbClr val="E8751A"/>
-                </a:solidFill>
-                <a:latin typeface="Calibri" pitchFamily="34" charset="0"/>
-                <a:ea typeface="Calibri" pitchFamily="34" charset="-122"/>
-                <a:cs typeface="Calibri" pitchFamily="34" charset="-120"/>
-              </a:rPr>
-              <a:t>[FYLL INN: antall]</a:t>
-            </a:r>
-            <a:pPr algn="ctr" indent="0" marL="0">
-              <a:buNone/>
-            </a:pPr>
-            <a:r>
-              <a:rPr lang="en-US" sz="1500" dirty="0">
-                <a:solidFill>
-                  <a:srgbClr val="1B2A38"/>
-                </a:solidFill>
-                <a:latin typeface="Calibri" pitchFamily="34" charset="0"/>
-                <a:ea typeface="Calibri" pitchFamily="34" charset="-122"/>
-                <a:cs typeface="Calibri" pitchFamily="34" charset="-120"/>
-              </a:rPr>
-              <a:t> rederier</a:t>
+              <a:t>Rederier i hele Norge kontaktet. Flere har vist interesse.</a:t>
             </a:r>
             <a:endParaRPr lang="en-US" sz="1500" dirty="0"/>
           </a:p>
@@ -3710,17 +3682,17 @@
               <a:buNone/>
             </a:pPr>
             <a:r>
-              <a:rPr lang="en-US" sz="1600" b="1" dirty="0">
-                <a:solidFill>
-                  <a:srgbClr val="E8751A"/>
-                </a:solidFill>
-                <a:latin typeface="Calibri" pitchFamily="34" charset="0"/>
-                <a:ea typeface="Calibri" pitchFamily="34" charset="-122"/>
-                <a:cs typeface="Calibri" pitchFamily="34" charset="-120"/>
-              </a:rPr>
-              <a:t>[FYLL INN: dato]</a:t>
-            </a:r>
-            <a:endParaRPr lang="en-US" sz="1600" dirty="0"/>
+              <a:rPr lang="en-US" sz="1400" b="1" spc="100" kern="0" dirty="0">
+                <a:solidFill>
+                  <a:srgbClr val="0E7C86"/>
+                </a:solidFill>
+                <a:latin typeface="Calibri" pitchFamily="34" charset="0"/>
+                <a:ea typeface="Calibri" pitchFamily="34" charset="-122"/>
+                <a:cs typeface="Calibri" pitchFamily="34" charset="-120"/>
+              </a:rPr>
+              <a:t>NESTE</a:t>
+            </a:r>
+            <a:endParaRPr lang="en-US" sz="1400" dirty="0"/>
           </a:p>
         </p:txBody>
       </p:sp>
@@ -3757,7 +3729,7 @@
                 <a:ea typeface="Calibri" pitchFamily="34" charset="-122"/>
                 <a:cs typeface="Calibri" pitchFamily="34" charset="-120"/>
               </a:rPr>
-              <a:t>Pilot på første fartøy</a:t>
+              <a:t>Signerte intensjonsavtaler og neste støtterunde fra Innovasjon Norge</a:t>
             </a:r>
             <a:endParaRPr lang="en-US" sz="1500" dirty="0"/>
           </a:p>
@@ -3813,17 +3785,17 @@
               <a:buNone/>
             </a:pPr>
             <a:r>
-              <a:rPr lang="en-US" sz="1600" b="1" dirty="0">
-                <a:solidFill>
-                  <a:srgbClr val="E8751A"/>
-                </a:solidFill>
-                <a:latin typeface="Calibri" pitchFamily="34" charset="0"/>
-                <a:ea typeface="Calibri" pitchFamily="34" charset="-122"/>
-                <a:cs typeface="Calibri" pitchFamily="34" charset="-120"/>
-              </a:rPr>
-              <a:t>[FYLL INN: dato]</a:t>
-            </a:r>
-            <a:endParaRPr lang="en-US" sz="1600" dirty="0"/>
+              <a:rPr lang="en-US" sz="1400" b="1" spc="100" kern="0" dirty="0">
+                <a:solidFill>
+                  <a:srgbClr val="0E7C86"/>
+                </a:solidFill>
+                <a:latin typeface="Calibri" pitchFamily="34" charset="0"/>
+                <a:ea typeface="Calibri" pitchFamily="34" charset="-122"/>
+                <a:cs typeface="Calibri" pitchFamily="34" charset="-120"/>
+              </a:rPr>
+              <a:t>DERETTER</a:t>
+            </a:r>
+            <a:endParaRPr lang="en-US" sz="1400" dirty="0"/>
           </a:p>
         </p:txBody>
       </p:sp>
@@ -3860,7 +3832,7 @@
                 <a:ea typeface="Calibri" pitchFamily="34" charset="-122"/>
                 <a:cs typeface="Calibri" pitchFamily="34" charset="-120"/>
               </a:rPr>
-              <a:t>Første betalende rederi</a:t>
+              <a:t>Pilot på første fartøy og første betalende rederi</a:t>
             </a:r>
             <a:endParaRPr lang="en-US" sz="1500" dirty="0"/>
           </a:p>
@@ -3916,17 +3888,17 @@
               <a:buNone/>
             </a:pPr>
             <a:r>
-              <a:rPr lang="en-US" sz="1600" b="1" dirty="0">
-                <a:solidFill>
-                  <a:srgbClr val="E8751A"/>
-                </a:solidFill>
-                <a:latin typeface="Calibri" pitchFamily="34" charset="0"/>
-                <a:ea typeface="Calibri" pitchFamily="34" charset="-122"/>
-                <a:cs typeface="Calibri" pitchFamily="34" charset="-120"/>
-              </a:rPr>
-              <a:t>[FYLL INN: dato]</a:t>
-            </a:r>
-            <a:endParaRPr lang="en-US" sz="1600" dirty="0"/>
+              <a:rPr lang="en-US" sz="1400" b="1" spc="100" kern="0" dirty="0">
+                <a:solidFill>
+                  <a:srgbClr val="0E7C86"/>
+                </a:solidFill>
+                <a:latin typeface="Calibri" pitchFamily="34" charset="0"/>
+                <a:ea typeface="Calibri" pitchFamily="34" charset="-122"/>
+                <a:cs typeface="Calibri" pitchFamily="34" charset="-120"/>
+              </a:rPr>
+              <a:t>MÅL</a:t>
+            </a:r>
+            <a:endParaRPr lang="en-US" sz="1400" dirty="0"/>
           </a:p>
         </p:txBody>
       </p:sp>
@@ -3963,7 +3935,7 @@
                 <a:ea typeface="Calibri" pitchFamily="34" charset="-122"/>
                 <a:cs typeface="Calibri" pitchFamily="34" charset="-120"/>
               </a:rPr>
-              <a:t>10 fartøy i drift, første kunde utenfor Norge</a:t>
+              <a:t>Ferdig produkt med DNV-godkjenning</a:t>
             </a:r>
             <a:endParaRPr lang="en-US" sz="1500" dirty="0"/>
           </a:p>
@@ -4038,35 +4010,7 @@
                 <a:ea typeface="Calibri" pitchFamily="34" charset="-122"/>
                 <a:cs typeface="Calibri" pitchFamily="34" charset="-120"/>
               </a:rPr>
-              <a:t>vise at rederier tar Nautech i bruk og betaler for det – med </a:t>
-            </a:r>
-            <a:pPr indent="0" marL="0">
-              <a:buNone/>
-            </a:pPr>
-            <a:r>
-              <a:rPr lang="en-US" sz="1600" b="1" dirty="0">
-                <a:solidFill>
-                  <a:srgbClr val="E8751A"/>
-                </a:solidFill>
-                <a:latin typeface="Calibri" pitchFamily="34" charset="0"/>
-                <a:ea typeface="Calibri" pitchFamily="34" charset="-122"/>
-                <a:cs typeface="Calibri" pitchFamily="34" charset="-120"/>
-              </a:rPr>
-              <a:t>[FYLL INN: antall fartøy]</a:t>
-            </a:r>
-            <a:pPr indent="0" marL="0">
-              <a:buNone/>
-            </a:pPr>
-            <a:r>
-              <a:rPr lang="en-US" sz="1600" dirty="0">
-                <a:solidFill>
-                  <a:srgbClr val="1B2A38"/>
-                </a:solidFill>
-                <a:latin typeface="Calibri" pitchFamily="34" charset="0"/>
-                <a:ea typeface="Calibri" pitchFamily="34" charset="-122"/>
-                <a:cs typeface="Calibri" pitchFamily="34" charset="-120"/>
-              </a:rPr>
-              <a:t> i drift.</a:t>
+              <a:t>signerte intensjonsavtaler, de første betalende rederiene og et ferdig produkt godkjent av DNV.</a:t>
             </a:r>
             <a:endParaRPr lang="en-US" sz="1600" dirty="0"/>
           </a:p>
@@ -5175,7 +5119,7 @@
                 <a:ea typeface="Calibri" pitchFamily="34" charset="-122"/>
                 <a:cs typeface="Calibri" pitchFamily="34" charset="-120"/>
               </a:rPr>
-              <a:t>Et fiskerederi som tar Nautech i bruk på ett fartøy, gir oss ærlig tilbakemelding og blir vår første referansekunde.</a:t>
+              <a:t>Et fiskerederi som signerer en intensjonsavtale, tester Nautech på ett fartøy og blir vår første referansekunde. Signerte avtaler utløser også neste støtterunde fra Innovasjon Norge.</a:t>
             </a:r>
             <a:endParaRPr lang="en-US" sz="1600" dirty="0"/>
           </a:p>
@@ -5582,7 +5526,7 @@
                 <a:ea typeface="Calibri" pitchFamily="34" charset="-122"/>
                 <a:cs typeface="Calibri" pitchFamily="34" charset="-120"/>
               </a:rPr>
-              <a:t>Pris: 10 000 kr per fartøy per måned, ekskl. mva.</a:t>
+              <a:t>Pris: 1 000 kr per modul per fartøy per måned, 14 000 kr for alle 14 moduler, ekskl. mva.</a:t>
             </a:r>
             <a:endParaRPr lang="en-US" sz="1500" dirty="0"/>
           </a:p>
@@ -9844,7 +9788,7 @@
                 <a:ea typeface="Calibri" pitchFamily="34" charset="-122"/>
                 <a:cs typeface="Calibri" pitchFamily="34" charset="-120"/>
               </a:rPr>
-              <a:t>Data i Norge/EU</a:t>
+              <a:t>Data lagres i Norge</a:t>
             </a:r>
             <a:endParaRPr lang="en-US" sz="1700" dirty="0"/>
           </a:p>
@@ -9861,7 +9805,7 @@
                 <a:ea typeface="Calibri" pitchFamily="34" charset="-122"/>
                 <a:cs typeface="Calibri" pitchFamily="34" charset="-120"/>
               </a:rPr>
-              <a:t>Kundens data brukes ikke til å trene KI-modeller.</a:t>
+              <a:t>På egen server i Norge. Kundens data brukes ikke til å trene KI-modeller.</a:t>
             </a:r>
             <a:endParaRPr lang="en-US" sz="1700" dirty="0"/>
           </a:p>
@@ -11654,7 +11598,7 @@
                 <a:ea typeface="Calibri" pitchFamily="34" charset="-122"/>
                 <a:cs typeface="Calibri" pitchFamily="34" charset="-120"/>
               </a:rPr>
-              <a:t>≈ 31 MNOK per år</a:t>
+              <a:t>≈ 44 MNOK per år</a:t>
             </a:r>
             <a:endParaRPr lang="en-US" sz="1300" dirty="0"/>
           </a:p>
@@ -11807,7 +11751,7 @@
                 <a:ea typeface="Calibri" pitchFamily="34" charset="-122"/>
                 <a:cs typeface="Calibri" pitchFamily="34" charset="-120"/>
               </a:rPr>
-              <a:t>≈ 272 MNOK per år</a:t>
+              <a:t>≈ 381 MNOK per år</a:t>
             </a:r>
             <a:endParaRPr lang="en-US" sz="1300" dirty="0"/>
           </a:p>
@@ -11960,7 +11904,7 @@
                 <a:ea typeface="Calibri" pitchFamily="34" charset="-122"/>
                 <a:cs typeface="Calibri" pitchFamily="34" charset="-120"/>
               </a:rPr>
-              <a:t>≈ 300 MNOK per år</a:t>
+              <a:t>≈ 425 MNOK per år</a:t>
             </a:r>
             <a:endParaRPr lang="en-US" sz="1300" dirty="0"/>
           </a:p>
@@ -12049,7 +11993,7 @@
                   <a:srgbClr val="5B6B7A"/>
                 </a:solidFill>
               </a:rPr>
-              <a:t>Årlig abonnementsverdi ved 120 000 kr per fartøy og full dekning. Kilder: Fiskeridirektoratet, Nøkkeltal 2025 (foreløpige tall); EUs fartøyregister, 2021-tall.</a:t>
+              <a:t>Årlig abonnementsverdi ved 168 000 kr per fartøy (alle moduler) og full dekning. Kilder: Fiskeridirektoratet, Nøkkeltal 2025 (foreløpige tall); EUs fartøyregister, 2021-tall.</a:t>
             </a:r>
             <a:endParaRPr lang="en-US" sz="1100" dirty="0"/>
           </a:p>
@@ -12204,7 +12148,7 @@
                 <a:ea typeface="Arial" pitchFamily="34" charset="-122"/>
                 <a:cs typeface="Arial" pitchFamily="34" charset="-120"/>
               </a:rPr>
-              <a:t>Fast abonnement per fartøy – inntekten vokser med flåten</a:t>
+              <a:t>Abonnement per fartøy og modul – inntekten vokser med flåten</a:t>
             </a:r>
             <a:endParaRPr lang="en-US" sz="3000" dirty="0"/>
           </a:p>
@@ -12243,7 +12187,7 @@
                 <a:ea typeface="Arial" pitchFamily="34" charset="-122"/>
                 <a:cs typeface="Arial" pitchFamily="34" charset="-120"/>
               </a:rPr>
-              <a:t>10 000 kr</a:t>
+              <a:t>14 000 kr</a:t>
             </a:r>
             <a:endParaRPr lang="en-US" sz="5400" dirty="0"/>
           </a:p>
@@ -12260,7 +12204,7 @@
                 <a:ea typeface="Calibri" pitchFamily="34" charset="-122"/>
                 <a:cs typeface="Calibri" pitchFamily="34" charset="-120"/>
               </a:rPr>
-              <a:t>per fartøy per måned</a:t>
+              <a:t>per fartøy per måned for alle 14 moduler</a:t>
             </a:r>
             <a:endParaRPr lang="en-US" sz="5400" dirty="0"/>
           </a:p>
@@ -12277,7 +12221,7 @@
                 <a:ea typeface="Calibri" pitchFamily="34" charset="-122"/>
                 <a:cs typeface="Calibri" pitchFamily="34" charset="-120"/>
               </a:rPr>
-              <a:t>= 120 000 kr per fartøy per år, ekskl. mva.</a:t>
+              <a:t>= 168 000 kr per fartøy per år, ekskl. mva.</a:t>
             </a:r>
             <a:endParaRPr lang="en-US" sz="5400" dirty="0"/>
           </a:p>
@@ -12360,7 +12304,7 @@
                 <a:ea typeface="Calibri" pitchFamily="34" charset="-122"/>
                 <a:cs typeface="Calibri" pitchFamily="34" charset="-120"/>
               </a:rPr>
-              <a:t>Gjentakende inntekt fra hvert fartøy</a:t>
+              <a:t>Moduler fra 1 000 kr per måned – kunden kan starte smått</a:t>
             </a:r>
             <a:endParaRPr lang="en-US" sz="1500" dirty="0"/>
           </a:p>

--- a/presentasjoner/Nautech - Investorpresentasjon v2.pptx
+++ b/presentasjoner/Nautech - Investorpresentasjon v2.pptx
@@ -18,9 +18,10 @@
     <p:sldId id="266" r:id="rId12"/>
     <p:sldId id="267" r:id="rId13"/>
     <p:sldId id="268" r:id="rId14"/>
+    <p:sldId id="269" r:id="rId15"/>
   </p:sldIdLst>
   <p:notesMasterIdLst>
-    <p:notesMasterId r:id="rId15"/>
+    <p:notesMasterId r:id="rId16"/>
   </p:notesMasterIdLst>
   <p:sldSz cx="12192000" cy="6858000"/>
   <p:notesSz cx="6858000" cy="12192000"/>
@@ -119,7 +120,7 @@
   <p:extLst>
     <p:ext uri="{521415D9-36F7-43E2-AB2F-B90AF26B5E84}">
       <p14:sectionLst xmlns:p14="http://schemas.microsoft.com/office/powerpoint/2010/main">
-        <p14:section name="Problem og løsning" id="{a060b11a-3eae-a531-ad3e-437ee1c608dc}">
+        <p14:section name="Problem og løsning" id="{dd5afeef-5ef7-59c8-a519-4a91d47dbd19}">
           <p14:sldIdLst>
             <p14:sldId id="256"/>
             <p14:sldId id="257"/>
@@ -127,25 +128,26 @@
             <p14:sldId id="259"/>
             <p14:sldId id="260"/>
             <p14:sldId id="261"/>
+            <p14:sldId id="262"/>
           </p14:sldIdLst>
         </p14:section>
-        <p14:section name="Marked og konkurranse" id="{eb10bd58-3f99-e55c-014e-048973ebbc93}">
+        <p14:section name="Marked og konkurranse" id="{9fb0895e-1ae0-9cc5-0795-b8ed8a914a77}">
           <p14:sldIdLst>
-            <p14:sldId id="262"/>
             <p14:sldId id="263"/>
             <p14:sldId id="264"/>
+            <p14:sldId id="265"/>
           </p14:sldIdLst>
         </p14:section>
-        <p14:section name="Selskap og plan" id="{145fdd4e-02cb-1b54-0ff2-208c16b4b6fb}">
+        <p14:section name="Selskap og plan" id="{17b30c45-a4bc-5e42-ea7c-72fbc5aa4bf9}">
           <p14:sldIdLst>
-            <p14:sldId id="265"/>
             <p14:sldId id="266"/>
             <p14:sldId id="267"/>
+            <p14:sldId id="268"/>
           </p14:sldIdLst>
         </p14:section>
-        <p14:section name="Vedlegg" id="{05e605cd-2d34-efcd-7ee8-3b86406472cb}">
+        <p14:section name="Vedlegg" id="{cda31126-c823-5eb1-5deb-a4bc78c84c4a}">
           <p14:sldIdLst>
-            <p14:sldId id="268"/>
+            <p14:sldId id="269"/>
           </p14:sldIdLst>
         </p14:section>
       </p14:sectionLst>
@@ -904,7 +906,7 @@
           <a:p>
             <a:r>
               <a:rPr lang="en-US" dirty="0"/>
-              <a:t>MVP-en er klar, og vi har kontaktet rederier i hele Norge. Flere har vist interesse, og vi jobber nå med å signere intensjonsavtaler. De utløser også neste støtterunde fra Innovasjon Norge. Deretter kommer pilot og første betalende kunde. Produktet er bygget etter DNVs krav, og vi søker godkjenning når det er ferdig utviklet.</a:t>
+              <a:t>Modellen er enkel: 1 000 kroner per modul per fartøy i måneden, 14 000 for alle modulene. Ti fartøy med full dekning gir 1,7 millioner i året. Når et rederi først har tatt i bruk et vedlikeholdssystem, bytter de sjelden, så inntektene er stabile.</a:t>
             </a:r>
             <a:endParaRPr lang="en-US" dirty="0"/>
           </a:p>
@@ -992,7 +994,7 @@
           <a:p>
             <a:r>
               <a:rPr lang="en-US" dirty="0"/>
-              <a:t>Arne er maskinsjef og har levd med problemet selv. Kristian har prosjekt- og ingeniørerfaring fra offshore. Vi forteller også hvem som bygger og drifter teknologien.</a:t>
+              <a:t>MVP-en er klar, og vi har kontaktet rederier i hele Norge. Flere har vist interesse, og vi jobber nå med å signere intensjonsavtaler. De utløser også neste støtterunde fra Innovasjon Norge. Deretter kommer pilot og første betalende kunde. Produktet er bygget etter DNVs krav, og vi søker godkjenning når det er ferdig utviklet.</a:t>
             </a:r>
             <a:endParaRPr lang="en-US" dirty="0"/>
           </a:p>
@@ -1080,7 +1082,7 @@
           <a:p>
             <a:r>
               <a:rPr lang="en-US" dirty="0"/>
-              <a:t>Vi søker to ting: kapital til å ta Nautech ut til de første rederiene, og et rederi som vil være med som første kunde. Neste steg er en demo av produktet, og deretter en gjennomgang av tall og plan.</a:t>
+              <a:t>Arne er maskinsjef og har levd med problemet selv. Kristian har prosjekt- og ingeniørerfaring fra offshore. Sammen kjenner vi både arbeidet om bord og hvordan et prosjekt leveres.</a:t>
             </a:r>
             <a:endParaRPr lang="en-US" dirty="0"/>
           </a:p>
@@ -1168,7 +1170,7 @@
           <a:p>
             <a:r>
               <a:rPr lang="en-US" dirty="0"/>
-              <a:t/>
+              <a:t>Vi henter ikke kapital i dag. Vi vil bli kjent med investorer som kan være aktuelle videre, og med rederier som vil være med som første kunder. Neste steg er en demo av produktet.</a:t>
             </a:r>
             <a:endParaRPr lang="en-US" dirty="0"/>
           </a:p>
@@ -1192,6 +1194,94 @@
             <a:fld id="{F7021451-1387-4CA6-816F-3879F97B5CBC}" type="slidenum">
               <a:rPr lang="en-US"/>
               <a:t>13</a:t>
+            </a:fld>
+            <a:endParaRPr lang="en-US"/>
+          </a:p>
+        </p:txBody>
+      </p:sp>
+    </p:spTree>
+    <p:extLst>
+      <p:ext uri="{BB962C8B-B14F-4D97-AF65-F5344CB8AC3E}">
+        <p14:creationId xmlns:p14="http://schemas.microsoft.com/office/powerpoint/2010/main" val="1024086991"/>
+      </p:ext>
+    </p:extLst>
+  </p:cSld>
+  <p:clrMapOvr>
+    <a:masterClrMapping/>
+  </p:clrMapOvr>
+</p:notes>
+</file>
+
+<file path=ppt/notesSlides/notesSlide14.xml><?xml version="1.0" encoding="utf-8"?>
+<p:notes xmlns:a="http://schemas.openxmlformats.org/drawingml/2006/main" xmlns:r="http://schemas.openxmlformats.org/officeDocument/2006/relationships" xmlns:p="http://schemas.openxmlformats.org/presentationml/2006/main">
+  <p:cSld>
+    <p:spTree>
+      <p:nvGrpSpPr>
+        <p:cNvPr id="1" name=""/>
+        <p:cNvGrpSpPr/>
+        <p:nvPr/>
+      </p:nvGrpSpPr>
+      <p:grpSpPr>
+        <a:xfrm>
+          <a:off x="0" y="0"/>
+          <a:ext cx="0" cy="0"/>
+          <a:chOff x="0" y="0"/>
+          <a:chExt cx="0" cy="0"/>
+        </a:xfrm>
+      </p:grpSpPr>
+      <p:sp>
+        <p:nvSpPr>
+          <p:cNvPr id="2" name="Slide Image Placeholder 1"/>
+          <p:cNvSpPr>
+            <a:spLocks noGrp="1" noRot="1" noChangeAspect="1"/>
+          </p:cNvSpPr>
+          <p:nvPr>
+            <p:ph type="sldImg"/>
+          </p:nvPr>
+        </p:nvSpPr>
+        <p:spPr/>
+      </p:sp>
+      <p:sp>
+        <p:nvSpPr>
+          <p:cNvPr id="3" name="Notes Placeholder 2"/>
+          <p:cNvSpPr>
+            <a:spLocks noGrp="1"/>
+          </p:cNvSpPr>
+          <p:nvPr>
+            <p:ph type="body" idx="1"/>
+          </p:nvPr>
+        </p:nvSpPr>
+        <p:spPr/>
+        <p:txBody>
+          <a:bodyPr/>
+          <a:lstStyle/>
+          <a:p>
+            <a:r>
+              <a:rPr lang="en-US" dirty="0"/>
+              <a:t/>
+            </a:r>
+            <a:endParaRPr lang="en-US" dirty="0"/>
+          </a:p>
+        </p:txBody>
+      </p:sp>
+      <p:sp>
+        <p:nvSpPr>
+          <p:cNvPr id="4" name="Slide Number Placeholder 3"/>
+          <p:cNvSpPr>
+            <a:spLocks noGrp="1"/>
+          </p:cNvSpPr>
+          <p:nvPr>
+            <p:ph type="sldNum" sz="quarter" idx="10"/>
+          </p:nvPr>
+        </p:nvSpPr>
+        <p:spPr/>
+        <p:txBody>
+          <a:bodyPr/>
+          <a:lstStyle/>
+          <a:p>
+            <a:fld id="{F7021451-1387-4CA6-816F-3879F97B5CBC}" type="slidenum">
+              <a:rPr lang="en-US"/>
+              <a:t>14</a:t>
             </a:fld>
             <a:endParaRPr lang="en-US"/>
           </a:p>
@@ -1608,7 +1698,7 @@
           <a:p>
             <a:r>
               <a:rPr lang="en-US" dirty="0"/>
-              <a:t>Dette er det som skiller oss fra de brede maritime systemene. Fiskerimodulen dekker fangst, kvoter, sporbarhet og rapporteringskravene en tråler lever med, i samme system som vedlikeholdet.</a:t>
+              <a:t>Her er tre av modulene slik de ser ut i MVP-en i dag: flåteoversikten, arbeidsordrer i vedlikeholdsmodulen og sikkerhetsoversikten.</a:t>
             </a:r>
             <a:endParaRPr lang="en-US" dirty="0"/>
           </a:p>
@@ -1696,7 +1786,7 @@
           <a:p>
             <a:r>
               <a:rPr lang="en-US" dirty="0"/>
-              <a:t>Markedet har etablerte aktører, og CCOM X og PreMaster har kunder i fiskeflåten. Vår fordel er at Nautech er bygget spesielt for fiskefartøy, av folk fra fiskeflåten, og at KI er en del av produktet fra start. De etablerte aktørene bygger KI inn i eldre plattformer.</a:t>
+              <a:t>Dette er det som skiller oss fra de brede maritime systemene. Fiskerimodulen dekker fangst, kvoter, sporbarhet og rapporteringskravene en tråler lever med, i samme system som vedlikeholdet.</a:t>
             </a:r>
             <a:endParaRPr lang="en-US" dirty="0"/>
           </a:p>
@@ -1784,7 +1874,7 @@
           <a:p>
             <a:r>
               <a:rPr lang="en-US" dirty="0"/>
-              <a:t>Norge er hjemmemarkedet vårt, med rundt 260 fiskefartøy over 28 meter. Med full dekning tilsvarer det rundt 44 millioner i årlig abonnement. Samme type fartøy finnes i EU, med rundt 2 270 fartøy over 24 meter. Til sammen er første målgruppe rundt 425 millioner kroner i året, før vi regner med havbruk og andre land.</a:t>
+              <a:t>Markedet har etablerte aktører, og CCOM X og PreMaster har kunder i fiskeflåten. Vår fordel er at Nautech er bygget spesielt for fiskefartøy, av folk fra fiskeflåten, og at KI er en del av produktet fra start. De etablerte aktørene bygger KI inn i eldre plattformer.</a:t>
             </a:r>
             <a:endParaRPr lang="en-US" dirty="0"/>
           </a:p>
@@ -1872,7 +1962,7 @@
           <a:p>
             <a:r>
               <a:rPr lang="en-US" dirty="0"/>
-              <a:t>Modellen er enkel: 1 000 kroner per modul per fartøy i måneden, 14 000 for alle modulene. Ti fartøy med full dekning gir 1,7 millioner i året. Når et rederi først har tatt i bruk et vedlikeholdssystem, bytter de sjelden, så inntektene er stabile.</a:t>
+              <a:t>Norge er hjemmemarkedet vårt, med rundt 260 fiskefartøy over 28 meter. Med full dekning tilsvarer det rundt 44 millioner i årlig abonnement. Samme type fartøy finnes i EU, med rundt 2 270 fartøy over 24 meter. Til sammen er første målgruppe rundt 425 millioner kroner i året, før vi regner med havbruk og andre land.</a:t>
             </a:r>
             <a:endParaRPr lang="en-US" dirty="0"/>
           </a:p>
@@ -2735,168 +2825,9 @@
           </a:p>
         </p:txBody>
       </p:sp>
-      <p:sp>
-        <p:nvSpPr>
-          <p:cNvPr id="3" name="Text 1"/>
-          <p:cNvSpPr txBox="1"/>
-          <p:nvPr/>
-        </p:nvSpPr>
-        <p:spPr>
-          <a:xfrm>
-            <a:off x="548640" y="1234440"/>
-            <a:ext cx="8229600" cy="1005840"/>
-          </a:xfrm>
-          <a:prstGeom prst="rect">
-            <a:avLst/>
-          </a:prstGeom>
-          <a:noFill/>
-          <a:ln/>
-        </p:spPr>
-        <p:txBody>
-          <a:bodyPr wrap="square" lIns="0" tIns="0" rIns="0" bIns="0" rtlCol="0" anchor="t"/>
-          <a:lstStyle/>
-          <a:p>
-            <a:pPr indent="0" marL="0">
-              <a:buNone/>
-            </a:pPr>
-            <a:r>
-              <a:rPr lang="en-US" sz="6000" b="1" dirty="0">
-                <a:solidFill>
-                  <a:srgbClr val="FFFFFF"/>
-                </a:solidFill>
-                <a:latin typeface="Arial" pitchFamily="34" charset="0"/>
-                <a:ea typeface="Arial" pitchFamily="34" charset="-122"/>
-                <a:cs typeface="Arial" pitchFamily="34" charset="-120"/>
-              </a:rPr>
-              <a:t>Nautech</a:t>
-            </a:r>
-            <a:endParaRPr lang="en-US" sz="6000" dirty="0"/>
-          </a:p>
-        </p:txBody>
-      </p:sp>
-      <p:sp>
-        <p:nvSpPr>
-          <p:cNvPr id="4" name="Text 2"/>
-          <p:cNvSpPr txBox="1"/>
-          <p:nvPr/>
-        </p:nvSpPr>
-        <p:spPr>
-          <a:xfrm>
-            <a:off x="548640" y="2331720"/>
-            <a:ext cx="9601200" cy="1188720"/>
-          </a:xfrm>
-          <a:prstGeom prst="rect">
-            <a:avLst/>
-          </a:prstGeom>
-          <a:noFill/>
-          <a:ln/>
-        </p:spPr>
-        <p:txBody>
-          <a:bodyPr wrap="square" lIns="0" tIns="0" rIns="0" bIns="0" rtlCol="0" anchor="t"/>
-          <a:lstStyle/>
-          <a:p>
-            <a:pPr indent="0" marL="0">
-              <a:buNone/>
-            </a:pPr>
-            <a:r>
-              <a:rPr lang="en-US" sz="2800" dirty="0">
-                <a:solidFill>
-                  <a:srgbClr val="FFFFFF"/>
-                </a:solidFill>
-                <a:latin typeface="Arial" pitchFamily="34" charset="0"/>
-                <a:ea typeface="Arial" pitchFamily="34" charset="-122"/>
-                <a:cs typeface="Arial" pitchFamily="34" charset="-120"/>
-              </a:rPr>
-              <a:t>Drifts- og vedlikeholdssystemet for fiskeflåten – med KI som kjenner båten</a:t>
-            </a:r>
-            <a:endParaRPr lang="en-US" sz="2800" dirty="0"/>
-          </a:p>
-        </p:txBody>
-      </p:sp>
-      <p:sp>
-        <p:nvSpPr>
-          <p:cNvPr id="5" name="Text 3"/>
-          <p:cNvSpPr txBox="1"/>
-          <p:nvPr/>
-        </p:nvSpPr>
-        <p:spPr>
-          <a:xfrm>
-            <a:off x="548640" y="3611880"/>
-            <a:ext cx="9601200" cy="457200"/>
-          </a:xfrm>
-          <a:prstGeom prst="rect">
-            <a:avLst/>
-          </a:prstGeom>
-          <a:noFill/>
-          <a:ln/>
-        </p:spPr>
-        <p:txBody>
-          <a:bodyPr wrap="square" lIns="0" tIns="0" rIns="0" bIns="0" rtlCol="0" anchor="t"/>
-          <a:lstStyle/>
-          <a:p>
-            <a:pPr indent="0" marL="0">
-              <a:buNone/>
-            </a:pPr>
-            <a:r>
-              <a:rPr lang="en-US" sz="1800" dirty="0">
-                <a:solidFill>
-                  <a:srgbClr val="7FD1D6"/>
-                </a:solidFill>
-                <a:latin typeface="Calibri" pitchFamily="34" charset="0"/>
-                <a:ea typeface="Calibri" pitchFamily="34" charset="-122"/>
-                <a:cs typeface="Calibri" pitchFamily="34" charset="-120"/>
-              </a:rPr>
-              <a:t>Bygget av en maskinsjef fra fiskeflåten. MVP klar. Rederier i hele Norge er kontaktet.</a:t>
-            </a:r>
-            <a:endParaRPr lang="en-US" sz="1800" dirty="0"/>
-          </a:p>
-        </p:txBody>
-      </p:sp>
-      <p:sp>
-        <p:nvSpPr>
-          <p:cNvPr id="6" name="Kort"/>
-          <p:cNvSpPr/>
-          <p:nvPr/>
-        </p:nvSpPr>
-        <p:spPr>
-          <a:xfrm>
-            <a:off x="548640" y="4572000"/>
-            <a:ext cx="3515258" cy="1051560"/>
-          </a:xfrm>
-          <a:prstGeom prst="roundRect">
-            <a:avLst>
-              <a:gd name="adj" fmla="val 10435"/>
-            </a:avLst>
-          </a:prstGeom>
-          <a:solidFill>
-            <a:srgbClr val="16324D"/>
-          </a:solidFill>
-          <a:ln/>
-        </p:spPr>
-      </p:sp>
-      <p:sp>
-        <p:nvSpPr>
-          <p:cNvPr id="7" name="Ikon-sirkel"/>
-          <p:cNvSpPr/>
-          <p:nvPr/>
-        </p:nvSpPr>
-        <p:spPr>
-          <a:xfrm>
-            <a:off x="777240" y="4773168"/>
-            <a:ext cx="640080" cy="640080"/>
-          </a:xfrm>
-          <a:prstGeom prst="ellipse">
-            <a:avLst/>
-          </a:prstGeom>
-          <a:solidFill>
-            <a:srgbClr val="0E7C86"/>
-          </a:solidFill>
-          <a:ln/>
-        </p:spPr>
-      </p:sp>
       <p:pic>
         <p:nvPicPr>
-          <p:cNvPr id="8" name="Ikon FaLayerGroup" descr="preencoded.png">    </p:cNvPr>
+          <p:cNvPr id="3" name="Nautech-logo" descr="/tmp/claude-0/-home-user-Claude/bbdec16f-2a10-550d-bb32-af07b09e4311/scratchpad/build/img/logo_white.png">    </p:cNvPr>
           <p:cNvPicPr>
             <a:picLocks noChangeAspect="1"/>
           </p:cNvPicPr>
@@ -2910,8 +2841,8 @@
         </p:blipFill>
         <p:spPr>
           <a:xfrm>
-            <a:off x="930859" y="4926787"/>
-            <a:ext cx="332842" cy="332842"/>
+            <a:off x="9631375" y="320040"/>
+            <a:ext cx="2011680" cy="613733"/>
           </a:xfrm>
           <a:prstGeom prst="rect">
             <a:avLst/>
@@ -2920,14 +2851,14 @@
       </p:pic>
       <p:sp>
         <p:nvSpPr>
-          <p:cNvPr id="9" name="Text 6"/>
+          <p:cNvPr id="4" name="Text 1"/>
           <p:cNvSpPr txBox="1"/>
           <p:nvPr/>
         </p:nvSpPr>
         <p:spPr>
           <a:xfrm>
-            <a:off x="1600200" y="4754880"/>
-            <a:ext cx="2326538" cy="731520"/>
+            <a:off x="548640" y="1234440"/>
+            <a:ext cx="8229600" cy="1005840"/>
           </a:xfrm>
           <a:prstGeom prst="rect">
             <a:avLst/>
@@ -2936,53 +2867,114 @@
           <a:ln/>
         </p:spPr>
         <p:txBody>
-          <a:bodyPr wrap="square" lIns="0" tIns="0" rIns="0" bIns="0" rtlCol="0" anchor="ctr"/>
+          <a:bodyPr wrap="square" lIns="0" tIns="0" rIns="0" bIns="0" rtlCol="0" anchor="t"/>
           <a:lstStyle/>
           <a:p>
             <a:pPr indent="0" marL="0">
               <a:buNone/>
             </a:pPr>
             <a:r>
-              <a:rPr lang="en-US" sz="1800" b="1" dirty="0">
+              <a:rPr lang="en-US" sz="6000" b="1" dirty="0">
                 <a:solidFill>
                   <a:srgbClr val="FFFFFF"/>
                 </a:solidFill>
-                <a:latin typeface="Calibri" pitchFamily="34" charset="0"/>
-                <a:ea typeface="Calibri" pitchFamily="34" charset="-122"/>
-                <a:cs typeface="Calibri" pitchFamily="34" charset="-120"/>
-              </a:rPr>
-              <a:t>14 moduler</a:t>
+                <a:latin typeface="Arial" pitchFamily="34" charset="0"/>
+                <a:ea typeface="Arial" pitchFamily="34" charset="-122"/>
+                <a:cs typeface="Arial" pitchFamily="34" charset="-120"/>
+              </a:rPr>
+              <a:t>Nautech</a:t>
+            </a:r>
+            <a:endParaRPr lang="en-US" sz="6000" dirty="0"/>
+          </a:p>
+        </p:txBody>
+      </p:sp>
+      <p:sp>
+        <p:nvSpPr>
+          <p:cNvPr id="5" name="Text 2"/>
+          <p:cNvSpPr txBox="1"/>
+          <p:nvPr/>
+        </p:nvSpPr>
+        <p:spPr>
+          <a:xfrm>
+            <a:off x="548640" y="2331720"/>
+            <a:ext cx="9601200" cy="1188720"/>
+          </a:xfrm>
+          <a:prstGeom prst="rect">
+            <a:avLst/>
+          </a:prstGeom>
+          <a:noFill/>
+          <a:ln/>
+        </p:spPr>
+        <p:txBody>
+          <a:bodyPr wrap="square" lIns="0" tIns="0" rIns="0" bIns="0" rtlCol="0" anchor="t"/>
+          <a:lstStyle/>
+          <a:p>
+            <a:pPr indent="0" marL="0">
+              <a:buNone/>
+            </a:pPr>
+            <a:r>
+              <a:rPr lang="en-US" sz="2800" dirty="0">
+                <a:solidFill>
+                  <a:srgbClr val="FFFFFF"/>
+                </a:solidFill>
+                <a:latin typeface="Arial" pitchFamily="34" charset="0"/>
+                <a:ea typeface="Arial" pitchFamily="34" charset="-122"/>
+                <a:cs typeface="Arial" pitchFamily="34" charset="-120"/>
+              </a:rPr>
+              <a:t>Drifts- og vedlikeholdssystemet for fiskeflåten – med KI som kjenner båten</a:t>
+            </a:r>
+            <a:endParaRPr lang="en-US" sz="2800" dirty="0"/>
+          </a:p>
+        </p:txBody>
+      </p:sp>
+      <p:sp>
+        <p:nvSpPr>
+          <p:cNvPr id="6" name="Text 3"/>
+          <p:cNvSpPr txBox="1"/>
+          <p:nvPr/>
+        </p:nvSpPr>
+        <p:spPr>
+          <a:xfrm>
+            <a:off x="548640" y="3611880"/>
+            <a:ext cx="9601200" cy="457200"/>
+          </a:xfrm>
+          <a:prstGeom prst="rect">
+            <a:avLst/>
+          </a:prstGeom>
+          <a:noFill/>
+          <a:ln/>
+        </p:spPr>
+        <p:txBody>
+          <a:bodyPr wrap="square" lIns="0" tIns="0" rIns="0" bIns="0" rtlCol="0" anchor="t"/>
+          <a:lstStyle/>
+          <a:p>
+            <a:pPr indent="0" marL="0">
+              <a:buNone/>
+            </a:pPr>
+            <a:r>
+              <a:rPr lang="en-US" sz="1800" dirty="0">
+                <a:solidFill>
+                  <a:srgbClr val="7FD1D6"/>
+                </a:solidFill>
+                <a:latin typeface="Calibri" pitchFamily="34" charset="0"/>
+                <a:ea typeface="Calibri" pitchFamily="34" charset="-122"/>
+                <a:cs typeface="Calibri" pitchFamily="34" charset="-120"/>
+              </a:rPr>
+              <a:t>Bygget av en maskinsjef fra fiskeflåten. MVP klar. Rederier i hele Norge er kontaktet.</a:t>
             </a:r>
             <a:endParaRPr lang="en-US" sz="1800" dirty="0"/>
           </a:p>
-          <a:p>
-            <a:pPr indent="0" marL="0">
-              <a:buNone/>
-            </a:pPr>
-            <a:r>
-              <a:rPr lang="en-US" sz="1400" dirty="0">
-                <a:solidFill>
-                  <a:srgbClr val="B9C8D4"/>
-                </a:solidFill>
-                <a:latin typeface="Calibri" pitchFamily="34" charset="0"/>
-                <a:ea typeface="Calibri" pitchFamily="34" charset="-122"/>
-                <a:cs typeface="Calibri" pitchFamily="34" charset="-120"/>
-              </a:rPr>
-              <a:t>i ett system</a:t>
-            </a:r>
-            <a:endParaRPr lang="en-US" sz="1800" dirty="0"/>
-          </a:p>
-        </p:txBody>
-      </p:sp>
-      <p:sp>
-        <p:nvSpPr>
-          <p:cNvPr id="10" name="Kort"/>
+        </p:txBody>
+      </p:sp>
+      <p:sp>
+        <p:nvSpPr>
+          <p:cNvPr id="7" name="Kort"/>
           <p:cNvSpPr/>
           <p:nvPr/>
         </p:nvSpPr>
         <p:spPr>
           <a:xfrm>
-            <a:off x="4338218" y="4572000"/>
+            <a:off x="548640" y="4572000"/>
             <a:ext cx="3515258" cy="1051560"/>
           </a:xfrm>
           <a:prstGeom prst="roundRect">
@@ -2998,13 +2990,13 @@
       </p:sp>
       <p:sp>
         <p:nvSpPr>
-          <p:cNvPr id="11" name="Ikon-sirkel"/>
+          <p:cNvPr id="8" name="Ikon-sirkel"/>
           <p:cNvSpPr/>
           <p:nvPr/>
         </p:nvSpPr>
         <p:spPr>
           <a:xfrm>
-            <a:off x="4566818" y="4773168"/>
+            <a:off x="777240" y="4773168"/>
             <a:ext cx="640080" cy="640080"/>
           </a:xfrm>
           <a:prstGeom prst="ellipse">
@@ -3018,7 +3010,7 @@
       </p:sp>
       <p:pic>
         <p:nvPicPr>
-          <p:cNvPr id="12" name="Ikon FaBrain" descr="preencoded.png">    </p:cNvPr>
+          <p:cNvPr id="9" name="Ikon FaLayerGroup" descr="preencoded.png">    </p:cNvPr>
           <p:cNvPicPr>
             <a:picLocks noChangeAspect="1"/>
           </p:cNvPicPr>
@@ -3032,7 +3024,7 @@
         </p:blipFill>
         <p:spPr>
           <a:xfrm>
-            <a:off x="4720438" y="4926787"/>
+            <a:off x="930859" y="4926787"/>
             <a:ext cx="332842" cy="332842"/>
           </a:xfrm>
           <a:prstGeom prst="rect">
@@ -3042,13 +3034,13 @@
       </p:pic>
       <p:sp>
         <p:nvSpPr>
-          <p:cNvPr id="13" name="Text 9"/>
+          <p:cNvPr id="10" name="Text 6"/>
           <p:cNvSpPr txBox="1"/>
           <p:nvPr/>
         </p:nvSpPr>
         <p:spPr>
           <a:xfrm>
-            <a:off x="5389778" y="4754880"/>
+            <a:off x="1600200" y="4754880"/>
             <a:ext cx="2326538" cy="731520"/>
           </a:xfrm>
           <a:prstGeom prst="rect">
@@ -3073,7 +3065,7 @@
                 <a:ea typeface="Calibri" pitchFamily="34" charset="-122"/>
                 <a:cs typeface="Calibri" pitchFamily="34" charset="-120"/>
               </a:rPr>
-              <a:t>KI som svarer</a:t>
+              <a:t>14 moduler</a:t>
             </a:r>
             <a:endParaRPr lang="en-US" sz="1800" dirty="0"/>
           </a:p>
@@ -3090,7 +3082,7 @@
                 <a:ea typeface="Calibri" pitchFamily="34" charset="-122"/>
                 <a:cs typeface="Calibri" pitchFamily="34" charset="-120"/>
               </a:rPr>
-              <a:t>med kilde fra egne data</a:t>
+              <a:t>i ett system</a:t>
             </a:r>
             <a:endParaRPr lang="en-US" sz="1800" dirty="0"/>
           </a:p>
@@ -3098,13 +3090,13 @@
       </p:sp>
       <p:sp>
         <p:nvSpPr>
-          <p:cNvPr id="14" name="Kort"/>
+          <p:cNvPr id="11" name="Kort"/>
           <p:cNvSpPr/>
           <p:nvPr/>
         </p:nvSpPr>
         <p:spPr>
           <a:xfrm>
-            <a:off x="8127797" y="4572000"/>
+            <a:off x="4338218" y="4572000"/>
             <a:ext cx="3515258" cy="1051560"/>
           </a:xfrm>
           <a:prstGeom prst="roundRect">
@@ -3120,13 +3112,13 @@
       </p:sp>
       <p:sp>
         <p:nvSpPr>
-          <p:cNvPr id="15" name="Ikon-sirkel"/>
+          <p:cNvPr id="12" name="Ikon-sirkel"/>
           <p:cNvSpPr/>
           <p:nvPr/>
         </p:nvSpPr>
         <p:spPr>
           <a:xfrm>
-            <a:off x="8356397" y="4773168"/>
+            <a:off x="4566818" y="4773168"/>
             <a:ext cx="640080" cy="640080"/>
           </a:xfrm>
           <a:prstGeom prst="ellipse">
@@ -3140,7 +3132,7 @@
       </p:sp>
       <p:pic>
         <p:nvPicPr>
-          <p:cNvPr id="16" name="Ikon FaLock" descr="preencoded.png">    </p:cNvPr>
+          <p:cNvPr id="13" name="Ikon FaBrain" descr="preencoded.png">    </p:cNvPr>
           <p:cNvPicPr>
             <a:picLocks noChangeAspect="1"/>
           </p:cNvPicPr>
@@ -3154,6 +3146,128 @@
         </p:blipFill>
         <p:spPr>
           <a:xfrm>
+            <a:off x="4720438" y="4926787"/>
+            <a:ext cx="332842" cy="332842"/>
+          </a:xfrm>
+          <a:prstGeom prst="rect">
+            <a:avLst/>
+          </a:prstGeom>
+        </p:spPr>
+      </p:pic>
+      <p:sp>
+        <p:nvSpPr>
+          <p:cNvPr id="14" name="Text 9"/>
+          <p:cNvSpPr txBox="1"/>
+          <p:nvPr/>
+        </p:nvSpPr>
+        <p:spPr>
+          <a:xfrm>
+            <a:off x="5389778" y="4754880"/>
+            <a:ext cx="2326538" cy="731520"/>
+          </a:xfrm>
+          <a:prstGeom prst="rect">
+            <a:avLst/>
+          </a:prstGeom>
+          <a:noFill/>
+          <a:ln/>
+        </p:spPr>
+        <p:txBody>
+          <a:bodyPr wrap="square" lIns="0" tIns="0" rIns="0" bIns="0" rtlCol="0" anchor="ctr"/>
+          <a:lstStyle/>
+          <a:p>
+            <a:pPr indent="0" marL="0">
+              <a:buNone/>
+            </a:pPr>
+            <a:r>
+              <a:rPr lang="en-US" sz="1800" b="1" dirty="0">
+                <a:solidFill>
+                  <a:srgbClr val="FFFFFF"/>
+                </a:solidFill>
+                <a:latin typeface="Calibri" pitchFamily="34" charset="0"/>
+                <a:ea typeface="Calibri" pitchFamily="34" charset="-122"/>
+                <a:cs typeface="Calibri" pitchFamily="34" charset="-120"/>
+              </a:rPr>
+              <a:t>KI som svarer</a:t>
+            </a:r>
+            <a:endParaRPr lang="en-US" sz="1800" dirty="0"/>
+          </a:p>
+          <a:p>
+            <a:pPr indent="0" marL="0">
+              <a:buNone/>
+            </a:pPr>
+            <a:r>
+              <a:rPr lang="en-US" sz="1400" dirty="0">
+                <a:solidFill>
+                  <a:srgbClr val="B9C8D4"/>
+                </a:solidFill>
+                <a:latin typeface="Calibri" pitchFamily="34" charset="0"/>
+                <a:ea typeface="Calibri" pitchFamily="34" charset="-122"/>
+                <a:cs typeface="Calibri" pitchFamily="34" charset="-120"/>
+              </a:rPr>
+              <a:t>med kilde fra egne data</a:t>
+            </a:r>
+            <a:endParaRPr lang="en-US" sz="1800" dirty="0"/>
+          </a:p>
+        </p:txBody>
+      </p:sp>
+      <p:sp>
+        <p:nvSpPr>
+          <p:cNvPr id="15" name="Kort"/>
+          <p:cNvSpPr/>
+          <p:nvPr/>
+        </p:nvSpPr>
+        <p:spPr>
+          <a:xfrm>
+            <a:off x="8127797" y="4572000"/>
+            <a:ext cx="3515258" cy="1051560"/>
+          </a:xfrm>
+          <a:prstGeom prst="roundRect">
+            <a:avLst>
+              <a:gd name="adj" fmla="val 10435"/>
+            </a:avLst>
+          </a:prstGeom>
+          <a:solidFill>
+            <a:srgbClr val="16324D"/>
+          </a:solidFill>
+          <a:ln/>
+        </p:spPr>
+      </p:sp>
+      <p:sp>
+        <p:nvSpPr>
+          <p:cNvPr id="16" name="Ikon-sirkel"/>
+          <p:cNvSpPr/>
+          <p:nvPr/>
+        </p:nvSpPr>
+        <p:spPr>
+          <a:xfrm>
+            <a:off x="8356397" y="4773168"/>
+            <a:ext cx="640080" cy="640080"/>
+          </a:xfrm>
+          <a:prstGeom prst="ellipse">
+            <a:avLst/>
+          </a:prstGeom>
+          <a:solidFill>
+            <a:srgbClr val="0E7C86"/>
+          </a:solidFill>
+          <a:ln/>
+        </p:spPr>
+      </p:sp>
+      <p:pic>
+        <p:nvPicPr>
+          <p:cNvPr id="17" name="Ikon FaLock" descr="preencoded.png">    </p:cNvPr>
+          <p:cNvPicPr>
+            <a:picLocks noChangeAspect="1"/>
+          </p:cNvPicPr>
+          <p:nvPr/>
+        </p:nvPicPr>
+        <p:blipFill>
+          <a:blip r:embed="rId4"/>
+          <a:stretch>
+            <a:fillRect/>
+          </a:stretch>
+        </p:blipFill>
+        <p:spPr>
+          <a:xfrm>
             <a:off x="8510016" y="4926787"/>
             <a:ext cx="332842" cy="332842"/>
           </a:xfrm>
@@ -3164,7 +3278,7 @@
       </p:pic>
       <p:sp>
         <p:nvSpPr>
-          <p:cNvPr id="17" name="Text 12"/>
+          <p:cNvPr id="18" name="Text 12"/>
           <p:cNvSpPr txBox="1"/>
           <p:nvPr/>
         </p:nvSpPr>
@@ -3220,7 +3334,7 @@
       </p:sp>
       <p:sp>
         <p:nvSpPr>
-          <p:cNvPr id="19" name="Text 1"/>
+          <p:cNvPr id="20" name="Text 1"/>
           <p:cNvSpPr/>
           <p:nvPr>
             <p:ph idx="102" type="title" hasCustomPrompt="1"/>
@@ -3356,7 +3470,7 @@
                 <a:ea typeface="Calibri" pitchFamily="34" charset="-122"/>
                 <a:cs typeface="Calibri" pitchFamily="34" charset="-120"/>
               </a:rPr>
-              <a:t>STATUS OG PLAN</a:t>
+              <a:t>FORRETNINGSMODELL</a:t>
             </a:r>
             <a:endParaRPr lang="en-US" sz="1200" dirty="0"/>
           </a:p>
@@ -3397,7 +3511,7 @@
                 <a:ea typeface="Arial" pitchFamily="34" charset="-122"/>
                 <a:cs typeface="Arial" pitchFamily="34" charset="-120"/>
               </a:rPr>
-              <a:t>MVP-en er klar. Nå skal den i drift hos de første rederiene</a:t>
+              <a:t>Abonnement per fartøy og modul – inntekten vokser med flåten</a:t>
             </a:r>
             <a:endParaRPr lang="en-US" sz="3000" dirty="0"/>
           </a:p>
@@ -3405,62 +3519,214 @@
       </p:sp>
       <p:sp>
         <p:nvSpPr>
-          <p:cNvPr id="4" name="Shape 2"/>
+          <p:cNvPr id="4" name="Text 2"/>
+          <p:cNvSpPr txBox="1"/>
+          <p:nvPr/>
+        </p:nvSpPr>
+        <p:spPr>
+          <a:xfrm>
+            <a:off x="548640" y="1828800"/>
+            <a:ext cx="5120640" cy="1737360"/>
+          </a:xfrm>
+          <a:prstGeom prst="rect">
+            <a:avLst/>
+          </a:prstGeom>
+          <a:noFill/>
+          <a:ln/>
+        </p:spPr>
+        <p:txBody>
+          <a:bodyPr wrap="square" lIns="0" tIns="0" rIns="0" bIns="0" rtlCol="0" anchor="t"/>
+          <a:lstStyle/>
+          <a:p>
+            <a:pPr indent="0" marL="0">
+              <a:buNone/>
+            </a:pPr>
+            <a:r>
+              <a:rPr lang="en-US" sz="5400" b="1" dirty="0">
+                <a:solidFill>
+                  <a:srgbClr val="0E7C86"/>
+                </a:solidFill>
+                <a:latin typeface="Arial" pitchFamily="34" charset="0"/>
+                <a:ea typeface="Arial" pitchFamily="34" charset="-122"/>
+                <a:cs typeface="Arial" pitchFamily="34" charset="-120"/>
+              </a:rPr>
+              <a:t>14 000 kr</a:t>
+            </a:r>
+            <a:endParaRPr lang="en-US" sz="5400" dirty="0"/>
+          </a:p>
+          <a:p>
+            <a:pPr indent="0" marL="0">
+              <a:buNone/>
+            </a:pPr>
+            <a:r>
+              <a:rPr lang="en-US" sz="2000" dirty="0">
+                <a:solidFill>
+                  <a:srgbClr val="0B1F33"/>
+                </a:solidFill>
+                <a:latin typeface="Calibri" pitchFamily="34" charset="0"/>
+                <a:ea typeface="Calibri" pitchFamily="34" charset="-122"/>
+                <a:cs typeface="Calibri" pitchFamily="34" charset="-120"/>
+              </a:rPr>
+              <a:t>per fartøy per måned for alle 14 moduler</a:t>
+            </a:r>
+            <a:endParaRPr lang="en-US" sz="5400" dirty="0"/>
+          </a:p>
+          <a:p>
+            <a:pPr indent="0" marL="0">
+              <a:buNone/>
+            </a:pPr>
+            <a:r>
+              <a:rPr lang="en-US" sz="1500" dirty="0">
+                <a:solidFill>
+                  <a:srgbClr val="5B6B7A"/>
+                </a:solidFill>
+                <a:latin typeface="Calibri" pitchFamily="34" charset="0"/>
+                <a:ea typeface="Calibri" pitchFamily="34" charset="-122"/>
+                <a:cs typeface="Calibri" pitchFamily="34" charset="-120"/>
+              </a:rPr>
+              <a:t>= 168 000 kr per fartøy per år, ekskl. mva.</a:t>
+            </a:r>
+            <a:endParaRPr lang="en-US" sz="5400" dirty="0"/>
+          </a:p>
+        </p:txBody>
+      </p:sp>
+      <p:sp>
+        <p:nvSpPr>
+          <p:cNvPr id="5" name="Ikon-sirkel"/>
           <p:cNvSpPr/>
           <p:nvPr/>
         </p:nvSpPr>
         <p:spPr>
           <a:xfrm>
-            <a:off x="1645920" y="3063240"/>
-            <a:ext cx="8899855" cy="0"/>
-          </a:xfrm>
-          <a:prstGeom prst="line">
+            <a:off x="548640" y="3794760"/>
+            <a:ext cx="411480" cy="411480"/>
+          </a:xfrm>
+          <a:prstGeom prst="ellipse">
+            <a:avLst/>
+          </a:prstGeom>
+          <a:solidFill>
+            <a:srgbClr val="DDE7EE"/>
+          </a:solidFill>
+          <a:ln/>
+        </p:spPr>
+      </p:sp>
+      <p:pic>
+        <p:nvPicPr>
+          <p:cNvPr id="6" name="Ikon FaCheck" descr="preencoded.png">    </p:cNvPr>
+          <p:cNvPicPr>
+            <a:picLocks noChangeAspect="1"/>
+          </p:cNvPicPr>
+          <p:nvPr/>
+        </p:nvPicPr>
+        <p:blipFill>
+          <a:blip r:embed="rId1"/>
+          <a:stretch>
+            <a:fillRect/>
+          </a:stretch>
+        </p:blipFill>
+        <p:spPr>
+          <a:xfrm>
+            <a:off x="647395" y="3893515"/>
+            <a:ext cx="213970" cy="213970"/>
+          </a:xfrm>
+          <a:prstGeom prst="rect">
+            <a:avLst/>
+          </a:prstGeom>
+        </p:spPr>
+      </p:pic>
+      <p:sp>
+        <p:nvSpPr>
+          <p:cNvPr id="7" name="Text 4"/>
+          <p:cNvSpPr txBox="1"/>
+          <p:nvPr/>
+        </p:nvSpPr>
+        <p:spPr>
+          <a:xfrm>
+            <a:off x="1143000" y="3776472"/>
+            <a:ext cx="4572000" cy="548640"/>
+          </a:xfrm>
+          <a:prstGeom prst="rect">
             <a:avLst/>
           </a:prstGeom>
           <a:noFill/>
-          <a:ln w="38100">
-            <a:solidFill>
-              <a:srgbClr val="C9D5DE"/>
-            </a:solidFill>
-            <a:prstDash val="solid"/>
-          </a:ln>
-        </p:spPr>
-      </p:sp>
-      <p:sp>
-        <p:nvSpPr>
-          <p:cNvPr id="5" name="Shape 3"/>
+          <a:ln/>
+        </p:spPr>
+        <p:txBody>
+          <a:bodyPr wrap="square" lIns="0" tIns="0" rIns="0" bIns="0" rtlCol="0" anchor="ctr"/>
+          <a:lstStyle/>
+          <a:p>
+            <a:pPr indent="0" marL="0">
+              <a:buNone/>
+            </a:pPr>
+            <a:r>
+              <a:rPr lang="en-US" sz="1500" dirty="0">
+                <a:solidFill>
+                  <a:srgbClr val="1B2A38"/>
+                </a:solidFill>
+                <a:latin typeface="Calibri" pitchFamily="34" charset="0"/>
+                <a:ea typeface="Calibri" pitchFamily="34" charset="-122"/>
+                <a:cs typeface="Calibri" pitchFamily="34" charset="-120"/>
+              </a:rPr>
+              <a:t>Moduler fra 1 000 kr per måned – kunden kan starte smått</a:t>
+            </a:r>
+            <a:endParaRPr lang="en-US" sz="1500" dirty="0"/>
+          </a:p>
+        </p:txBody>
+      </p:sp>
+      <p:sp>
+        <p:nvSpPr>
+          <p:cNvPr id="8" name="Ikon-sirkel"/>
           <p:cNvSpPr/>
           <p:nvPr/>
         </p:nvSpPr>
         <p:spPr>
           <a:xfrm>
-            <a:off x="1444752" y="2862072"/>
-            <a:ext cx="402336" cy="402336"/>
+            <a:off x="548640" y="4416552"/>
+            <a:ext cx="411480" cy="411480"/>
           </a:xfrm>
           <a:prstGeom prst="ellipse">
             <a:avLst/>
           </a:prstGeom>
           <a:solidFill>
-            <a:srgbClr val="0E7C86"/>
+            <a:srgbClr val="DDE7EE"/>
           </a:solidFill>
-          <a:ln w="31750">
-            <a:solidFill>
-              <a:srgbClr val="0E7C86"/>
-            </a:solidFill>
-            <a:prstDash val="solid"/>
-          </a:ln>
-        </p:spPr>
-      </p:sp>
-      <p:sp>
-        <p:nvSpPr>
-          <p:cNvPr id="6" name="Text 4"/>
+          <a:ln/>
+        </p:spPr>
+      </p:sp>
+      <p:pic>
+        <p:nvPicPr>
+          <p:cNvPr id="9" name="Ikon FaCheck" descr="preencoded.png">    </p:cNvPr>
+          <p:cNvPicPr>
+            <a:picLocks noChangeAspect="1"/>
+          </p:cNvPicPr>
+          <p:nvPr/>
+        </p:nvPicPr>
+        <p:blipFill>
+          <a:blip r:embed="rId2"/>
+          <a:stretch>
+            <a:fillRect/>
+          </a:stretch>
+        </p:blipFill>
+        <p:spPr>
+          <a:xfrm>
+            <a:off x="647395" y="4515307"/>
+            <a:ext cx="213970" cy="213970"/>
+          </a:xfrm>
+          <a:prstGeom prst="rect">
+            <a:avLst/>
+          </a:prstGeom>
+        </p:spPr>
+      </p:pic>
+      <p:sp>
+        <p:nvSpPr>
+          <p:cNvPr id="10" name="Text 6"/>
           <p:cNvSpPr txBox="1"/>
           <p:nvPr/>
         </p:nvSpPr>
         <p:spPr>
           <a:xfrm>
-            <a:off x="548640" y="2148840"/>
-            <a:ext cx="2194560" cy="548640"/>
+            <a:off x="1143000" y="4398264"/>
+            <a:ext cx="4572000" cy="548640"/>
           </a:xfrm>
           <a:prstGeom prst="rect">
             <a:avLst/>
@@ -3469,550 +3735,159 @@
           <a:ln/>
         </p:spPr>
         <p:txBody>
+          <a:bodyPr wrap="square" lIns="0" tIns="0" rIns="0" bIns="0" rtlCol="0" anchor="ctr"/>
+          <a:lstStyle/>
+          <a:p>
+            <a:pPr indent="0" marL="0">
+              <a:buNone/>
+            </a:pPr>
+            <a:r>
+              <a:rPr lang="en-US" sz="1500" dirty="0">
+                <a:solidFill>
+                  <a:srgbClr val="1B2A38"/>
+                </a:solidFill>
+                <a:latin typeface="Calibri" pitchFamily="34" charset="0"/>
+                <a:ea typeface="Calibri" pitchFamily="34" charset="-122"/>
+                <a:cs typeface="Calibri" pitchFamily="34" charset="-120"/>
+              </a:rPr>
+              <a:t>Vokser med flere fartøy og flere moduler hos samme rederi</a:t>
+            </a:r>
+            <a:endParaRPr lang="en-US" sz="1500" dirty="0"/>
+          </a:p>
+        </p:txBody>
+      </p:sp>
+      <p:sp>
+        <p:nvSpPr>
+          <p:cNvPr id="11" name="Ikon-sirkel"/>
+          <p:cNvSpPr/>
+          <p:nvPr/>
+        </p:nvSpPr>
+        <p:spPr>
+          <a:xfrm>
+            <a:off x="548640" y="5038344"/>
+            <a:ext cx="411480" cy="411480"/>
+          </a:xfrm>
+          <a:prstGeom prst="ellipse">
+            <a:avLst/>
+          </a:prstGeom>
+          <a:solidFill>
+            <a:srgbClr val="DDE7EE"/>
+          </a:solidFill>
+          <a:ln/>
+        </p:spPr>
+      </p:sp>
+      <p:pic>
+        <p:nvPicPr>
+          <p:cNvPr id="12" name="Ikon FaCheck" descr="preencoded.png">    </p:cNvPr>
+          <p:cNvPicPr>
+            <a:picLocks noChangeAspect="1"/>
+          </p:cNvPicPr>
+          <p:nvPr/>
+        </p:nvPicPr>
+        <p:blipFill>
+          <a:blip r:embed="rId3"/>
+          <a:stretch>
+            <a:fillRect/>
+          </a:stretch>
+        </p:blipFill>
+        <p:spPr>
+          <a:xfrm>
+            <a:off x="647395" y="5137099"/>
+            <a:ext cx="213970" cy="213970"/>
+          </a:xfrm>
+          <a:prstGeom prst="rect">
+            <a:avLst/>
+          </a:prstGeom>
+        </p:spPr>
+      </p:pic>
+      <p:sp>
+        <p:nvSpPr>
+          <p:cNvPr id="13" name="Text 8"/>
+          <p:cNvSpPr txBox="1"/>
+          <p:nvPr/>
+        </p:nvSpPr>
+        <p:spPr>
+          <a:xfrm>
+            <a:off x="1143000" y="5020056"/>
+            <a:ext cx="4572000" cy="548640"/>
+          </a:xfrm>
+          <a:prstGeom prst="rect">
+            <a:avLst/>
+          </a:prstGeom>
+          <a:noFill/>
+          <a:ln/>
+        </p:spPr>
+        <p:txBody>
+          <a:bodyPr wrap="square" lIns="0" tIns="0" rIns="0" bIns="0" rtlCol="0" anchor="ctr"/>
+          <a:lstStyle/>
+          <a:p>
+            <a:pPr indent="0" marL="0">
+              <a:buNone/>
+            </a:pPr>
+            <a:r>
+              <a:rPr lang="en-US" sz="1500" dirty="0">
+                <a:solidFill>
+                  <a:srgbClr val="1B2A38"/>
+                </a:solidFill>
+                <a:latin typeface="Calibri" pitchFamily="34" charset="0"/>
+                <a:ea typeface="Calibri" pitchFamily="34" charset="-122"/>
+                <a:cs typeface="Calibri" pitchFamily="34" charset="-120"/>
+              </a:rPr>
+              <a:t>Vedlikeholdssystemer byttes sjelden når de først er tatt i bruk</a:t>
+            </a:r>
+            <a:endParaRPr lang="en-US" sz="1500" dirty="0"/>
+          </a:p>
+        </p:txBody>
+      </p:sp>
+      <p:graphicFrame>
+        <p:nvGraphicFramePr>
+          <p:cNvPr id="14" name="Chart 0" descr=""/>
+          <p:cNvGraphicFramePr/>
+          <p:nvPr/>
+        </p:nvGraphicFramePr>
+        <p:xfrm>
+          <a:off x="6035040" y="1783080"/>
+          <a:ext cx="5608015" cy="4023360"/>
+        </p:xfrm>
+        <a:graphic xmlns:a="http://schemas.openxmlformats.org/drawingml/2006/main">
+          <a:graphicData uri="http://schemas.openxmlformats.org/drawingml/2006/chart">
+            <c:chart xmlns:c="http://schemas.openxmlformats.org/drawingml/2006/chart" r:id="rId4"/>
+          </a:graphicData>
+        </a:graphic>
+      </p:graphicFrame>
+      <p:sp>
+        <p:nvSpPr>
+          <p:cNvPr id="15" name="Text 9"/>
+          <p:cNvSpPr txBox="1"/>
+          <p:nvPr/>
+        </p:nvSpPr>
+        <p:spPr>
+          <a:xfrm>
+            <a:off x="548640" y="5989320"/>
+            <a:ext cx="11094415" cy="320040"/>
+          </a:xfrm>
+          <a:prstGeom prst="rect">
+            <a:avLst/>
+          </a:prstGeom>
+          <a:noFill/>
+          <a:ln/>
+        </p:spPr>
+        <p:txBody>
           <a:bodyPr wrap="square" lIns="0" tIns="0" rIns="0" bIns="0" rtlCol="0" anchor="b"/>
           <a:lstStyle/>
           <a:p>
-            <a:pPr algn="ctr" indent="0" marL="0">
-              <a:buNone/>
-            </a:pPr>
-            <a:r>
-              <a:rPr lang="en-US" sz="1400" b="1" spc="100" kern="0" dirty="0">
-                <a:solidFill>
-                  <a:srgbClr val="0E7C86"/>
-                </a:solidFill>
-                <a:latin typeface="Calibri" pitchFamily="34" charset="0"/>
-                <a:ea typeface="Calibri" pitchFamily="34" charset="-122"/>
-                <a:cs typeface="Calibri" pitchFamily="34" charset="-120"/>
-              </a:rPr>
-              <a:t>FERDIG</a:t>
-            </a:r>
-            <a:endParaRPr lang="en-US" sz="1400" dirty="0"/>
-          </a:p>
-        </p:txBody>
-      </p:sp>
-      <p:sp>
-        <p:nvSpPr>
-          <p:cNvPr id="7" name="Text 5"/>
-          <p:cNvSpPr txBox="1"/>
-          <p:nvPr/>
-        </p:nvSpPr>
-        <p:spPr>
-          <a:xfrm>
-            <a:off x="548640" y="3474720"/>
-            <a:ext cx="2194560" cy="1188720"/>
-          </a:xfrm>
-          <a:prstGeom prst="rect">
-            <a:avLst/>
-          </a:prstGeom>
-          <a:noFill/>
-          <a:ln/>
-        </p:spPr>
-        <p:txBody>
-          <a:bodyPr wrap="square" lIns="0" tIns="0" rIns="0" bIns="0" rtlCol="0" anchor="t"/>
-          <a:lstStyle/>
-          <a:p>
-            <a:pPr algn="ctr" indent="0" marL="0">
-              <a:buNone/>
-            </a:pPr>
-            <a:r>
-              <a:rPr lang="en-US" sz="1500" dirty="0">
-                <a:solidFill>
-                  <a:srgbClr val="1B2A38"/>
-                </a:solidFill>
-                <a:latin typeface="Calibri" pitchFamily="34" charset="0"/>
-                <a:ea typeface="Calibri" pitchFamily="34" charset="-122"/>
-                <a:cs typeface="Calibri" pitchFamily="34" charset="-120"/>
-              </a:rPr>
-              <a:t>MVP med 14 moduler og KI-assistent</a:t>
-            </a:r>
-            <a:endParaRPr lang="en-US" sz="1500" dirty="0"/>
-          </a:p>
-        </p:txBody>
-      </p:sp>
-      <p:sp>
-        <p:nvSpPr>
-          <p:cNvPr id="8" name="Shape 6"/>
-          <p:cNvSpPr/>
-          <p:nvPr/>
-        </p:nvSpPr>
-        <p:spPr>
-          <a:xfrm>
-            <a:off x="3669716" y="2862072"/>
-            <a:ext cx="402336" cy="402336"/>
-          </a:xfrm>
-          <a:prstGeom prst="ellipse">
-            <a:avLst/>
-          </a:prstGeom>
-          <a:solidFill>
-            <a:srgbClr val="0E7C86"/>
-          </a:solidFill>
-          <a:ln w="31750">
-            <a:solidFill>
-              <a:srgbClr val="0E7C86"/>
-            </a:solidFill>
-            <a:prstDash val="solid"/>
-          </a:ln>
-        </p:spPr>
-      </p:sp>
-      <p:sp>
-        <p:nvSpPr>
-          <p:cNvPr id="9" name="Text 7"/>
-          <p:cNvSpPr txBox="1"/>
-          <p:nvPr/>
-        </p:nvSpPr>
-        <p:spPr>
-          <a:xfrm>
-            <a:off x="2773604" y="2148840"/>
-            <a:ext cx="2194560" cy="548640"/>
-          </a:xfrm>
-          <a:prstGeom prst="rect">
-            <a:avLst/>
-          </a:prstGeom>
-          <a:noFill/>
-          <a:ln/>
-        </p:spPr>
-        <p:txBody>
-          <a:bodyPr wrap="square" lIns="0" tIns="0" rIns="0" bIns="0" rtlCol="0" anchor="b"/>
-          <a:lstStyle/>
-          <a:p>
-            <a:pPr algn="ctr" indent="0" marL="0">
-              <a:buNone/>
-            </a:pPr>
-            <a:r>
-              <a:rPr lang="en-US" sz="1400" b="1" spc="100" kern="0" dirty="0">
-                <a:solidFill>
-                  <a:srgbClr val="0E7C86"/>
-                </a:solidFill>
-                <a:latin typeface="Calibri" pitchFamily="34" charset="0"/>
-                <a:ea typeface="Calibri" pitchFamily="34" charset="-122"/>
-                <a:cs typeface="Calibri" pitchFamily="34" charset="-120"/>
-              </a:rPr>
-              <a:t>NÅ</a:t>
-            </a:r>
-            <a:endParaRPr lang="en-US" sz="1400" dirty="0"/>
-          </a:p>
-        </p:txBody>
-      </p:sp>
-      <p:sp>
-        <p:nvSpPr>
-          <p:cNvPr id="10" name="Text 8"/>
-          <p:cNvSpPr txBox="1"/>
-          <p:nvPr/>
-        </p:nvSpPr>
-        <p:spPr>
-          <a:xfrm>
-            <a:off x="2773604" y="3474720"/>
-            <a:ext cx="2194560" cy="1188720"/>
-          </a:xfrm>
-          <a:prstGeom prst="rect">
-            <a:avLst/>
-          </a:prstGeom>
-          <a:noFill/>
-          <a:ln/>
-        </p:spPr>
-        <p:txBody>
-          <a:bodyPr wrap="square" lIns="0" tIns="0" rIns="0" bIns="0" rtlCol="0" anchor="t"/>
-          <a:lstStyle/>
-          <a:p>
-            <a:pPr algn="ctr" indent="0" marL="0">
-              <a:buNone/>
-            </a:pPr>
-            <a:r>
-              <a:rPr lang="en-US" sz="1500" dirty="0">
-                <a:solidFill>
-                  <a:srgbClr val="1B2A38"/>
-                </a:solidFill>
-                <a:latin typeface="Calibri" pitchFamily="34" charset="0"/>
-                <a:ea typeface="Calibri" pitchFamily="34" charset="-122"/>
-                <a:cs typeface="Calibri" pitchFamily="34" charset="-120"/>
-              </a:rPr>
-              <a:t>Rederier i hele Norge kontaktet. Flere har vist interesse.</a:t>
-            </a:r>
-            <a:endParaRPr lang="en-US" sz="1500" dirty="0"/>
-          </a:p>
-        </p:txBody>
-      </p:sp>
-      <p:sp>
-        <p:nvSpPr>
-          <p:cNvPr id="11" name="Shape 9"/>
-          <p:cNvSpPr/>
-          <p:nvPr/>
-        </p:nvSpPr>
-        <p:spPr>
-          <a:xfrm>
-            <a:off x="5894680" y="2862072"/>
-            <a:ext cx="402336" cy="402336"/>
-          </a:xfrm>
-          <a:prstGeom prst="ellipse">
-            <a:avLst/>
-          </a:prstGeom>
-          <a:solidFill>
-            <a:srgbClr val="FFFFFF"/>
-          </a:solidFill>
-          <a:ln w="31750">
-            <a:solidFill>
-              <a:srgbClr val="0E7C86"/>
-            </a:solidFill>
-            <a:prstDash val="solid"/>
-          </a:ln>
-        </p:spPr>
-      </p:sp>
-      <p:sp>
-        <p:nvSpPr>
-          <p:cNvPr id="12" name="Text 10"/>
-          <p:cNvSpPr txBox="1"/>
-          <p:nvPr/>
-        </p:nvSpPr>
-        <p:spPr>
-          <a:xfrm>
-            <a:off x="4998568" y="2148840"/>
-            <a:ext cx="2194560" cy="548640"/>
-          </a:xfrm>
-          <a:prstGeom prst="rect">
-            <a:avLst/>
-          </a:prstGeom>
-          <a:noFill/>
-          <a:ln/>
-        </p:spPr>
-        <p:txBody>
-          <a:bodyPr wrap="square" lIns="0" tIns="0" rIns="0" bIns="0" rtlCol="0" anchor="b"/>
-          <a:lstStyle/>
-          <a:p>
-            <a:pPr algn="ctr" indent="0" marL="0">
-              <a:buNone/>
-            </a:pPr>
-            <a:r>
-              <a:rPr lang="en-US" sz="1400" b="1" spc="100" kern="0" dirty="0">
-                <a:solidFill>
-                  <a:srgbClr val="0E7C86"/>
-                </a:solidFill>
-                <a:latin typeface="Calibri" pitchFamily="34" charset="0"/>
-                <a:ea typeface="Calibri" pitchFamily="34" charset="-122"/>
-                <a:cs typeface="Calibri" pitchFamily="34" charset="-120"/>
-              </a:rPr>
-              <a:t>NESTE</a:t>
-            </a:r>
-            <a:endParaRPr lang="en-US" sz="1400" dirty="0"/>
-          </a:p>
-        </p:txBody>
-      </p:sp>
-      <p:sp>
-        <p:nvSpPr>
-          <p:cNvPr id="13" name="Text 11"/>
-          <p:cNvSpPr txBox="1"/>
-          <p:nvPr/>
-        </p:nvSpPr>
-        <p:spPr>
-          <a:xfrm>
-            <a:off x="4998568" y="3474720"/>
-            <a:ext cx="2194560" cy="1188720"/>
-          </a:xfrm>
-          <a:prstGeom prst="rect">
-            <a:avLst/>
-          </a:prstGeom>
-          <a:noFill/>
-          <a:ln/>
-        </p:spPr>
-        <p:txBody>
-          <a:bodyPr wrap="square" lIns="0" tIns="0" rIns="0" bIns="0" rtlCol="0" anchor="t"/>
-          <a:lstStyle/>
-          <a:p>
-            <a:pPr algn="ctr" indent="0" marL="0">
-              <a:buNone/>
-            </a:pPr>
-            <a:r>
-              <a:rPr lang="en-US" sz="1500" dirty="0">
-                <a:solidFill>
-                  <a:srgbClr val="1B2A38"/>
-                </a:solidFill>
-                <a:latin typeface="Calibri" pitchFamily="34" charset="0"/>
-                <a:ea typeface="Calibri" pitchFamily="34" charset="-122"/>
-                <a:cs typeface="Calibri" pitchFamily="34" charset="-120"/>
-              </a:rPr>
-              <a:t>Signerte intensjonsavtaler og neste støtterunde fra Innovasjon Norge</a:t>
-            </a:r>
-            <a:endParaRPr lang="en-US" sz="1500" dirty="0"/>
-          </a:p>
-        </p:txBody>
-      </p:sp>
-      <p:sp>
-        <p:nvSpPr>
-          <p:cNvPr id="14" name="Shape 12"/>
-          <p:cNvSpPr/>
-          <p:nvPr/>
-        </p:nvSpPr>
-        <p:spPr>
-          <a:xfrm>
-            <a:off x="8119643" y="2862072"/>
-            <a:ext cx="402336" cy="402336"/>
-          </a:xfrm>
-          <a:prstGeom prst="ellipse">
-            <a:avLst/>
-          </a:prstGeom>
-          <a:solidFill>
-            <a:srgbClr val="FFFFFF"/>
-          </a:solidFill>
-          <a:ln w="31750">
-            <a:solidFill>
-              <a:srgbClr val="0E7C86"/>
-            </a:solidFill>
-            <a:prstDash val="solid"/>
-          </a:ln>
-        </p:spPr>
-      </p:sp>
-      <p:sp>
-        <p:nvSpPr>
-          <p:cNvPr id="15" name="Text 13"/>
-          <p:cNvSpPr txBox="1"/>
-          <p:nvPr/>
-        </p:nvSpPr>
-        <p:spPr>
-          <a:xfrm>
-            <a:off x="7223531" y="2148840"/>
-            <a:ext cx="2194560" cy="548640"/>
-          </a:xfrm>
-          <a:prstGeom prst="rect">
-            <a:avLst/>
-          </a:prstGeom>
-          <a:noFill/>
-          <a:ln/>
-        </p:spPr>
-        <p:txBody>
-          <a:bodyPr wrap="square" lIns="0" tIns="0" rIns="0" bIns="0" rtlCol="0" anchor="b"/>
-          <a:lstStyle/>
-          <a:p>
-            <a:pPr algn="ctr" indent="0" marL="0">
-              <a:buNone/>
-            </a:pPr>
-            <a:r>
-              <a:rPr lang="en-US" sz="1400" b="1" spc="100" kern="0" dirty="0">
-                <a:solidFill>
-                  <a:srgbClr val="0E7C86"/>
-                </a:solidFill>
-                <a:latin typeface="Calibri" pitchFamily="34" charset="0"/>
-                <a:ea typeface="Calibri" pitchFamily="34" charset="-122"/>
-                <a:cs typeface="Calibri" pitchFamily="34" charset="-120"/>
-              </a:rPr>
-              <a:t>DERETTER</a:t>
-            </a:r>
-            <a:endParaRPr lang="en-US" sz="1400" dirty="0"/>
-          </a:p>
-        </p:txBody>
-      </p:sp>
-      <p:sp>
-        <p:nvSpPr>
-          <p:cNvPr id="16" name="Text 14"/>
-          <p:cNvSpPr txBox="1"/>
-          <p:nvPr/>
-        </p:nvSpPr>
-        <p:spPr>
-          <a:xfrm>
-            <a:off x="7223531" y="3474720"/>
-            <a:ext cx="2194560" cy="1188720"/>
-          </a:xfrm>
-          <a:prstGeom prst="rect">
-            <a:avLst/>
-          </a:prstGeom>
-          <a:noFill/>
-          <a:ln/>
-        </p:spPr>
-        <p:txBody>
-          <a:bodyPr wrap="square" lIns="0" tIns="0" rIns="0" bIns="0" rtlCol="0" anchor="t"/>
-          <a:lstStyle/>
-          <a:p>
-            <a:pPr algn="ctr" indent="0" marL="0">
-              <a:buNone/>
-            </a:pPr>
-            <a:r>
-              <a:rPr lang="en-US" sz="1500" dirty="0">
-                <a:solidFill>
-                  <a:srgbClr val="1B2A38"/>
-                </a:solidFill>
-                <a:latin typeface="Calibri" pitchFamily="34" charset="0"/>
-                <a:ea typeface="Calibri" pitchFamily="34" charset="-122"/>
-                <a:cs typeface="Calibri" pitchFamily="34" charset="-120"/>
-              </a:rPr>
-              <a:t>Pilot på første fartøy og første betalende rederi</a:t>
-            </a:r>
-            <a:endParaRPr lang="en-US" sz="1500" dirty="0"/>
-          </a:p>
-        </p:txBody>
-      </p:sp>
-      <p:sp>
-        <p:nvSpPr>
-          <p:cNvPr id="17" name="Shape 15"/>
-          <p:cNvSpPr/>
-          <p:nvPr/>
-        </p:nvSpPr>
-        <p:spPr>
-          <a:xfrm>
-            <a:off x="10344607" y="2862072"/>
-            <a:ext cx="402336" cy="402336"/>
-          </a:xfrm>
-          <a:prstGeom prst="ellipse">
-            <a:avLst/>
-          </a:prstGeom>
-          <a:solidFill>
-            <a:srgbClr val="FFFFFF"/>
-          </a:solidFill>
-          <a:ln w="31750">
-            <a:solidFill>
-              <a:srgbClr val="0E7C86"/>
-            </a:solidFill>
-            <a:prstDash val="solid"/>
-          </a:ln>
-        </p:spPr>
-      </p:sp>
-      <p:sp>
-        <p:nvSpPr>
-          <p:cNvPr id="18" name="Text 16"/>
-          <p:cNvSpPr txBox="1"/>
-          <p:nvPr/>
-        </p:nvSpPr>
-        <p:spPr>
-          <a:xfrm>
-            <a:off x="9448495" y="2148840"/>
-            <a:ext cx="2194560" cy="548640"/>
-          </a:xfrm>
-          <a:prstGeom prst="rect">
-            <a:avLst/>
-          </a:prstGeom>
-          <a:noFill/>
-          <a:ln/>
-        </p:spPr>
-        <p:txBody>
-          <a:bodyPr wrap="square" lIns="0" tIns="0" rIns="0" bIns="0" rtlCol="0" anchor="b"/>
-          <a:lstStyle/>
-          <a:p>
-            <a:pPr algn="ctr" indent="0" marL="0">
-              <a:buNone/>
-            </a:pPr>
-            <a:r>
-              <a:rPr lang="en-US" sz="1400" b="1" spc="100" kern="0" dirty="0">
-                <a:solidFill>
-                  <a:srgbClr val="0E7C86"/>
-                </a:solidFill>
-                <a:latin typeface="Calibri" pitchFamily="34" charset="0"/>
-                <a:ea typeface="Calibri" pitchFamily="34" charset="-122"/>
-                <a:cs typeface="Calibri" pitchFamily="34" charset="-120"/>
-              </a:rPr>
-              <a:t>MÅL</a:t>
-            </a:r>
-            <a:endParaRPr lang="en-US" sz="1400" dirty="0"/>
-          </a:p>
-        </p:txBody>
-      </p:sp>
-      <p:sp>
-        <p:nvSpPr>
-          <p:cNvPr id="19" name="Text 17"/>
-          <p:cNvSpPr txBox="1"/>
-          <p:nvPr/>
-        </p:nvSpPr>
-        <p:spPr>
-          <a:xfrm>
-            <a:off x="9448495" y="3474720"/>
-            <a:ext cx="2194560" cy="1188720"/>
-          </a:xfrm>
-          <a:prstGeom prst="rect">
-            <a:avLst/>
-          </a:prstGeom>
-          <a:noFill/>
-          <a:ln/>
-        </p:spPr>
-        <p:txBody>
-          <a:bodyPr wrap="square" lIns="0" tIns="0" rIns="0" bIns="0" rtlCol="0" anchor="t"/>
-          <a:lstStyle/>
-          <a:p>
-            <a:pPr algn="ctr" indent="0" marL="0">
-              <a:buNone/>
-            </a:pPr>
-            <a:r>
-              <a:rPr lang="en-US" sz="1500" dirty="0">
-                <a:solidFill>
-                  <a:srgbClr val="1B2A38"/>
-                </a:solidFill>
-                <a:latin typeface="Calibri" pitchFamily="34" charset="0"/>
-                <a:ea typeface="Calibri" pitchFamily="34" charset="-122"/>
-                <a:cs typeface="Calibri" pitchFamily="34" charset="-120"/>
-              </a:rPr>
-              <a:t>Ferdig produkt med DNV-godkjenning</a:t>
-            </a:r>
-            <a:endParaRPr lang="en-US" sz="1500" dirty="0"/>
-          </a:p>
-        </p:txBody>
-      </p:sp>
-      <p:sp>
-        <p:nvSpPr>
-          <p:cNvPr id="20" name="Kort"/>
-          <p:cNvSpPr/>
-          <p:nvPr/>
-        </p:nvSpPr>
-        <p:spPr>
-          <a:xfrm>
-            <a:off x="548640" y="4846320"/>
-            <a:ext cx="11094415" cy="868680"/>
-          </a:xfrm>
-          <a:prstGeom prst="roundRect">
-            <a:avLst>
-              <a:gd name="adj" fmla="val 12632"/>
-            </a:avLst>
-          </a:prstGeom>
-          <a:solidFill>
-            <a:srgbClr val="EEF3F6"/>
-          </a:solidFill>
-          <a:ln/>
-        </p:spPr>
-      </p:sp>
-      <p:sp>
-        <p:nvSpPr>
-          <p:cNvPr id="21" name="Text 19"/>
-          <p:cNvSpPr txBox="1"/>
-          <p:nvPr/>
-        </p:nvSpPr>
-        <p:spPr>
-          <a:xfrm>
-            <a:off x="868680" y="4846320"/>
-            <a:ext cx="10454335" cy="868680"/>
-          </a:xfrm>
-          <a:prstGeom prst="rect">
-            <a:avLst/>
-          </a:prstGeom>
-          <a:noFill/>
-          <a:ln/>
-        </p:spPr>
-        <p:txBody>
-          <a:bodyPr wrap="square" lIns="0" tIns="0" rIns="0" bIns="0" rtlCol="0" anchor="ctr"/>
-          <a:lstStyle/>
-          <a:p>
             <a:pPr indent="0" marL="0">
               <a:buNone/>
             </a:pPr>
             <a:r>
-              <a:rPr lang="en-US" sz="1600" b="1" dirty="0">
-                <a:solidFill>
-                  <a:srgbClr val="0B1F33"/>
-                </a:solidFill>
-                <a:latin typeface="Calibri" pitchFamily="34" charset="0"/>
-                <a:ea typeface="Calibri" pitchFamily="34" charset="-122"/>
-                <a:cs typeface="Calibri" pitchFamily="34" charset="-120"/>
-              </a:rPr>
-              <a:t>Målet for de neste 18 månedene: </a:t>
-            </a:r>
-            <a:pPr indent="0" marL="0">
-              <a:buNone/>
-            </a:pPr>
-            <a:r>
-              <a:rPr lang="en-US" sz="1600" dirty="0">
-                <a:solidFill>
-                  <a:srgbClr val="1B2A38"/>
-                </a:solidFill>
-                <a:latin typeface="Calibri" pitchFamily="34" charset="0"/>
-                <a:ea typeface="Calibri" pitchFamily="34" charset="-122"/>
-                <a:cs typeface="Calibri" pitchFamily="34" charset="-120"/>
-              </a:rPr>
-              <a:t>signerte intensjonsavtaler, de første betalende rederiene og et ferdig produkt godkjent av DNV.</a:t>
-            </a:r>
-            <a:endParaRPr lang="en-US" sz="1600" dirty="0"/>
+              <a:rPr lang="en-US" sz="1100" dirty="0">
+                <a:solidFill>
+                  <a:srgbClr val="5B6B7A"/>
+                </a:solidFill>
+              </a:rPr>
+              <a:t>Regneeksempler, ikke prognose. 260 fartøy tilsvarer hele det norske markedet over 28 meter.</a:t>
+            </a:r>
+            <a:endParaRPr lang="en-US" sz="1100" dirty="0"/>
           </a:p>
         </p:txBody>
       </p:sp>
@@ -4124,7 +3999,7 @@
                 <a:ea typeface="Calibri" pitchFamily="34" charset="-122"/>
                 <a:cs typeface="Calibri" pitchFamily="34" charset="-120"/>
               </a:rPr>
-              <a:t>TEAMET</a:t>
+              <a:t>STATUS OG PLAN</a:t>
             </a:r>
             <a:endParaRPr lang="en-US" sz="1200" dirty="0"/>
           </a:p>
@@ -4165,7 +4040,7 @@
                 <a:ea typeface="Arial" pitchFamily="34" charset="-122"/>
                 <a:cs typeface="Arial" pitchFamily="34" charset="-120"/>
               </a:rPr>
-              <a:t>Vi har stått i maskinrommet selv</a:t>
+              <a:t>MVP-en er klar. Nå skal den i drift hos de første rederiene</a:t>
             </a:r>
             <a:endParaRPr lang="en-US" sz="3000" dirty="0"/>
           </a:p>
@@ -4173,18 +4048,556 @@
       </p:sp>
       <p:sp>
         <p:nvSpPr>
-          <p:cNvPr id="4" name="Kort"/>
+          <p:cNvPr id="4" name="Shape 2"/>
           <p:cNvSpPr/>
           <p:nvPr/>
         </p:nvSpPr>
         <p:spPr>
           <a:xfrm>
-            <a:off x="548640" y="1828800"/>
-            <a:ext cx="6400800" cy="1143000"/>
+            <a:off x="1645920" y="3063240"/>
+            <a:ext cx="8899855" cy="0"/>
+          </a:xfrm>
+          <a:prstGeom prst="line">
+            <a:avLst/>
+          </a:prstGeom>
+          <a:noFill/>
+          <a:ln w="38100">
+            <a:solidFill>
+              <a:srgbClr val="C9D5DE"/>
+            </a:solidFill>
+            <a:prstDash val="solid"/>
+          </a:ln>
+        </p:spPr>
+      </p:sp>
+      <p:sp>
+        <p:nvSpPr>
+          <p:cNvPr id="5" name="Shape 3"/>
+          <p:cNvSpPr/>
+          <p:nvPr/>
+        </p:nvSpPr>
+        <p:spPr>
+          <a:xfrm>
+            <a:off x="1444752" y="2862072"/>
+            <a:ext cx="402336" cy="402336"/>
+          </a:xfrm>
+          <a:prstGeom prst="ellipse">
+            <a:avLst/>
+          </a:prstGeom>
+          <a:solidFill>
+            <a:srgbClr val="0E7C86"/>
+          </a:solidFill>
+          <a:ln w="31750">
+            <a:solidFill>
+              <a:srgbClr val="0E7C86"/>
+            </a:solidFill>
+            <a:prstDash val="solid"/>
+          </a:ln>
+        </p:spPr>
+      </p:sp>
+      <p:sp>
+        <p:nvSpPr>
+          <p:cNvPr id="6" name="Text 4"/>
+          <p:cNvSpPr txBox="1"/>
+          <p:nvPr/>
+        </p:nvSpPr>
+        <p:spPr>
+          <a:xfrm>
+            <a:off x="548640" y="2148840"/>
+            <a:ext cx="2194560" cy="548640"/>
+          </a:xfrm>
+          <a:prstGeom prst="rect">
+            <a:avLst/>
+          </a:prstGeom>
+          <a:noFill/>
+          <a:ln/>
+        </p:spPr>
+        <p:txBody>
+          <a:bodyPr wrap="square" lIns="0" tIns="0" rIns="0" bIns="0" rtlCol="0" anchor="b"/>
+          <a:lstStyle/>
+          <a:p>
+            <a:pPr algn="ctr" indent="0" marL="0">
+              <a:buNone/>
+            </a:pPr>
+            <a:r>
+              <a:rPr lang="en-US" sz="1400" b="1" spc="100" kern="0" dirty="0">
+                <a:solidFill>
+                  <a:srgbClr val="0E7C86"/>
+                </a:solidFill>
+                <a:latin typeface="Calibri" pitchFamily="34" charset="0"/>
+                <a:ea typeface="Calibri" pitchFamily="34" charset="-122"/>
+                <a:cs typeface="Calibri" pitchFamily="34" charset="-120"/>
+              </a:rPr>
+              <a:t>FERDIG</a:t>
+            </a:r>
+            <a:endParaRPr lang="en-US" sz="1400" dirty="0"/>
+          </a:p>
+        </p:txBody>
+      </p:sp>
+      <p:sp>
+        <p:nvSpPr>
+          <p:cNvPr id="7" name="Text 5"/>
+          <p:cNvSpPr txBox="1"/>
+          <p:nvPr/>
+        </p:nvSpPr>
+        <p:spPr>
+          <a:xfrm>
+            <a:off x="548640" y="3474720"/>
+            <a:ext cx="2194560" cy="1188720"/>
+          </a:xfrm>
+          <a:prstGeom prst="rect">
+            <a:avLst/>
+          </a:prstGeom>
+          <a:noFill/>
+          <a:ln/>
+        </p:spPr>
+        <p:txBody>
+          <a:bodyPr wrap="square" lIns="0" tIns="0" rIns="0" bIns="0" rtlCol="0" anchor="t"/>
+          <a:lstStyle/>
+          <a:p>
+            <a:pPr algn="ctr" indent="0" marL="0">
+              <a:buNone/>
+            </a:pPr>
+            <a:r>
+              <a:rPr lang="en-US" sz="1500" dirty="0">
+                <a:solidFill>
+                  <a:srgbClr val="1B2A38"/>
+                </a:solidFill>
+                <a:latin typeface="Calibri" pitchFamily="34" charset="0"/>
+                <a:ea typeface="Calibri" pitchFamily="34" charset="-122"/>
+                <a:cs typeface="Calibri" pitchFamily="34" charset="-120"/>
+              </a:rPr>
+              <a:t>MVP med 14 moduler og KI-assistent</a:t>
+            </a:r>
+            <a:endParaRPr lang="en-US" sz="1500" dirty="0"/>
+          </a:p>
+        </p:txBody>
+      </p:sp>
+      <p:sp>
+        <p:nvSpPr>
+          <p:cNvPr id="8" name="Shape 6"/>
+          <p:cNvSpPr/>
+          <p:nvPr/>
+        </p:nvSpPr>
+        <p:spPr>
+          <a:xfrm>
+            <a:off x="3669716" y="2862072"/>
+            <a:ext cx="402336" cy="402336"/>
+          </a:xfrm>
+          <a:prstGeom prst="ellipse">
+            <a:avLst/>
+          </a:prstGeom>
+          <a:solidFill>
+            <a:srgbClr val="0E7C86"/>
+          </a:solidFill>
+          <a:ln w="31750">
+            <a:solidFill>
+              <a:srgbClr val="0E7C86"/>
+            </a:solidFill>
+            <a:prstDash val="solid"/>
+          </a:ln>
+        </p:spPr>
+      </p:sp>
+      <p:sp>
+        <p:nvSpPr>
+          <p:cNvPr id="9" name="Text 7"/>
+          <p:cNvSpPr txBox="1"/>
+          <p:nvPr/>
+        </p:nvSpPr>
+        <p:spPr>
+          <a:xfrm>
+            <a:off x="2773604" y="2148840"/>
+            <a:ext cx="2194560" cy="548640"/>
+          </a:xfrm>
+          <a:prstGeom prst="rect">
+            <a:avLst/>
+          </a:prstGeom>
+          <a:noFill/>
+          <a:ln/>
+        </p:spPr>
+        <p:txBody>
+          <a:bodyPr wrap="square" lIns="0" tIns="0" rIns="0" bIns="0" rtlCol="0" anchor="b"/>
+          <a:lstStyle/>
+          <a:p>
+            <a:pPr algn="ctr" indent="0" marL="0">
+              <a:buNone/>
+            </a:pPr>
+            <a:r>
+              <a:rPr lang="en-US" sz="1400" b="1" spc="100" kern="0" dirty="0">
+                <a:solidFill>
+                  <a:srgbClr val="0E7C86"/>
+                </a:solidFill>
+                <a:latin typeface="Calibri" pitchFamily="34" charset="0"/>
+                <a:ea typeface="Calibri" pitchFamily="34" charset="-122"/>
+                <a:cs typeface="Calibri" pitchFamily="34" charset="-120"/>
+              </a:rPr>
+              <a:t>NÅ</a:t>
+            </a:r>
+            <a:endParaRPr lang="en-US" sz="1400" dirty="0"/>
+          </a:p>
+        </p:txBody>
+      </p:sp>
+      <p:sp>
+        <p:nvSpPr>
+          <p:cNvPr id="10" name="Text 8"/>
+          <p:cNvSpPr txBox="1"/>
+          <p:nvPr/>
+        </p:nvSpPr>
+        <p:spPr>
+          <a:xfrm>
+            <a:off x="2773604" y="3474720"/>
+            <a:ext cx="2194560" cy="1188720"/>
+          </a:xfrm>
+          <a:prstGeom prst="rect">
+            <a:avLst/>
+          </a:prstGeom>
+          <a:noFill/>
+          <a:ln/>
+        </p:spPr>
+        <p:txBody>
+          <a:bodyPr wrap="square" lIns="0" tIns="0" rIns="0" bIns="0" rtlCol="0" anchor="t"/>
+          <a:lstStyle/>
+          <a:p>
+            <a:pPr algn="ctr" indent="0" marL="0">
+              <a:buNone/>
+            </a:pPr>
+            <a:r>
+              <a:rPr lang="en-US" sz="1500" dirty="0">
+                <a:solidFill>
+                  <a:srgbClr val="1B2A38"/>
+                </a:solidFill>
+                <a:latin typeface="Calibri" pitchFamily="34" charset="0"/>
+                <a:ea typeface="Calibri" pitchFamily="34" charset="-122"/>
+                <a:cs typeface="Calibri" pitchFamily="34" charset="-120"/>
+              </a:rPr>
+              <a:t>Rederier i hele Norge kontaktet. Flere har vist interesse.</a:t>
+            </a:r>
+            <a:endParaRPr lang="en-US" sz="1500" dirty="0"/>
+          </a:p>
+        </p:txBody>
+      </p:sp>
+      <p:sp>
+        <p:nvSpPr>
+          <p:cNvPr id="11" name="Shape 9"/>
+          <p:cNvSpPr/>
+          <p:nvPr/>
+        </p:nvSpPr>
+        <p:spPr>
+          <a:xfrm>
+            <a:off x="5894680" y="2862072"/>
+            <a:ext cx="402336" cy="402336"/>
+          </a:xfrm>
+          <a:prstGeom prst="ellipse">
+            <a:avLst/>
+          </a:prstGeom>
+          <a:solidFill>
+            <a:srgbClr val="FFFFFF"/>
+          </a:solidFill>
+          <a:ln w="31750">
+            <a:solidFill>
+              <a:srgbClr val="0E7C86"/>
+            </a:solidFill>
+            <a:prstDash val="solid"/>
+          </a:ln>
+        </p:spPr>
+      </p:sp>
+      <p:sp>
+        <p:nvSpPr>
+          <p:cNvPr id="12" name="Text 10"/>
+          <p:cNvSpPr txBox="1"/>
+          <p:nvPr/>
+        </p:nvSpPr>
+        <p:spPr>
+          <a:xfrm>
+            <a:off x="4998568" y="2148840"/>
+            <a:ext cx="2194560" cy="548640"/>
+          </a:xfrm>
+          <a:prstGeom prst="rect">
+            <a:avLst/>
+          </a:prstGeom>
+          <a:noFill/>
+          <a:ln/>
+        </p:spPr>
+        <p:txBody>
+          <a:bodyPr wrap="square" lIns="0" tIns="0" rIns="0" bIns="0" rtlCol="0" anchor="b"/>
+          <a:lstStyle/>
+          <a:p>
+            <a:pPr algn="ctr" indent="0" marL="0">
+              <a:buNone/>
+            </a:pPr>
+            <a:r>
+              <a:rPr lang="en-US" sz="1400" b="1" spc="100" kern="0" dirty="0">
+                <a:solidFill>
+                  <a:srgbClr val="0E7C86"/>
+                </a:solidFill>
+                <a:latin typeface="Calibri" pitchFamily="34" charset="0"/>
+                <a:ea typeface="Calibri" pitchFamily="34" charset="-122"/>
+                <a:cs typeface="Calibri" pitchFamily="34" charset="-120"/>
+              </a:rPr>
+              <a:t>NESTE</a:t>
+            </a:r>
+            <a:endParaRPr lang="en-US" sz="1400" dirty="0"/>
+          </a:p>
+        </p:txBody>
+      </p:sp>
+      <p:sp>
+        <p:nvSpPr>
+          <p:cNvPr id="13" name="Text 11"/>
+          <p:cNvSpPr txBox="1"/>
+          <p:nvPr/>
+        </p:nvSpPr>
+        <p:spPr>
+          <a:xfrm>
+            <a:off x="4998568" y="3474720"/>
+            <a:ext cx="2194560" cy="1188720"/>
+          </a:xfrm>
+          <a:prstGeom prst="rect">
+            <a:avLst/>
+          </a:prstGeom>
+          <a:noFill/>
+          <a:ln/>
+        </p:spPr>
+        <p:txBody>
+          <a:bodyPr wrap="square" lIns="0" tIns="0" rIns="0" bIns="0" rtlCol="0" anchor="t"/>
+          <a:lstStyle/>
+          <a:p>
+            <a:pPr algn="ctr" indent="0" marL="0">
+              <a:buNone/>
+            </a:pPr>
+            <a:r>
+              <a:rPr lang="en-US" sz="1500" dirty="0">
+                <a:solidFill>
+                  <a:srgbClr val="1B2A38"/>
+                </a:solidFill>
+                <a:latin typeface="Calibri" pitchFamily="34" charset="0"/>
+                <a:ea typeface="Calibri" pitchFamily="34" charset="-122"/>
+                <a:cs typeface="Calibri" pitchFamily="34" charset="-120"/>
+              </a:rPr>
+              <a:t>Signerte intensjonsavtaler og neste støtterunde fra Innovasjon Norge</a:t>
+            </a:r>
+            <a:endParaRPr lang="en-US" sz="1500" dirty="0"/>
+          </a:p>
+        </p:txBody>
+      </p:sp>
+      <p:sp>
+        <p:nvSpPr>
+          <p:cNvPr id="14" name="Shape 12"/>
+          <p:cNvSpPr/>
+          <p:nvPr/>
+        </p:nvSpPr>
+        <p:spPr>
+          <a:xfrm>
+            <a:off x="8119643" y="2862072"/>
+            <a:ext cx="402336" cy="402336"/>
+          </a:xfrm>
+          <a:prstGeom prst="ellipse">
+            <a:avLst/>
+          </a:prstGeom>
+          <a:solidFill>
+            <a:srgbClr val="FFFFFF"/>
+          </a:solidFill>
+          <a:ln w="31750">
+            <a:solidFill>
+              <a:srgbClr val="0E7C86"/>
+            </a:solidFill>
+            <a:prstDash val="solid"/>
+          </a:ln>
+        </p:spPr>
+      </p:sp>
+      <p:sp>
+        <p:nvSpPr>
+          <p:cNvPr id="15" name="Text 13"/>
+          <p:cNvSpPr txBox="1"/>
+          <p:nvPr/>
+        </p:nvSpPr>
+        <p:spPr>
+          <a:xfrm>
+            <a:off x="7223531" y="2148840"/>
+            <a:ext cx="2194560" cy="548640"/>
+          </a:xfrm>
+          <a:prstGeom prst="rect">
+            <a:avLst/>
+          </a:prstGeom>
+          <a:noFill/>
+          <a:ln/>
+        </p:spPr>
+        <p:txBody>
+          <a:bodyPr wrap="square" lIns="0" tIns="0" rIns="0" bIns="0" rtlCol="0" anchor="b"/>
+          <a:lstStyle/>
+          <a:p>
+            <a:pPr algn="ctr" indent="0" marL="0">
+              <a:buNone/>
+            </a:pPr>
+            <a:r>
+              <a:rPr lang="en-US" sz="1400" b="1" spc="100" kern="0" dirty="0">
+                <a:solidFill>
+                  <a:srgbClr val="0E7C86"/>
+                </a:solidFill>
+                <a:latin typeface="Calibri" pitchFamily="34" charset="0"/>
+                <a:ea typeface="Calibri" pitchFamily="34" charset="-122"/>
+                <a:cs typeface="Calibri" pitchFamily="34" charset="-120"/>
+              </a:rPr>
+              <a:t>DERETTER</a:t>
+            </a:r>
+            <a:endParaRPr lang="en-US" sz="1400" dirty="0"/>
+          </a:p>
+        </p:txBody>
+      </p:sp>
+      <p:sp>
+        <p:nvSpPr>
+          <p:cNvPr id="16" name="Text 14"/>
+          <p:cNvSpPr txBox="1"/>
+          <p:nvPr/>
+        </p:nvSpPr>
+        <p:spPr>
+          <a:xfrm>
+            <a:off x="7223531" y="3474720"/>
+            <a:ext cx="2194560" cy="1188720"/>
+          </a:xfrm>
+          <a:prstGeom prst="rect">
+            <a:avLst/>
+          </a:prstGeom>
+          <a:noFill/>
+          <a:ln/>
+        </p:spPr>
+        <p:txBody>
+          <a:bodyPr wrap="square" lIns="0" tIns="0" rIns="0" bIns="0" rtlCol="0" anchor="t"/>
+          <a:lstStyle/>
+          <a:p>
+            <a:pPr algn="ctr" indent="0" marL="0">
+              <a:buNone/>
+            </a:pPr>
+            <a:r>
+              <a:rPr lang="en-US" sz="1500" dirty="0">
+                <a:solidFill>
+                  <a:srgbClr val="1B2A38"/>
+                </a:solidFill>
+                <a:latin typeface="Calibri" pitchFamily="34" charset="0"/>
+                <a:ea typeface="Calibri" pitchFamily="34" charset="-122"/>
+                <a:cs typeface="Calibri" pitchFamily="34" charset="-120"/>
+              </a:rPr>
+              <a:t>Pilot på første fartøy og første betalende rederi</a:t>
+            </a:r>
+            <a:endParaRPr lang="en-US" sz="1500" dirty="0"/>
+          </a:p>
+        </p:txBody>
+      </p:sp>
+      <p:sp>
+        <p:nvSpPr>
+          <p:cNvPr id="17" name="Shape 15"/>
+          <p:cNvSpPr/>
+          <p:nvPr/>
+        </p:nvSpPr>
+        <p:spPr>
+          <a:xfrm>
+            <a:off x="10344607" y="2862072"/>
+            <a:ext cx="402336" cy="402336"/>
+          </a:xfrm>
+          <a:prstGeom prst="ellipse">
+            <a:avLst/>
+          </a:prstGeom>
+          <a:solidFill>
+            <a:srgbClr val="FFFFFF"/>
+          </a:solidFill>
+          <a:ln w="31750">
+            <a:solidFill>
+              <a:srgbClr val="0E7C86"/>
+            </a:solidFill>
+            <a:prstDash val="solid"/>
+          </a:ln>
+        </p:spPr>
+      </p:sp>
+      <p:sp>
+        <p:nvSpPr>
+          <p:cNvPr id="18" name="Text 16"/>
+          <p:cNvSpPr txBox="1"/>
+          <p:nvPr/>
+        </p:nvSpPr>
+        <p:spPr>
+          <a:xfrm>
+            <a:off x="9448495" y="2148840"/>
+            <a:ext cx="2194560" cy="548640"/>
+          </a:xfrm>
+          <a:prstGeom prst="rect">
+            <a:avLst/>
+          </a:prstGeom>
+          <a:noFill/>
+          <a:ln/>
+        </p:spPr>
+        <p:txBody>
+          <a:bodyPr wrap="square" lIns="0" tIns="0" rIns="0" bIns="0" rtlCol="0" anchor="b"/>
+          <a:lstStyle/>
+          <a:p>
+            <a:pPr algn="ctr" indent="0" marL="0">
+              <a:buNone/>
+            </a:pPr>
+            <a:r>
+              <a:rPr lang="en-US" sz="1400" b="1" spc="100" kern="0" dirty="0">
+                <a:solidFill>
+                  <a:srgbClr val="0E7C86"/>
+                </a:solidFill>
+                <a:latin typeface="Calibri" pitchFamily="34" charset="0"/>
+                <a:ea typeface="Calibri" pitchFamily="34" charset="-122"/>
+                <a:cs typeface="Calibri" pitchFamily="34" charset="-120"/>
+              </a:rPr>
+              <a:t>MÅL</a:t>
+            </a:r>
+            <a:endParaRPr lang="en-US" sz="1400" dirty="0"/>
+          </a:p>
+        </p:txBody>
+      </p:sp>
+      <p:sp>
+        <p:nvSpPr>
+          <p:cNvPr id="19" name="Text 17"/>
+          <p:cNvSpPr txBox="1"/>
+          <p:nvPr/>
+        </p:nvSpPr>
+        <p:spPr>
+          <a:xfrm>
+            <a:off x="9448495" y="3474720"/>
+            <a:ext cx="2194560" cy="1188720"/>
+          </a:xfrm>
+          <a:prstGeom prst="rect">
+            <a:avLst/>
+          </a:prstGeom>
+          <a:noFill/>
+          <a:ln/>
+        </p:spPr>
+        <p:txBody>
+          <a:bodyPr wrap="square" lIns="0" tIns="0" rIns="0" bIns="0" rtlCol="0" anchor="t"/>
+          <a:lstStyle/>
+          <a:p>
+            <a:pPr algn="ctr" indent="0" marL="0">
+              <a:buNone/>
+            </a:pPr>
+            <a:r>
+              <a:rPr lang="en-US" sz="1500" dirty="0">
+                <a:solidFill>
+                  <a:srgbClr val="1B2A38"/>
+                </a:solidFill>
+                <a:latin typeface="Calibri" pitchFamily="34" charset="0"/>
+                <a:ea typeface="Calibri" pitchFamily="34" charset="-122"/>
+                <a:cs typeface="Calibri" pitchFamily="34" charset="-120"/>
+              </a:rPr>
+              <a:t>Ferdig produkt med DNV-godkjenning</a:t>
+            </a:r>
+            <a:endParaRPr lang="en-US" sz="1500" dirty="0"/>
+          </a:p>
+        </p:txBody>
+      </p:sp>
+      <p:sp>
+        <p:nvSpPr>
+          <p:cNvPr id="20" name="Kort"/>
+          <p:cNvSpPr/>
+          <p:nvPr/>
+        </p:nvSpPr>
+        <p:spPr>
+          <a:xfrm>
+            <a:off x="548640" y="4846320"/>
+            <a:ext cx="11094415" cy="868680"/>
           </a:xfrm>
           <a:prstGeom prst="roundRect">
             <a:avLst>
-              <a:gd name="adj" fmla="val 9600"/>
+              <a:gd name="adj" fmla="val 12632"/>
             </a:avLst>
           </a:prstGeom>
           <a:solidFill>
@@ -4195,14 +4608,14 @@
       </p:sp>
       <p:sp>
         <p:nvSpPr>
-          <p:cNvPr id="5" name="Text 3"/>
+          <p:cNvPr id="21" name="Text 19"/>
           <p:cNvSpPr txBox="1"/>
           <p:nvPr/>
         </p:nvSpPr>
         <p:spPr>
           <a:xfrm>
-            <a:off x="868680" y="1965960"/>
-            <a:ext cx="5852160" cy="914400"/>
+            <a:off x="868680" y="4846320"/>
+            <a:ext cx="10454335" cy="868680"/>
           </a:xfrm>
           <a:prstGeom prst="rect">
             <a:avLst/>
@@ -4211,14 +4624,14 @@
           <a:ln/>
         </p:spPr>
         <p:txBody>
-          <a:bodyPr wrap="square" lIns="0" tIns="0" rIns="0" bIns="0" rtlCol="0" anchor="t"/>
+          <a:bodyPr wrap="square" lIns="0" tIns="0" rIns="0" bIns="0" rtlCol="0" anchor="ctr"/>
           <a:lstStyle/>
           <a:p>
             <a:pPr indent="0" marL="0">
               <a:buNone/>
             </a:pPr>
             <a:r>
-              <a:rPr lang="en-US" sz="1800" b="1" dirty="0">
+              <a:rPr lang="en-US" sz="1600" b="1" dirty="0">
                 <a:solidFill>
                   <a:srgbClr val="0B1F33"/>
                 </a:solidFill>
@@ -4226,30 +4639,13 @@
                 <a:ea typeface="Calibri" pitchFamily="34" charset="-122"/>
                 <a:cs typeface="Calibri" pitchFamily="34" charset="-120"/>
               </a:rPr>
-              <a:t>Arne Kopperstad</a:t>
+              <a:t>Målet for de neste 18 månedene: </a:t>
             </a:r>
             <a:pPr indent="0" marL="0">
               <a:buNone/>
             </a:pPr>
             <a:r>
-              <a:rPr lang="en-US" sz="1500" b="1" dirty="0">
-                <a:solidFill>
-                  <a:srgbClr val="0E7C86"/>
-                </a:solidFill>
-                <a:latin typeface="Calibri" pitchFamily="34" charset="0"/>
-                <a:ea typeface="Calibri" pitchFamily="34" charset="-122"/>
-                <a:cs typeface="Calibri" pitchFamily="34" charset="-120"/>
-              </a:rPr>
-              <a:t>   Daglig leder (CEO)</a:t>
-            </a:r>
-            <a:endParaRPr lang="en-US" sz="1800" dirty="0"/>
-          </a:p>
-          <a:p>
-            <a:pPr indent="0" marL="0">
-              <a:buNone/>
-            </a:pPr>
-            <a:r>
-              <a:rPr lang="en-US" sz="1500" dirty="0">
+              <a:rPr lang="en-US" sz="1600" dirty="0">
                 <a:solidFill>
                   <a:srgbClr val="1B2A38"/>
                 </a:solidFill>
@@ -4257,257 +4653,12 @@
                 <a:ea typeface="Calibri" pitchFamily="34" charset="-122"/>
                 <a:cs typeface="Calibri" pitchFamily="34" charset="-120"/>
               </a:rPr>
-              <a:t>Maskinsjef med erfaring fra fiskeflåten. Kjenner problemet Nautech løser fra egen hverdag.</a:t>
-            </a:r>
-            <a:endParaRPr lang="en-US" sz="1800" dirty="0"/>
-          </a:p>
-        </p:txBody>
-      </p:sp>
-      <p:sp>
-        <p:nvSpPr>
-          <p:cNvPr id="6" name="Kort"/>
-          <p:cNvSpPr/>
-          <p:nvPr/>
-        </p:nvSpPr>
-        <p:spPr>
-          <a:xfrm>
-            <a:off x="548640" y="3154680"/>
-            <a:ext cx="6400800" cy="1143000"/>
-          </a:xfrm>
-          <a:prstGeom prst="roundRect">
-            <a:avLst>
-              <a:gd name="adj" fmla="val 9600"/>
-            </a:avLst>
-          </a:prstGeom>
-          <a:solidFill>
-            <a:srgbClr val="EEF3F6"/>
-          </a:solidFill>
-          <a:ln/>
-        </p:spPr>
-      </p:sp>
-      <p:sp>
-        <p:nvSpPr>
-          <p:cNvPr id="7" name="Text 5"/>
-          <p:cNvSpPr txBox="1"/>
-          <p:nvPr/>
-        </p:nvSpPr>
-        <p:spPr>
-          <a:xfrm>
-            <a:off x="868680" y="3291840"/>
-            <a:ext cx="5852160" cy="914400"/>
-          </a:xfrm>
-          <a:prstGeom prst="rect">
-            <a:avLst/>
-          </a:prstGeom>
-          <a:noFill/>
-          <a:ln/>
-        </p:spPr>
-        <p:txBody>
-          <a:bodyPr wrap="square" lIns="0" tIns="0" rIns="0" bIns="0" rtlCol="0" anchor="t"/>
-          <a:lstStyle/>
-          <a:p>
-            <a:pPr indent="0" marL="0">
-              <a:buNone/>
-            </a:pPr>
-            <a:r>
-              <a:rPr lang="en-US" sz="1800" b="1" dirty="0">
-                <a:solidFill>
-                  <a:srgbClr val="0B1F33"/>
-                </a:solidFill>
-                <a:latin typeface="Calibri" pitchFamily="34" charset="0"/>
-                <a:ea typeface="Calibri" pitchFamily="34" charset="-122"/>
-                <a:cs typeface="Calibri" pitchFamily="34" charset="-120"/>
-              </a:rPr>
-              <a:t>Kristian Kopperstad</a:t>
-            </a:r>
-            <a:pPr indent="0" marL="0">
-              <a:buNone/>
-            </a:pPr>
-            <a:r>
-              <a:rPr lang="en-US" sz="1500" b="1" dirty="0">
-                <a:solidFill>
-                  <a:srgbClr val="0E7C86"/>
-                </a:solidFill>
-                <a:latin typeface="Calibri" pitchFamily="34" charset="0"/>
-                <a:ea typeface="Calibri" pitchFamily="34" charset="-122"/>
-                <a:cs typeface="Calibri" pitchFamily="34" charset="-120"/>
-              </a:rPr>
-              <a:t>   Driftsleder (COO)</a:t>
-            </a:r>
-            <a:endParaRPr lang="en-US" sz="1800" dirty="0"/>
-          </a:p>
-          <a:p>
-            <a:pPr indent="0" marL="0">
-              <a:buNone/>
-            </a:pPr>
-            <a:r>
-              <a:rPr lang="en-US" sz="1500" dirty="0">
-                <a:solidFill>
-                  <a:srgbClr val="1B2A38"/>
-                </a:solidFill>
-                <a:latin typeface="Calibri" pitchFamily="34" charset="0"/>
-                <a:ea typeface="Calibri" pitchFamily="34" charset="-122"/>
-                <a:cs typeface="Calibri" pitchFamily="34" charset="-120"/>
-              </a:rPr>
-              <a:t>Prosjekt- og ingeniørerfaring fra offshore. Ansvar for leveranse og drift.</a:t>
-            </a:r>
-            <a:endParaRPr lang="en-US" sz="1800" dirty="0"/>
-          </a:p>
-        </p:txBody>
-      </p:sp>
-      <p:sp>
-        <p:nvSpPr>
-          <p:cNvPr id="8" name="Kort"/>
-          <p:cNvSpPr/>
-          <p:nvPr/>
-        </p:nvSpPr>
-        <p:spPr>
-          <a:xfrm>
-            <a:off x="548640" y="4480560"/>
-            <a:ext cx="6400800" cy="1280160"/>
-          </a:xfrm>
-          <a:prstGeom prst="roundRect">
-            <a:avLst>
-              <a:gd name="adj" fmla="val 8571"/>
-            </a:avLst>
-          </a:prstGeom>
-          <a:solidFill>
-            <a:srgbClr val="FFFFFF"/>
-          </a:solidFill>
-          <a:ln w="12700">
-            <a:solidFill>
-              <a:srgbClr val="E8751A"/>
-            </a:solidFill>
-            <a:prstDash val="solid"/>
-          </a:ln>
-        </p:spPr>
-      </p:sp>
-      <p:sp>
-        <p:nvSpPr>
-          <p:cNvPr id="9" name="Text 7"/>
-          <p:cNvSpPr txBox="1"/>
-          <p:nvPr/>
-        </p:nvSpPr>
-        <p:spPr>
-          <a:xfrm>
-            <a:off x="868680" y="4617720"/>
-            <a:ext cx="5852160" cy="1005840"/>
-          </a:xfrm>
-          <a:prstGeom prst="rect">
-            <a:avLst/>
-          </a:prstGeom>
-          <a:noFill/>
-          <a:ln/>
-        </p:spPr>
-        <p:txBody>
-          <a:bodyPr wrap="square" lIns="0" tIns="0" rIns="0" bIns="0" rtlCol="0" anchor="t"/>
-          <a:lstStyle/>
-          <a:p>
-            <a:pPr indent="0" marL="0">
-              <a:spcAft>
-                <a:spcPts val="600"/>
-              </a:spcAft>
-              <a:buNone/>
-            </a:pPr>
-            <a:r>
-              <a:rPr lang="en-US" sz="1500" b="1" dirty="0">
-                <a:solidFill>
-                  <a:srgbClr val="0B1F33"/>
-                </a:solidFill>
-                <a:latin typeface="Calibri" pitchFamily="34" charset="0"/>
-                <a:ea typeface="Calibri" pitchFamily="34" charset="-122"/>
-                <a:cs typeface="Calibri" pitchFamily="34" charset="-120"/>
-              </a:rPr>
-              <a:t>Teknologi og utvikling: </a:t>
-            </a:r>
-            <a:pPr indent="0" marL="0">
-              <a:spcAft>
-                <a:spcPts val="600"/>
-              </a:spcAft>
-              <a:buNone/>
-            </a:pPr>
-            <a:r>
-              <a:rPr lang="en-US" sz="1500" b="1" dirty="0">
-                <a:solidFill>
-                  <a:srgbClr val="E8751A"/>
-                </a:solidFill>
-                <a:latin typeface="Calibri" pitchFamily="34" charset="0"/>
-                <a:ea typeface="Calibri" pitchFamily="34" charset="-122"/>
-                <a:cs typeface="Calibri" pitchFamily="34" charset="-120"/>
-              </a:rPr>
-              <a:t>[FYLL INN: hvem bygger og drifter Nautech?]</a:t>
-            </a:r>
-            <a:pPr indent="0" marL="0">
-              <a:spcAft>
-                <a:spcPts val="600"/>
-              </a:spcAft>
-              <a:buNone/>
-            </a:pPr>
-            <a:endParaRPr lang="en-US" sz="1500" dirty="0"/>
-          </a:p>
-          <a:p>
-            <a:pPr indent="0" marL="0">
-              <a:spcAft>
-                <a:spcPts val="600"/>
-              </a:spcAft>
-              <a:buNone/>
-            </a:pPr>
-            <a:r>
-              <a:rPr lang="en-US" sz="1500" b="1" dirty="0">
-                <a:solidFill>
-                  <a:srgbClr val="0B1F33"/>
-                </a:solidFill>
-                <a:latin typeface="Calibri" pitchFamily="34" charset="0"/>
-                <a:ea typeface="Calibri" pitchFamily="34" charset="-122"/>
-                <a:cs typeface="Calibri" pitchFamily="34" charset="-120"/>
-              </a:rPr>
-              <a:t>Styre og rådgivere: </a:t>
-            </a:r>
-            <a:pPr indent="0" marL="0">
-              <a:spcAft>
-                <a:spcPts val="600"/>
-              </a:spcAft>
-              <a:buNone/>
-            </a:pPr>
-            <a:r>
-              <a:rPr lang="en-US" sz="1500" b="1" dirty="0">
-                <a:solidFill>
-                  <a:srgbClr val="E8751A"/>
-                </a:solidFill>
-                <a:latin typeface="Calibri" pitchFamily="34" charset="0"/>
-                <a:ea typeface="Calibri" pitchFamily="34" charset="-122"/>
-                <a:cs typeface="Calibri" pitchFamily="34" charset="-120"/>
-              </a:rPr>
-              <a:t>[FYLL INN: navn og bakgrunn]</a:t>
-            </a:r>
-            <a:endParaRPr lang="en-US" sz="1500" dirty="0"/>
-          </a:p>
-        </p:txBody>
-      </p:sp>
-      <p:pic>
-        <p:nvPicPr>
-          <p:cNvPr id="10" name="Teambilde" descr="/tmp/claude-0/-home-user-Claude/bbdec16f-2a10-550d-bb32-af07b09e4311/scratchpad/build/team.jpg">    </p:cNvPr>
-          <p:cNvPicPr>
-            <a:picLocks noChangeAspect="1"/>
-          </p:cNvPicPr>
-          <p:nvPr/>
-        </p:nvPicPr>
-        <p:blipFill>
-          <a:blip r:embed="rId1"/>
-          <a:stretch>
-            <a:fillRect/>
-          </a:stretch>
-        </p:blipFill>
-        <p:spPr>
-          <a:xfrm>
-            <a:off x="7406640" y="1828800"/>
-            <a:ext cx="4236415" cy="3879127"/>
-          </a:xfrm>
-          <a:prstGeom prst="rect">
-            <a:avLst/>
-          </a:prstGeom>
-        </p:spPr>
-      </p:pic>
+              <a:t>signerte intensjonsavtaler, de første betalende rederiene og et ferdig produkt godkjent av DNV.</a:t>
+            </a:r>
+            <a:endParaRPr lang="en-US" sz="1600" dirty="0"/>
+          </a:p>
+        </p:txBody>
+      </p:sp>
       <p:sp>
         <p:nvSpPr>
           <p:cNvPr id="25" name="Slide Number Placeholder 0"/>
@@ -4610,13 +4761,13 @@
             <a:r>
               <a:rPr lang="en-US" sz="1200" b="1" spc="200" kern="0" dirty="0">
                 <a:solidFill>
-                  <a:srgbClr val="7FD1D6"/>
-                </a:solidFill>
-                <a:latin typeface="Calibri" pitchFamily="34" charset="0"/>
-                <a:ea typeface="Calibri" pitchFamily="34" charset="-122"/>
-                <a:cs typeface="Calibri" pitchFamily="34" charset="-120"/>
-              </a:rPr>
-              <a:t>HVA VI SØKER</a:t>
+                  <a:srgbClr val="0E7C86"/>
+                </a:solidFill>
+                <a:latin typeface="Calibri" pitchFamily="34" charset="0"/>
+                <a:ea typeface="Calibri" pitchFamily="34" charset="-122"/>
+                <a:cs typeface="Calibri" pitchFamily="34" charset="-120"/>
+              </a:rPr>
+              <a:t>TEAMET</a:t>
             </a:r>
             <a:endParaRPr lang="en-US" sz="1200" dirty="0"/>
           </a:p>
@@ -4651,13 +4802,13 @@
             <a:r>
               <a:rPr lang="en-US" sz="3000" b="1" dirty="0">
                 <a:solidFill>
-                  <a:srgbClr val="FFFFFF"/>
+                  <a:srgbClr val="0B1F33"/>
                 </a:solidFill>
                 <a:latin typeface="Arial" pitchFamily="34" charset="0"/>
                 <a:ea typeface="Arial" pitchFamily="34" charset="-122"/>
                 <a:cs typeface="Arial" pitchFamily="34" charset="-120"/>
               </a:rPr>
-              <a:t>Vi søker kapital og et rederi som vil være med fra start</a:t>
+              <a:t>Vi har stått i maskinrommet selv</a:t>
             </a:r>
             <a:endParaRPr lang="en-US" sz="3000" dirty="0"/>
           </a:p>
@@ -4672,42 +4823,259 @@
         <p:spPr>
           <a:xfrm>
             <a:off x="548640" y="1828800"/>
-            <a:ext cx="5394960" cy="3886200"/>
+            <a:ext cx="6400800" cy="1143000"/>
           </a:xfrm>
           <a:prstGeom prst="roundRect">
             <a:avLst>
-              <a:gd name="adj" fmla="val 2824"/>
+              <a:gd name="adj" fmla="val 9600"/>
             </a:avLst>
           </a:prstGeom>
           <a:solidFill>
-            <a:srgbClr val="16324D"/>
+            <a:srgbClr val="EEF3F6"/>
           </a:solidFill>
           <a:ln/>
         </p:spPr>
       </p:sp>
       <p:sp>
         <p:nvSpPr>
-          <p:cNvPr id="5" name="Ikon-sirkel"/>
+          <p:cNvPr id="5" name="Text 3"/>
+          <p:cNvSpPr txBox="1"/>
+          <p:nvPr/>
+        </p:nvSpPr>
+        <p:spPr>
+          <a:xfrm>
+            <a:off x="868680" y="1965960"/>
+            <a:ext cx="5852160" cy="914400"/>
+          </a:xfrm>
+          <a:prstGeom prst="rect">
+            <a:avLst/>
+          </a:prstGeom>
+          <a:noFill/>
+          <a:ln/>
+        </p:spPr>
+        <p:txBody>
+          <a:bodyPr wrap="square" lIns="0" tIns="0" rIns="0" bIns="0" rtlCol="0" anchor="t"/>
+          <a:lstStyle/>
+          <a:p>
+            <a:pPr indent="0" marL="0">
+              <a:buNone/>
+            </a:pPr>
+            <a:r>
+              <a:rPr lang="en-US" sz="1800" b="1" dirty="0">
+                <a:solidFill>
+                  <a:srgbClr val="0B1F33"/>
+                </a:solidFill>
+                <a:latin typeface="Calibri" pitchFamily="34" charset="0"/>
+                <a:ea typeface="Calibri" pitchFamily="34" charset="-122"/>
+                <a:cs typeface="Calibri" pitchFamily="34" charset="-120"/>
+              </a:rPr>
+              <a:t>Arne Kopperstad</a:t>
+            </a:r>
+            <a:pPr indent="0" marL="0">
+              <a:buNone/>
+            </a:pPr>
+            <a:r>
+              <a:rPr lang="en-US" sz="1500" b="1" dirty="0">
+                <a:solidFill>
+                  <a:srgbClr val="0E7C86"/>
+                </a:solidFill>
+                <a:latin typeface="Calibri" pitchFamily="34" charset="0"/>
+                <a:ea typeface="Calibri" pitchFamily="34" charset="-122"/>
+                <a:cs typeface="Calibri" pitchFamily="34" charset="-120"/>
+              </a:rPr>
+              <a:t>   Daglig leder (CEO)</a:t>
+            </a:r>
+            <a:endParaRPr lang="en-US" sz="1800" dirty="0"/>
+          </a:p>
+          <a:p>
+            <a:pPr indent="0" marL="0">
+              <a:buNone/>
+            </a:pPr>
+            <a:r>
+              <a:rPr lang="en-US" sz="1500" dirty="0">
+                <a:solidFill>
+                  <a:srgbClr val="1B2A38"/>
+                </a:solidFill>
+                <a:latin typeface="Calibri" pitchFamily="34" charset="0"/>
+                <a:ea typeface="Calibri" pitchFamily="34" charset="-122"/>
+                <a:cs typeface="Calibri" pitchFamily="34" charset="-120"/>
+              </a:rPr>
+              <a:t>Maskinsjef med erfaring fra fiskeflåten. Kjenner problemet Nautech løser fra egen hverdag.</a:t>
+            </a:r>
+            <a:endParaRPr lang="en-US" sz="1800" dirty="0"/>
+          </a:p>
+        </p:txBody>
+      </p:sp>
+      <p:sp>
+        <p:nvSpPr>
+          <p:cNvPr id="6" name="Kort"/>
           <p:cNvSpPr/>
           <p:nvPr/>
         </p:nvSpPr>
         <p:spPr>
           <a:xfrm>
-            <a:off x="868680" y="2103120"/>
-            <a:ext cx="640080" cy="640080"/>
-          </a:xfrm>
-          <a:prstGeom prst="ellipse">
-            <a:avLst/>
+            <a:off x="548640" y="3154680"/>
+            <a:ext cx="6400800" cy="1143000"/>
+          </a:xfrm>
+          <a:prstGeom prst="roundRect">
+            <a:avLst>
+              <a:gd name="adj" fmla="val 9600"/>
+            </a:avLst>
           </a:prstGeom>
           <a:solidFill>
-            <a:srgbClr val="0E7C86"/>
+            <a:srgbClr val="EEF3F6"/>
           </a:solidFill>
           <a:ln/>
         </p:spPr>
+      </p:sp>
+      <p:sp>
+        <p:nvSpPr>
+          <p:cNvPr id="7" name="Text 5"/>
+          <p:cNvSpPr txBox="1"/>
+          <p:nvPr/>
+        </p:nvSpPr>
+        <p:spPr>
+          <a:xfrm>
+            <a:off x="868680" y="3291840"/>
+            <a:ext cx="5852160" cy="914400"/>
+          </a:xfrm>
+          <a:prstGeom prst="rect">
+            <a:avLst/>
+          </a:prstGeom>
+          <a:noFill/>
+          <a:ln/>
+        </p:spPr>
+        <p:txBody>
+          <a:bodyPr wrap="square" lIns="0" tIns="0" rIns="0" bIns="0" rtlCol="0" anchor="t"/>
+          <a:lstStyle/>
+          <a:p>
+            <a:pPr indent="0" marL="0">
+              <a:buNone/>
+            </a:pPr>
+            <a:r>
+              <a:rPr lang="en-US" sz="1800" b="1" dirty="0">
+                <a:solidFill>
+                  <a:srgbClr val="0B1F33"/>
+                </a:solidFill>
+                <a:latin typeface="Calibri" pitchFamily="34" charset="0"/>
+                <a:ea typeface="Calibri" pitchFamily="34" charset="-122"/>
+                <a:cs typeface="Calibri" pitchFamily="34" charset="-120"/>
+              </a:rPr>
+              <a:t>Kristian Kopperstad</a:t>
+            </a:r>
+            <a:pPr indent="0" marL="0">
+              <a:buNone/>
+            </a:pPr>
+            <a:r>
+              <a:rPr lang="en-US" sz="1500" b="1" dirty="0">
+                <a:solidFill>
+                  <a:srgbClr val="0E7C86"/>
+                </a:solidFill>
+                <a:latin typeface="Calibri" pitchFamily="34" charset="0"/>
+                <a:ea typeface="Calibri" pitchFamily="34" charset="-122"/>
+                <a:cs typeface="Calibri" pitchFamily="34" charset="-120"/>
+              </a:rPr>
+              <a:t>   Driftsleder (COO)</a:t>
+            </a:r>
+            <a:endParaRPr lang="en-US" sz="1800" dirty="0"/>
+          </a:p>
+          <a:p>
+            <a:pPr indent="0" marL="0">
+              <a:buNone/>
+            </a:pPr>
+            <a:r>
+              <a:rPr lang="en-US" sz="1500" dirty="0">
+                <a:solidFill>
+                  <a:srgbClr val="1B2A38"/>
+                </a:solidFill>
+                <a:latin typeface="Calibri" pitchFamily="34" charset="0"/>
+                <a:ea typeface="Calibri" pitchFamily="34" charset="-122"/>
+                <a:cs typeface="Calibri" pitchFamily="34" charset="-120"/>
+              </a:rPr>
+              <a:t>Prosjekt- og ingeniørerfaring fra offshore. Ansvar for leveranse og drift.</a:t>
+            </a:r>
+            <a:endParaRPr lang="en-US" sz="1800" dirty="0"/>
+          </a:p>
+        </p:txBody>
+      </p:sp>
+      <p:sp>
+        <p:nvSpPr>
+          <p:cNvPr id="8" name="Kort"/>
+          <p:cNvSpPr/>
+          <p:nvPr/>
+        </p:nvSpPr>
+        <p:spPr>
+          <a:xfrm>
+            <a:off x="548640" y="4480560"/>
+            <a:ext cx="6400800" cy="1143000"/>
+          </a:xfrm>
+          <a:prstGeom prst="roundRect">
+            <a:avLst>
+              <a:gd name="adj" fmla="val 9600"/>
+            </a:avLst>
+          </a:prstGeom>
+          <a:solidFill>
+            <a:srgbClr val="0B1F33"/>
+          </a:solidFill>
+          <a:ln/>
+        </p:spPr>
+      </p:sp>
+      <p:sp>
+        <p:nvSpPr>
+          <p:cNvPr id="9" name="Text 7"/>
+          <p:cNvSpPr txBox="1"/>
+          <p:nvPr/>
+        </p:nvSpPr>
+        <p:spPr>
+          <a:xfrm>
+            <a:off x="868680" y="4480560"/>
+            <a:ext cx="5852160" cy="1143000"/>
+          </a:xfrm>
+          <a:prstGeom prst="rect">
+            <a:avLst/>
+          </a:prstGeom>
+          <a:noFill/>
+          <a:ln/>
+        </p:spPr>
+        <p:txBody>
+          <a:bodyPr wrap="square" lIns="0" tIns="0" rIns="0" bIns="0" rtlCol="0" anchor="ctr"/>
+          <a:lstStyle/>
+          <a:p>
+            <a:pPr indent="0" marL="0">
+              <a:buNone/>
+            </a:pPr>
+            <a:r>
+              <a:rPr lang="en-US" sz="1500" b="1" dirty="0">
+                <a:solidFill>
+                  <a:srgbClr val="7FD1D6"/>
+                </a:solidFill>
+                <a:latin typeface="Calibri" pitchFamily="34" charset="0"/>
+                <a:ea typeface="Calibri" pitchFamily="34" charset="-122"/>
+                <a:cs typeface="Calibri" pitchFamily="34" charset="-120"/>
+              </a:rPr>
+              <a:t>Hvorfor oss: </a:t>
+            </a:r>
+            <a:pPr indent="0" marL="0">
+              <a:buNone/>
+            </a:pPr>
+            <a:r>
+              <a:rPr lang="en-US" sz="1500" dirty="0">
+                <a:solidFill>
+                  <a:srgbClr val="FFFFFF"/>
+                </a:solidFill>
+                <a:latin typeface="Calibri" pitchFamily="34" charset="0"/>
+                <a:ea typeface="Calibri" pitchFamily="34" charset="-122"/>
+                <a:cs typeface="Calibri" pitchFamily="34" charset="-120"/>
+              </a:rPr>
+              <a:t>Vi har brukt systemene som finnes i dag, og vet hvor de svikter om bord. Nautech er bygget for å løse nettopp det.</a:t>
+            </a:r>
+            <a:endParaRPr lang="en-US" sz="1500" dirty="0"/>
+          </a:p>
+        </p:txBody>
       </p:sp>
       <p:pic>
         <p:nvPicPr>
-          <p:cNvPr id="6" name="Ikon FaSackDollar" descr="preencoded.png">    </p:cNvPr>
+          <p:cNvPr id="10" name="Teambilde" descr="/tmp/claude-0/-home-user-Claude/bbdec16f-2a10-550d-bb32-af07b09e4311/scratchpad/build/team.jpg">    </p:cNvPr>
           <p:cNvPicPr>
             <a:picLocks noChangeAspect="1"/>
           </p:cNvPicPr>
@@ -4721,494 +5089,14 @@
         </p:blipFill>
         <p:spPr>
           <a:xfrm>
-            <a:off x="1022299" y="2256739"/>
-            <a:ext cx="332842" cy="332842"/>
+            <a:off x="7406640" y="1828800"/>
+            <a:ext cx="4236415" cy="3879127"/>
           </a:xfrm>
           <a:prstGeom prst="rect">
             <a:avLst/>
           </a:prstGeom>
         </p:spPr>
       </p:pic>
-      <p:sp>
-        <p:nvSpPr>
-          <p:cNvPr id="7" name="Text 4"/>
-          <p:cNvSpPr txBox="1"/>
-          <p:nvPr/>
-        </p:nvSpPr>
-        <p:spPr>
-          <a:xfrm>
-            <a:off x="1691640" y="2103120"/>
-            <a:ext cx="4023360" cy="822960"/>
-          </a:xfrm>
-          <a:prstGeom prst="rect">
-            <a:avLst/>
-          </a:prstGeom>
-          <a:noFill/>
-          <a:ln/>
-        </p:spPr>
-        <p:txBody>
-          <a:bodyPr wrap="square" lIns="0" tIns="0" rIns="0" bIns="0" rtlCol="0" anchor="t"/>
-          <a:lstStyle/>
-          <a:p>
-            <a:pPr indent="0" marL="0">
-              <a:buNone/>
-            </a:pPr>
-            <a:r>
-              <a:rPr lang="en-US" sz="2200" b="1" dirty="0">
-                <a:solidFill>
-                  <a:srgbClr val="FFFFFF"/>
-                </a:solidFill>
-                <a:latin typeface="Calibri" pitchFamily="34" charset="0"/>
-                <a:ea typeface="Calibri" pitchFamily="34" charset="-122"/>
-                <a:cs typeface="Calibri" pitchFamily="34" charset="-120"/>
-              </a:rPr>
-              <a:t>Investor</a:t>
-            </a:r>
-            <a:endParaRPr lang="en-US" sz="2200" dirty="0"/>
-          </a:p>
-          <a:p>
-            <a:pPr indent="0" marL="0">
-              <a:buNone/>
-            </a:pPr>
-            <a:r>
-              <a:rPr lang="en-US" sz="1600" dirty="0">
-                <a:solidFill>
-                  <a:srgbClr val="DCE6EE"/>
-                </a:solidFill>
-                <a:latin typeface="Calibri" pitchFamily="34" charset="0"/>
-                <a:ea typeface="Calibri" pitchFamily="34" charset="-122"/>
-                <a:cs typeface="Calibri" pitchFamily="34" charset="-120"/>
-              </a:rPr>
-              <a:t>Vi henter </a:t>
-            </a:r>
-            <a:pPr indent="0" marL="0">
-              <a:buNone/>
-            </a:pPr>
-            <a:r>
-              <a:rPr lang="en-US" sz="1600" b="1" dirty="0">
-                <a:solidFill>
-                  <a:srgbClr val="E8751A"/>
-                </a:solidFill>
-                <a:latin typeface="Calibri" pitchFamily="34" charset="0"/>
-                <a:ea typeface="Calibri" pitchFamily="34" charset="-122"/>
-                <a:cs typeface="Calibri" pitchFamily="34" charset="-120"/>
-              </a:rPr>
-              <a:t>[FYLL INN: beløp]</a:t>
-            </a:r>
-            <a:pPr indent="0" marL="0">
-              <a:buNone/>
-            </a:pPr>
-            <a:r>
-              <a:rPr lang="en-US" sz="1600" dirty="0">
-                <a:solidFill>
-                  <a:srgbClr val="DCE6EE"/>
-                </a:solidFill>
-                <a:latin typeface="Calibri" pitchFamily="34" charset="0"/>
-                <a:ea typeface="Calibri" pitchFamily="34" charset="-122"/>
-                <a:cs typeface="Calibri" pitchFamily="34" charset="-120"/>
-              </a:rPr>
-              <a:t> MNOK.</a:t>
-            </a:r>
-            <a:endParaRPr lang="en-US" sz="2200" dirty="0"/>
-          </a:p>
-        </p:txBody>
-      </p:sp>
-      <p:sp>
-        <p:nvSpPr>
-          <p:cNvPr id="8" name="Text 5"/>
-          <p:cNvSpPr txBox="1"/>
-          <p:nvPr/>
-        </p:nvSpPr>
-        <p:spPr>
-          <a:xfrm>
-            <a:off x="868680" y="3154680"/>
-            <a:ext cx="4754880" cy="2377440"/>
-          </a:xfrm>
-          <a:prstGeom prst="rect">
-            <a:avLst/>
-          </a:prstGeom>
-          <a:noFill/>
-          <a:ln/>
-        </p:spPr>
-        <p:txBody>
-          <a:bodyPr wrap="square" lIns="0" tIns="0" rIns="0" bIns="0" rtlCol="0" anchor="t"/>
-          <a:lstStyle/>
-          <a:p>
-            <a:pPr indent="0" marL="0">
-              <a:spcAft>
-                <a:spcPts val="600"/>
-              </a:spcAft>
-              <a:buNone/>
-            </a:pPr>
-            <a:r>
-              <a:rPr lang="en-US" sz="1500" b="1" dirty="0">
-                <a:solidFill>
-                  <a:srgbClr val="FFFFFF"/>
-                </a:solidFill>
-                <a:latin typeface="Calibri" pitchFamily="34" charset="0"/>
-                <a:ea typeface="Calibri" pitchFamily="34" charset="-122"/>
-                <a:cs typeface="Calibri" pitchFamily="34" charset="-120"/>
-              </a:rPr>
-              <a:t>Pengene går til:</a:t>
-            </a:r>
-            <a:endParaRPr lang="en-US" sz="1500" dirty="0"/>
-          </a:p>
-          <a:p>
-            <a:pPr marL="342900" indent="-342900">
-              <a:spcAft>
-                <a:spcPts val="600"/>
-              </a:spcAft>
-              <a:buSzPct val="100000"/>
-              <a:buChar char="•"/>
-            </a:pPr>
-            <a:r>
-              <a:rPr lang="en-US" sz="1500" dirty="0">
-                <a:solidFill>
-                  <a:srgbClr val="DCE6EE"/>
-                </a:solidFill>
-                <a:latin typeface="Calibri" pitchFamily="34" charset="0"/>
-                <a:ea typeface="Calibri" pitchFamily="34" charset="-122"/>
-                <a:cs typeface="Calibri" pitchFamily="34" charset="-120"/>
-              </a:rPr>
-              <a:t>Salg og innføring hos de første rederiene  </a:t>
-            </a:r>
-            <a:pPr indent="0" marL="0">
-              <a:spcAft>
-                <a:spcPts val="600"/>
-              </a:spcAft>
-              <a:buNone/>
-            </a:pPr>
-            <a:r>
-              <a:rPr lang="en-US" sz="1500" b="1" dirty="0">
-                <a:solidFill>
-                  <a:srgbClr val="E8751A"/>
-                </a:solidFill>
-                <a:latin typeface="Calibri" pitchFamily="34" charset="0"/>
-                <a:ea typeface="Calibri" pitchFamily="34" charset="-122"/>
-                <a:cs typeface="Calibri" pitchFamily="34" charset="-120"/>
-              </a:rPr>
-              <a:t>[FYLL INN: %]</a:t>
-            </a:r>
-            <a:pPr indent="0" marL="0">
-              <a:spcAft>
-                <a:spcPts val="600"/>
-              </a:spcAft>
-              <a:buNone/>
-            </a:pPr>
-            <a:endParaRPr lang="en-US" sz="1500" dirty="0"/>
-          </a:p>
-          <a:p>
-            <a:pPr marL="342900" indent="-342900">
-              <a:spcAft>
-                <a:spcPts val="600"/>
-              </a:spcAft>
-              <a:buSzPct val="100000"/>
-              <a:buChar char="•"/>
-            </a:pPr>
-            <a:r>
-              <a:rPr lang="en-US" sz="1500" dirty="0">
-                <a:solidFill>
-                  <a:srgbClr val="DCE6EE"/>
-                </a:solidFill>
-                <a:latin typeface="Calibri" pitchFamily="34" charset="0"/>
-                <a:ea typeface="Calibri" pitchFamily="34" charset="-122"/>
-                <a:cs typeface="Calibri" pitchFamily="34" charset="-120"/>
-              </a:rPr>
-              <a:t>Videreutvikling og godkjenninger  </a:t>
-            </a:r>
-            <a:pPr indent="0" marL="0">
-              <a:spcAft>
-                <a:spcPts val="600"/>
-              </a:spcAft>
-              <a:buNone/>
-            </a:pPr>
-            <a:r>
-              <a:rPr lang="en-US" sz="1500" b="1" dirty="0">
-                <a:solidFill>
-                  <a:srgbClr val="E8751A"/>
-                </a:solidFill>
-                <a:latin typeface="Calibri" pitchFamily="34" charset="0"/>
-                <a:ea typeface="Calibri" pitchFamily="34" charset="-122"/>
-                <a:cs typeface="Calibri" pitchFamily="34" charset="-120"/>
-              </a:rPr>
-              <a:t>[FYLL INN: %]</a:t>
-            </a:r>
-            <a:pPr indent="0" marL="0">
-              <a:spcAft>
-                <a:spcPts val="600"/>
-              </a:spcAft>
-              <a:buNone/>
-            </a:pPr>
-            <a:endParaRPr lang="en-US" sz="1500" dirty="0"/>
-          </a:p>
-          <a:p>
-            <a:pPr marL="342900" indent="-342900">
-              <a:spcAft>
-                <a:spcPts val="600"/>
-              </a:spcAft>
-              <a:buSzPct val="100000"/>
-              <a:buChar char="•"/>
-            </a:pPr>
-            <a:r>
-              <a:rPr lang="en-US" sz="1500" dirty="0">
-                <a:solidFill>
-                  <a:srgbClr val="DCE6EE"/>
-                </a:solidFill>
-                <a:latin typeface="Calibri" pitchFamily="34" charset="0"/>
-                <a:ea typeface="Calibri" pitchFamily="34" charset="-122"/>
-                <a:cs typeface="Calibri" pitchFamily="34" charset="-120"/>
-              </a:rPr>
-              <a:t>Drift og kundestøtte  </a:t>
-            </a:r>
-            <a:pPr indent="0" marL="0">
-              <a:spcAft>
-                <a:spcPts val="600"/>
-              </a:spcAft>
-              <a:buNone/>
-            </a:pPr>
-            <a:r>
-              <a:rPr lang="en-US" sz="1500" b="1" dirty="0">
-                <a:solidFill>
-                  <a:srgbClr val="E8751A"/>
-                </a:solidFill>
-                <a:latin typeface="Calibri" pitchFamily="34" charset="0"/>
-                <a:ea typeface="Calibri" pitchFamily="34" charset="-122"/>
-                <a:cs typeface="Calibri" pitchFamily="34" charset="-120"/>
-              </a:rPr>
-              <a:t>[FYLL INN: %]</a:t>
-            </a:r>
-            <a:endParaRPr lang="en-US" sz="1500" dirty="0"/>
-          </a:p>
-        </p:txBody>
-      </p:sp>
-      <p:sp>
-        <p:nvSpPr>
-          <p:cNvPr id="9" name="Kort"/>
-          <p:cNvSpPr/>
-          <p:nvPr/>
-        </p:nvSpPr>
-        <p:spPr>
-          <a:xfrm>
-            <a:off x="6217920" y="1828800"/>
-            <a:ext cx="5425135" cy="3886200"/>
-          </a:xfrm>
-          <a:prstGeom prst="roundRect">
-            <a:avLst>
-              <a:gd name="adj" fmla="val 2824"/>
-            </a:avLst>
-          </a:prstGeom>
-          <a:solidFill>
-            <a:srgbClr val="16324D"/>
-          </a:solidFill>
-          <a:ln/>
-        </p:spPr>
-      </p:sp>
-      <p:sp>
-        <p:nvSpPr>
-          <p:cNvPr id="10" name="Ikon-sirkel"/>
-          <p:cNvSpPr/>
-          <p:nvPr/>
-        </p:nvSpPr>
-        <p:spPr>
-          <a:xfrm>
-            <a:off x="6537960" y="2103120"/>
-            <a:ext cx="640080" cy="640080"/>
-          </a:xfrm>
-          <a:prstGeom prst="ellipse">
-            <a:avLst/>
-          </a:prstGeom>
-          <a:solidFill>
-            <a:srgbClr val="0E7C86"/>
-          </a:solidFill>
-          <a:ln/>
-        </p:spPr>
-      </p:sp>
-      <p:pic>
-        <p:nvPicPr>
-          <p:cNvPr id="11" name="Ikon FaHandshake" descr="preencoded.png">    </p:cNvPr>
-          <p:cNvPicPr>
-            <a:picLocks noChangeAspect="1"/>
-          </p:cNvPicPr>
-          <p:nvPr/>
-        </p:nvPicPr>
-        <p:blipFill>
-          <a:blip r:embed="rId2"/>
-          <a:stretch>
-            <a:fillRect/>
-          </a:stretch>
-        </p:blipFill>
-        <p:spPr>
-          <a:xfrm>
-            <a:off x="6691579" y="2256739"/>
-            <a:ext cx="332842" cy="332842"/>
-          </a:xfrm>
-          <a:prstGeom prst="rect">
-            <a:avLst/>
-          </a:prstGeom>
-        </p:spPr>
-      </p:pic>
-      <p:sp>
-        <p:nvSpPr>
-          <p:cNvPr id="12" name="Text 8"/>
-          <p:cNvSpPr txBox="1"/>
-          <p:nvPr/>
-        </p:nvSpPr>
-        <p:spPr>
-          <a:xfrm>
-            <a:off x="7360920" y="2103120"/>
-            <a:ext cx="4053535" cy="640080"/>
-          </a:xfrm>
-          <a:prstGeom prst="rect">
-            <a:avLst/>
-          </a:prstGeom>
-          <a:noFill/>
-          <a:ln/>
-        </p:spPr>
-        <p:txBody>
-          <a:bodyPr wrap="square" lIns="0" tIns="0" rIns="0" bIns="0" rtlCol="0" anchor="ctr"/>
-          <a:lstStyle/>
-          <a:p>
-            <a:pPr indent="0" marL="0">
-              <a:buNone/>
-            </a:pPr>
-            <a:r>
-              <a:rPr lang="en-US" sz="2200" b="1" dirty="0">
-                <a:solidFill>
-                  <a:srgbClr val="FFFFFF"/>
-                </a:solidFill>
-                <a:latin typeface="Calibri" pitchFamily="34" charset="0"/>
-                <a:ea typeface="Calibri" pitchFamily="34" charset="-122"/>
-                <a:cs typeface="Calibri" pitchFamily="34" charset="-120"/>
-              </a:rPr>
-              <a:t>Industripartner</a:t>
-            </a:r>
-            <a:endParaRPr lang="en-US" sz="2200" dirty="0"/>
-          </a:p>
-        </p:txBody>
-      </p:sp>
-      <p:sp>
-        <p:nvSpPr>
-          <p:cNvPr id="13" name="Text 9"/>
-          <p:cNvSpPr txBox="1"/>
-          <p:nvPr/>
-        </p:nvSpPr>
-        <p:spPr>
-          <a:xfrm>
-            <a:off x="6537960" y="3154680"/>
-            <a:ext cx="4785055" cy="1371600"/>
-          </a:xfrm>
-          <a:prstGeom prst="rect">
-            <a:avLst/>
-          </a:prstGeom>
-          <a:noFill/>
-          <a:ln/>
-        </p:spPr>
-        <p:txBody>
-          <a:bodyPr wrap="square" lIns="0" tIns="0" rIns="0" bIns="0" rtlCol="0" anchor="t"/>
-          <a:lstStyle/>
-          <a:p>
-            <a:pPr indent="0" marL="0">
-              <a:buNone/>
-            </a:pPr>
-            <a:r>
-              <a:rPr lang="en-US" sz="1600" dirty="0">
-                <a:solidFill>
-                  <a:srgbClr val="DCE6EE"/>
-                </a:solidFill>
-                <a:latin typeface="Calibri" pitchFamily="34" charset="0"/>
-                <a:ea typeface="Calibri" pitchFamily="34" charset="-122"/>
-                <a:cs typeface="Calibri" pitchFamily="34" charset="-120"/>
-              </a:rPr>
-              <a:t>Et fiskerederi som signerer en intensjonsavtale, tester Nautech på ett fartøy og blir vår første referansekunde. Signerte avtaler utløser også neste støtterunde fra Innovasjon Norge.</a:t>
-            </a:r>
-            <a:endParaRPr lang="en-US" sz="1600" dirty="0"/>
-          </a:p>
-        </p:txBody>
-      </p:sp>
-      <p:sp>
-        <p:nvSpPr>
-          <p:cNvPr id="14" name="Text 10"/>
-          <p:cNvSpPr txBox="1"/>
-          <p:nvPr/>
-        </p:nvSpPr>
-        <p:spPr>
-          <a:xfrm>
-            <a:off x="548640" y="5806440"/>
-            <a:ext cx="11094415" cy="548640"/>
-          </a:xfrm>
-          <a:prstGeom prst="rect">
-            <a:avLst/>
-          </a:prstGeom>
-          <a:noFill/>
-          <a:ln/>
-        </p:spPr>
-        <p:txBody>
-          <a:bodyPr wrap="square" lIns="0" tIns="0" rIns="0" bIns="0" rtlCol="0" anchor="t"/>
-          <a:lstStyle/>
-          <a:p>
-            <a:pPr indent="0" marL="0">
-              <a:buNone/>
-            </a:pPr>
-            <a:r>
-              <a:rPr lang="en-US" sz="1400" b="1" dirty="0">
-                <a:solidFill>
-                  <a:srgbClr val="FFFFFF"/>
-                </a:solidFill>
-                <a:latin typeface="Calibri" pitchFamily="34" charset="0"/>
-                <a:ea typeface="Calibri" pitchFamily="34" charset="-122"/>
-                <a:cs typeface="Calibri" pitchFamily="34" charset="-120"/>
-              </a:rPr>
-              <a:t>Arne Kopperstad  </a:t>
-            </a:r>
-            <a:pPr indent="0" marL="0">
-              <a:buNone/>
-            </a:pPr>
-            <a:r>
-              <a:rPr lang="en-US" sz="1400" dirty="0">
-                <a:solidFill>
-                  <a:srgbClr val="7FD1D6"/>
-                </a:solidFill>
-                <a:latin typeface="Calibri" pitchFamily="34" charset="0"/>
-                <a:ea typeface="Calibri" pitchFamily="34" charset="-122"/>
-                <a:cs typeface="Calibri" pitchFamily="34" charset="-120"/>
-              </a:rPr>
-              <a:t>akopperstad@seawise.no  ·  +47 480 35 351</a:t>
-            </a:r>
-            <a:endParaRPr lang="en-US" sz="1400" dirty="0"/>
-          </a:p>
-          <a:p>
-            <a:pPr indent="0" marL="0">
-              <a:buNone/>
-            </a:pPr>
-            <a:r>
-              <a:rPr lang="en-US" sz="1400" b="1" dirty="0">
-                <a:solidFill>
-                  <a:srgbClr val="FFFFFF"/>
-                </a:solidFill>
-                <a:latin typeface="Calibri" pitchFamily="34" charset="0"/>
-                <a:ea typeface="Calibri" pitchFamily="34" charset="-122"/>
-                <a:cs typeface="Calibri" pitchFamily="34" charset="-120"/>
-              </a:rPr>
-              <a:t>Kristian Kopperstad  </a:t>
-            </a:r>
-            <a:pPr indent="0" marL="0">
-              <a:buNone/>
-            </a:pPr>
-            <a:r>
-              <a:rPr lang="en-US" sz="1400" dirty="0">
-                <a:solidFill>
-                  <a:srgbClr val="7FD1D6"/>
-                </a:solidFill>
-                <a:latin typeface="Calibri" pitchFamily="34" charset="0"/>
-                <a:ea typeface="Calibri" pitchFamily="34" charset="-122"/>
-                <a:cs typeface="Calibri" pitchFamily="34" charset="-120"/>
-              </a:rPr>
-              <a:t>kkopperstad@seawise.no</a:t>
-            </a:r>
-            <a:endParaRPr lang="en-US" sz="1400" dirty="0"/>
-          </a:p>
-        </p:txBody>
-      </p:sp>
       <p:sp>
         <p:nvSpPr>
           <p:cNvPr id="25" name="Slide Number Placeholder 0"/>
@@ -5239,7 +5127,7 @@
             <a:lvl1pPr>
               <a:defRPr sz="1000">
                 <a:solidFill>
-                  <a:srgbClr val="9FB3C4"/>
+                  <a:srgbClr val="5B6B7A"/>
                 </a:solidFill>
                 <a:latin typeface="Calibri"/>
                 <a:ea typeface="Calibri"/>
@@ -5311,13 +5199,13 @@
             <a:r>
               <a:rPr lang="en-US" sz="1200" b="1" spc="200" kern="0" dirty="0">
                 <a:solidFill>
-                  <a:srgbClr val="0E7C86"/>
-                </a:solidFill>
-                <a:latin typeface="Calibri" pitchFamily="34" charset="0"/>
-                <a:ea typeface="Calibri" pitchFamily="34" charset="-122"/>
-                <a:cs typeface="Calibri" pitchFamily="34" charset="-120"/>
-              </a:rPr>
-              <a:t>VEDLEGG</a:t>
+                  <a:srgbClr val="7FD1D6"/>
+                </a:solidFill>
+                <a:latin typeface="Calibri" pitchFamily="34" charset="0"/>
+                <a:ea typeface="Calibri" pitchFamily="34" charset="-122"/>
+                <a:cs typeface="Calibri" pitchFamily="34" charset="-120"/>
+              </a:rPr>
+              <a:t>VEIEN VIDERE</a:t>
             </a:r>
             <a:endParaRPr lang="en-US" sz="1200" dirty="0"/>
           </a:p>
@@ -5352,13 +5240,13 @@
             <a:r>
               <a:rPr lang="en-US" sz="3000" b="1" dirty="0">
                 <a:solidFill>
-                  <a:srgbClr val="0B1F33"/>
+                  <a:srgbClr val="FFFFFF"/>
                 </a:solidFill>
                 <a:latin typeface="Arial" pitchFamily="34" charset="0"/>
                 <a:ea typeface="Arial" pitchFamily="34" charset="-122"/>
                 <a:cs typeface="Arial" pitchFamily="34" charset="-120"/>
               </a:rPr>
-              <a:t>Kilder og forutsetninger</a:t>
+              <a:t>Vi ser etter partnere som vil være med fra MVP til ferdig produkt</a:t>
             </a:r>
             <a:endParaRPr lang="en-US" sz="3000" dirty="0"/>
           </a:p>
@@ -5366,14 +5254,119 @@
       </p:sp>
       <p:sp>
         <p:nvSpPr>
-          <p:cNvPr id="4" name="Text 2"/>
+          <p:cNvPr id="4" name="Kort"/>
+          <p:cNvSpPr/>
+          <p:nvPr/>
+        </p:nvSpPr>
+        <p:spPr>
+          <a:xfrm>
+            <a:off x="548640" y="1828800"/>
+            <a:ext cx="5394960" cy="3886200"/>
+          </a:xfrm>
+          <a:prstGeom prst="roundRect">
+            <a:avLst>
+              <a:gd name="adj" fmla="val 2824"/>
+            </a:avLst>
+          </a:prstGeom>
+          <a:solidFill>
+            <a:srgbClr val="16324D"/>
+          </a:solidFill>
+          <a:ln/>
+        </p:spPr>
+      </p:sp>
+      <p:sp>
+        <p:nvSpPr>
+          <p:cNvPr id="5" name="Ikon-sirkel"/>
+          <p:cNvSpPr/>
+          <p:nvPr/>
+        </p:nvSpPr>
+        <p:spPr>
+          <a:xfrm>
+            <a:off x="868680" y="2103120"/>
+            <a:ext cx="640080" cy="640080"/>
+          </a:xfrm>
+          <a:prstGeom prst="ellipse">
+            <a:avLst/>
+          </a:prstGeom>
+          <a:solidFill>
+            <a:srgbClr val="0E7C86"/>
+          </a:solidFill>
+          <a:ln/>
+        </p:spPr>
+      </p:sp>
+      <p:pic>
+        <p:nvPicPr>
+          <p:cNvPr id="6" name="Ikon FaSackDollar" descr="preencoded.png">    </p:cNvPr>
+          <p:cNvPicPr>
+            <a:picLocks noChangeAspect="1"/>
+          </p:cNvPicPr>
+          <p:nvPr/>
+        </p:nvPicPr>
+        <p:blipFill>
+          <a:blip r:embed="rId1"/>
+          <a:stretch>
+            <a:fillRect/>
+          </a:stretch>
+        </p:blipFill>
+        <p:spPr>
+          <a:xfrm>
+            <a:off x="1022299" y="2256739"/>
+            <a:ext cx="332842" cy="332842"/>
+          </a:xfrm>
+          <a:prstGeom prst="rect">
+            <a:avLst/>
+          </a:prstGeom>
+        </p:spPr>
+      </p:pic>
+      <p:sp>
+        <p:nvSpPr>
+          <p:cNvPr id="7" name="Text 4"/>
           <p:cNvSpPr txBox="1"/>
           <p:nvPr/>
         </p:nvSpPr>
         <p:spPr>
           <a:xfrm>
-            <a:off x="548640" y="1828800"/>
-            <a:ext cx="5303520" cy="3840480"/>
+            <a:off x="1691640" y="2103120"/>
+            <a:ext cx="4023360" cy="640080"/>
+          </a:xfrm>
+          <a:prstGeom prst="rect">
+            <a:avLst/>
+          </a:prstGeom>
+          <a:noFill/>
+          <a:ln/>
+        </p:spPr>
+        <p:txBody>
+          <a:bodyPr wrap="square" lIns="0" tIns="0" rIns="0" bIns="0" rtlCol="0" anchor="ctr"/>
+          <a:lstStyle/>
+          <a:p>
+            <a:pPr indent="0" marL="0">
+              <a:buNone/>
+            </a:pPr>
+            <a:r>
+              <a:rPr lang="en-US" sz="2200" b="1" dirty="0">
+                <a:solidFill>
+                  <a:srgbClr val="FFFFFF"/>
+                </a:solidFill>
+                <a:latin typeface="Calibri" pitchFamily="34" charset="0"/>
+                <a:ea typeface="Calibri" pitchFamily="34" charset="-122"/>
+                <a:cs typeface="Calibri" pitchFamily="34" charset="-120"/>
+              </a:rPr>
+              <a:t>Investorer</a:t>
+            </a:r>
+            <a:endParaRPr lang="en-US" sz="2200" dirty="0"/>
+          </a:p>
+        </p:txBody>
+      </p:sp>
+      <p:sp>
+        <p:nvSpPr>
+          <p:cNvPr id="8" name="Text 5"/>
+          <p:cNvSpPr txBox="1"/>
+          <p:nvPr/>
+        </p:nvSpPr>
+        <p:spPr>
+          <a:xfrm>
+            <a:off x="868680" y="3017520"/>
+            <a:ext cx="4754880" cy="2560320"/>
           </a:xfrm>
           <a:prstGeom prst="rect">
             <a:avLst/>
@@ -5387,27 +5380,67 @@
           <a:p>
             <a:pPr indent="0" marL="0">
               <a:spcAft>
-                <a:spcPts val="800"/>
+                <a:spcPts val="400"/>
               </a:spcAft>
               <a:buNone/>
             </a:pPr>
             <a:r>
-              <a:rPr lang="en-US" sz="1700" b="1" dirty="0">
-                <a:solidFill>
-                  <a:srgbClr val="0B1F33"/>
-                </a:solidFill>
-                <a:latin typeface="Calibri" pitchFamily="34" charset="0"/>
-                <a:ea typeface="Calibri" pitchFamily="34" charset="-122"/>
-                <a:cs typeface="Calibri" pitchFamily="34" charset="-120"/>
-              </a:rPr>
-              <a:t>Kilder</a:t>
+              <a:rPr lang="en-US" sz="1500" dirty="0">
+                <a:solidFill>
+                  <a:srgbClr val="DCE6EE"/>
+                </a:solidFill>
+                <a:latin typeface="Calibri" pitchFamily="34" charset="0"/>
+                <a:ea typeface="Calibri" pitchFamily="34" charset="-122"/>
+                <a:cs typeface="Calibri" pitchFamily="34" charset="-120"/>
+              </a:rPr>
+              <a:t>Vi vil bli kjent med investorer som forstår maritim næring og vil følge Nautech videre.</a:t>
+            </a:r>
+            <a:endParaRPr lang="en-US" sz="1500" dirty="0"/>
+          </a:p>
+          <a:p>
+            <a:pPr indent="0" marL="0">
+              <a:spcAft>
+                <a:spcPts val="400"/>
+              </a:spcAft>
+              <a:buNone/>
+            </a:pPr>
+            <a:r>
+              <a:rPr lang="en-US" sz="600" dirty="0">
+                <a:solidFill>
+                  <a:srgbClr val="1B2A38"/>
+                </a:solidFill>
+                <a:latin typeface="Calibri" pitchFamily="34" charset="0"/>
+                <a:ea typeface="Calibri" pitchFamily="34" charset="-122"/>
+                <a:cs typeface="Calibri" pitchFamily="34" charset="-120"/>
+              </a:rPr>
+              <a:t> </a:t>
+            </a:r>
+            <a:endParaRPr lang="en-US" sz="1500" dirty="0"/>
+          </a:p>
+          <a:p>
+            <a:pPr indent="0" marL="0">
+              <a:spcAft>
+                <a:spcPts val="400"/>
+              </a:spcAft>
+              <a:buNone/>
+            </a:pPr>
+            <a:r>
+              <a:rPr lang="en-US" sz="1500" b="1" dirty="0">
+                <a:solidFill>
+                  <a:srgbClr val="FFFFFF"/>
+                </a:solidFill>
+                <a:latin typeface="Calibri" pitchFamily="34" charset="0"/>
+                <a:ea typeface="Calibri" pitchFamily="34" charset="-122"/>
+                <a:cs typeface="Calibri" pitchFamily="34" charset="-120"/>
+              </a:rPr>
+              <a:t>Hvorfor nå:</a:t>
             </a:r>
             <a:endParaRPr lang="en-US" sz="1500" dirty="0"/>
           </a:p>
           <a:p>
             <a:pPr marL="342900" indent="-342900">
               <a:spcAft>
-                <a:spcPts val="800"/>
+                <a:spcPts val="400"/>
               </a:spcAft>
               <a:buSzPct val="100000"/>
               <a:buChar char="•"/>
@@ -5415,20 +5448,20 @@
             <a:r>
               <a:rPr lang="en-US" sz="1500" dirty="0">
                 <a:solidFill>
-                  <a:srgbClr val="1B2A38"/>
-                </a:solidFill>
-                <a:latin typeface="Calibri" pitchFamily="34" charset="0"/>
-                <a:ea typeface="Calibri" pitchFamily="34" charset="-122"/>
-                <a:cs typeface="Calibri" pitchFamily="34" charset="-120"/>
-              </a:rPr>
-              <a:t>Fiskeridirektoratet: Nøkkeltal 2025, figur 23 – registrerte fiskefartøy etter lengde (foreløpige tall)</a:t>
+                  <a:srgbClr val="DCE6EE"/>
+                </a:solidFill>
+                <a:latin typeface="Calibri" pitchFamily="34" charset="0"/>
+                <a:ea typeface="Calibri" pitchFamily="34" charset="-122"/>
+                <a:cs typeface="Calibri" pitchFamily="34" charset="-120"/>
+              </a:rPr>
+              <a:t>MVP-en er klar og kan vises i demo</a:t>
             </a:r>
             <a:endParaRPr lang="en-US" sz="1500" dirty="0"/>
           </a:p>
           <a:p>
             <a:pPr marL="342900" indent="-342900">
               <a:spcAft>
-                <a:spcPts val="800"/>
+                <a:spcPts val="400"/>
               </a:spcAft>
               <a:buSzPct val="100000"/>
               <a:buChar char="•"/>
@@ -5436,20 +5469,20 @@
             <a:r>
               <a:rPr lang="en-US" sz="1500" dirty="0">
                 <a:solidFill>
-                  <a:srgbClr val="1B2A38"/>
-                </a:solidFill>
-                <a:latin typeface="Calibri" pitchFamily="34" charset="0"/>
-                <a:ea typeface="Calibri" pitchFamily="34" charset="-122"/>
-                <a:cs typeface="Calibri" pitchFamily="34" charset="-120"/>
-              </a:rPr>
-              <a:t>EUs fartøyregister: fiskefartøy over 24 meter, 2021-tall</a:t>
+                  <a:srgbClr val="DCE6EE"/>
+                </a:solidFill>
+                <a:latin typeface="Calibri" pitchFamily="34" charset="0"/>
+                <a:ea typeface="Calibri" pitchFamily="34" charset="-122"/>
+                <a:cs typeface="Calibri" pitchFamily="34" charset="-120"/>
+              </a:rPr>
+              <a:t>Rederier i hele Norge er kontaktet, og flere har vist interesse</a:t>
             </a:r>
             <a:endParaRPr lang="en-US" sz="1500" dirty="0"/>
           </a:p>
           <a:p>
             <a:pPr marL="342900" indent="-342900">
               <a:spcAft>
-                <a:spcPts val="800"/>
+                <a:spcPts val="400"/>
               </a:spcAft>
               <a:buSzPct val="100000"/>
               <a:buChar char="•"/>
@@ -5457,13 +5490,13 @@
             <a:r>
               <a:rPr lang="en-US" sz="1500" dirty="0">
                 <a:solidFill>
-                  <a:srgbClr val="1B2A38"/>
-                </a:solidFill>
-                <a:latin typeface="Calibri" pitchFamily="34" charset="0"/>
-                <a:ea typeface="Calibri" pitchFamily="34" charset="-122"/>
-                <a:cs typeface="Calibri" pitchFamily="34" charset="-120"/>
-              </a:rPr>
-              <a:t>CCOM X, PreMaster 3.0, SERTICA AI Assistant, AMOS Procure Smart, TM Master: leverandørenes egne nettsider, oktober 2026</a:t>
+                  <a:srgbClr val="DCE6EE"/>
+                </a:solidFill>
+                <a:latin typeface="Calibri" pitchFamily="34" charset="0"/>
+                <a:ea typeface="Calibri" pitchFamily="34" charset="-122"/>
+                <a:cs typeface="Calibri" pitchFamily="34" charset="-120"/>
+              </a:rPr>
+              <a:t>Neste steg er intensjonsavtaler og støtte fra Innovasjon Norge</a:t>
             </a:r>
             <a:endParaRPr lang="en-US" sz="1500" dirty="0"/>
           </a:p>
@@ -5471,14 +5504,80 @@
       </p:sp>
       <p:sp>
         <p:nvSpPr>
-          <p:cNvPr id="5" name="Text 3"/>
+          <p:cNvPr id="9" name="Kort"/>
+          <p:cNvSpPr/>
+          <p:nvPr/>
+        </p:nvSpPr>
+        <p:spPr>
+          <a:xfrm>
+            <a:off x="6217920" y="1828800"/>
+            <a:ext cx="5425135" cy="3886200"/>
+          </a:xfrm>
+          <a:prstGeom prst="roundRect">
+            <a:avLst>
+              <a:gd name="adj" fmla="val 2824"/>
+            </a:avLst>
+          </a:prstGeom>
+          <a:solidFill>
+            <a:srgbClr val="16324D"/>
+          </a:solidFill>
+          <a:ln/>
+        </p:spPr>
+      </p:sp>
+      <p:sp>
+        <p:nvSpPr>
+          <p:cNvPr id="10" name="Ikon-sirkel"/>
+          <p:cNvSpPr/>
+          <p:nvPr/>
+        </p:nvSpPr>
+        <p:spPr>
+          <a:xfrm>
+            <a:off x="6537960" y="2103120"/>
+            <a:ext cx="640080" cy="640080"/>
+          </a:xfrm>
+          <a:prstGeom prst="ellipse">
+            <a:avLst/>
+          </a:prstGeom>
+          <a:solidFill>
+            <a:srgbClr val="0E7C86"/>
+          </a:solidFill>
+          <a:ln/>
+        </p:spPr>
+      </p:sp>
+      <p:pic>
+        <p:nvPicPr>
+          <p:cNvPr id="11" name="Ikon FaHandshake" descr="preencoded.png">    </p:cNvPr>
+          <p:cNvPicPr>
+            <a:picLocks noChangeAspect="1"/>
+          </p:cNvPicPr>
+          <p:nvPr/>
+        </p:nvPicPr>
+        <p:blipFill>
+          <a:blip r:embed="rId2"/>
+          <a:stretch>
+            <a:fillRect/>
+          </a:stretch>
+        </p:blipFill>
+        <p:spPr>
+          <a:xfrm>
+            <a:off x="6691579" y="2256739"/>
+            <a:ext cx="332842" cy="332842"/>
+          </a:xfrm>
+          <a:prstGeom prst="rect">
+            <a:avLst/>
+          </a:prstGeom>
+        </p:spPr>
+      </p:pic>
+      <p:sp>
+        <p:nvSpPr>
+          <p:cNvPr id="12" name="Text 8"/>
           <p:cNvSpPr txBox="1"/>
           <p:nvPr/>
         </p:nvSpPr>
         <p:spPr>
           <a:xfrm>
-            <a:off x="6309360" y="1828800"/>
-            <a:ext cx="5333695" cy="3840480"/>
+            <a:off x="7360920" y="2103120"/>
+            <a:ext cx="4053535" cy="640080"/>
           </a:xfrm>
           <a:prstGeom prst="rect">
             <a:avLst/>
@@ -5487,111 +5586,147 @@
           <a:ln/>
         </p:spPr>
         <p:txBody>
+          <a:bodyPr wrap="square" lIns="0" tIns="0" rIns="0" bIns="0" rtlCol="0" anchor="ctr"/>
+          <a:lstStyle/>
+          <a:p>
+            <a:pPr indent="0" marL="0">
+              <a:buNone/>
+            </a:pPr>
+            <a:r>
+              <a:rPr lang="en-US" sz="2200" b="1" dirty="0">
+                <a:solidFill>
+                  <a:srgbClr val="FFFFFF"/>
+                </a:solidFill>
+                <a:latin typeface="Calibri" pitchFamily="34" charset="0"/>
+                <a:ea typeface="Calibri" pitchFamily="34" charset="-122"/>
+                <a:cs typeface="Calibri" pitchFamily="34" charset="-120"/>
+              </a:rPr>
+              <a:t>Industripartner</a:t>
+            </a:r>
+            <a:endParaRPr lang="en-US" sz="2200" dirty="0"/>
+          </a:p>
+        </p:txBody>
+      </p:sp>
+      <p:sp>
+        <p:nvSpPr>
+          <p:cNvPr id="13" name="Text 9"/>
+          <p:cNvSpPr txBox="1"/>
+          <p:nvPr/>
+        </p:nvSpPr>
+        <p:spPr>
+          <a:xfrm>
+            <a:off x="6537960" y="3154680"/>
+            <a:ext cx="4785055" cy="1371600"/>
+          </a:xfrm>
+          <a:prstGeom prst="rect">
+            <a:avLst/>
+          </a:prstGeom>
+          <a:noFill/>
+          <a:ln/>
+        </p:spPr>
+        <p:txBody>
           <a:bodyPr wrap="square" lIns="0" tIns="0" rIns="0" bIns="0" rtlCol="0" anchor="t"/>
           <a:lstStyle/>
           <a:p>
             <a:pPr indent="0" marL="0">
-              <a:spcAft>
-                <a:spcPts val="800"/>
-              </a:spcAft>
-              <a:buNone/>
-            </a:pPr>
-            <a:r>
-              <a:rPr lang="en-US" sz="1700" b="1" dirty="0">
-                <a:solidFill>
-                  <a:srgbClr val="0B1F33"/>
-                </a:solidFill>
-                <a:latin typeface="Calibri" pitchFamily="34" charset="0"/>
-                <a:ea typeface="Calibri" pitchFamily="34" charset="-122"/>
-                <a:cs typeface="Calibri" pitchFamily="34" charset="-120"/>
-              </a:rPr>
-              <a:t>Forutsetninger</a:t>
-            </a:r>
-            <a:endParaRPr lang="en-US" sz="1500" dirty="0"/>
-          </a:p>
-          <a:p>
-            <a:pPr marL="342900" indent="-342900">
-              <a:spcAft>
-                <a:spcPts val="800"/>
-              </a:spcAft>
-              <a:buSzPct val="100000"/>
-              <a:buChar char="•"/>
-            </a:pPr>
-            <a:r>
-              <a:rPr lang="en-US" sz="1500" dirty="0">
-                <a:solidFill>
-                  <a:srgbClr val="1B2A38"/>
-                </a:solidFill>
-                <a:latin typeface="Calibri" pitchFamily="34" charset="0"/>
-                <a:ea typeface="Calibri" pitchFamily="34" charset="-122"/>
-                <a:cs typeface="Calibri" pitchFamily="34" charset="-120"/>
-              </a:rPr>
-              <a:t>Pris: 1 000 kr per modul per fartøy per måned, 14 000 kr for alle 14 moduler, ekskl. mva.</a:t>
-            </a:r>
-            <a:endParaRPr lang="en-US" sz="1500" dirty="0"/>
-          </a:p>
-          <a:p>
-            <a:pPr marL="342900" indent="-342900">
-              <a:spcAft>
-                <a:spcPts val="800"/>
-              </a:spcAft>
-              <a:buSzPct val="100000"/>
-              <a:buChar char="•"/>
-            </a:pPr>
-            <a:r>
-              <a:rPr lang="en-US" sz="1500" dirty="0">
-                <a:solidFill>
-                  <a:srgbClr val="1B2A38"/>
-                </a:solidFill>
-                <a:latin typeface="Calibri" pitchFamily="34" charset="0"/>
-                <a:ea typeface="Calibri" pitchFamily="34" charset="-122"/>
-                <a:cs typeface="Calibri" pitchFamily="34" charset="-120"/>
-              </a:rPr>
-              <a:t>Markedsverdi forutsetter full dekning og samme pris i alle markeder. Det er en størrelsesorden, ikke en prognose.</a:t>
-            </a:r>
-            <a:endParaRPr lang="en-US" sz="1500" dirty="0"/>
-          </a:p>
-          <a:p>
-            <a:pPr marL="342900" indent="-342900">
-              <a:spcAft>
-                <a:spcPts val="800"/>
-              </a:spcAft>
-              <a:buSzPct val="100000"/>
-              <a:buChar char="•"/>
-            </a:pPr>
-            <a:r>
-              <a:rPr lang="en-US" sz="1500" dirty="0">
-                <a:solidFill>
-                  <a:srgbClr val="1B2A38"/>
-                </a:solidFill>
-                <a:latin typeface="Calibri" pitchFamily="34" charset="0"/>
-                <a:ea typeface="Calibri" pitchFamily="34" charset="-122"/>
-                <a:cs typeface="Calibri" pitchFamily="34" charset="-120"/>
-              </a:rPr>
-              <a:t>Inntektseksemplene er regneeksempler før kostnader.</a:t>
-            </a:r>
-            <a:endParaRPr lang="en-US" sz="1500" dirty="0"/>
-          </a:p>
-          <a:p>
-            <a:pPr marL="342900" indent="-342900">
-              <a:spcAft>
-                <a:spcPts val="800"/>
-              </a:spcAft>
-              <a:buSzPct val="100000"/>
-              <a:buChar char="•"/>
-            </a:pPr>
-            <a:r>
-              <a:rPr lang="en-US" sz="1500" dirty="0">
-                <a:solidFill>
-                  <a:srgbClr val="1B2A38"/>
-                </a:solidFill>
-                <a:latin typeface="Calibri" pitchFamily="34" charset="0"/>
-                <a:ea typeface="Calibri" pitchFamily="34" charset="-122"/>
-                <a:cs typeface="Calibri" pitchFamily="34" charset="-120"/>
-              </a:rPr>
-              <a:t>Sammenligningen med konkurrenter bygger på offentlig informasjon, ikke på egen testing.</a:t>
-            </a:r>
-            <a:endParaRPr lang="en-US" sz="1500" dirty="0"/>
+              <a:buNone/>
+            </a:pPr>
+            <a:r>
+              <a:rPr lang="en-US" sz="1600" dirty="0">
+                <a:solidFill>
+                  <a:srgbClr val="DCE6EE"/>
+                </a:solidFill>
+                <a:latin typeface="Calibri" pitchFamily="34" charset="0"/>
+                <a:ea typeface="Calibri" pitchFamily="34" charset="-122"/>
+                <a:cs typeface="Calibri" pitchFamily="34" charset="-120"/>
+              </a:rPr>
+              <a:t>Et fiskerederi som signerer en intensjonsavtale, tester Nautech på ett fartøy og blir vår første referansekunde. Signerte avtaler utløser også neste støtterunde fra Innovasjon Norge.</a:t>
+            </a:r>
+            <a:endParaRPr lang="en-US" sz="1600" dirty="0"/>
+          </a:p>
+        </p:txBody>
+      </p:sp>
+      <p:sp>
+        <p:nvSpPr>
+          <p:cNvPr id="14" name="Text 10"/>
+          <p:cNvSpPr txBox="1"/>
+          <p:nvPr/>
+        </p:nvSpPr>
+        <p:spPr>
+          <a:xfrm>
+            <a:off x="548640" y="5806440"/>
+            <a:ext cx="11094415" cy="548640"/>
+          </a:xfrm>
+          <a:prstGeom prst="rect">
+            <a:avLst/>
+          </a:prstGeom>
+          <a:noFill/>
+          <a:ln/>
+        </p:spPr>
+        <p:txBody>
+          <a:bodyPr wrap="square" lIns="0" tIns="0" rIns="0" bIns="0" rtlCol="0" anchor="t"/>
+          <a:lstStyle/>
+          <a:p>
+            <a:pPr indent="0" marL="0">
+              <a:buNone/>
+            </a:pPr>
+            <a:r>
+              <a:rPr lang="en-US" sz="1400" b="1" dirty="0">
+                <a:solidFill>
+                  <a:srgbClr val="FFFFFF"/>
+                </a:solidFill>
+                <a:latin typeface="Calibri" pitchFamily="34" charset="0"/>
+                <a:ea typeface="Calibri" pitchFamily="34" charset="-122"/>
+                <a:cs typeface="Calibri" pitchFamily="34" charset="-120"/>
+              </a:rPr>
+              <a:t>Arne Kopperstad  </a:t>
+            </a:r>
+            <a:pPr indent="0" marL="0">
+              <a:buNone/>
+            </a:pPr>
+            <a:r>
+              <a:rPr lang="en-US" sz="1400" dirty="0">
+                <a:solidFill>
+                  <a:srgbClr val="7FD1D6"/>
+                </a:solidFill>
+                <a:latin typeface="Calibri" pitchFamily="34" charset="0"/>
+                <a:ea typeface="Calibri" pitchFamily="34" charset="-122"/>
+                <a:cs typeface="Calibri" pitchFamily="34" charset="-120"/>
+              </a:rPr>
+              <a:t>akopperstad@seawise.no  ·  +47 480 35 351</a:t>
+            </a:r>
+            <a:endParaRPr lang="en-US" sz="1400" dirty="0"/>
+          </a:p>
+          <a:p>
+            <a:pPr indent="0" marL="0">
+              <a:buNone/>
+            </a:pPr>
+            <a:r>
+              <a:rPr lang="en-US" sz="1400" b="1" dirty="0">
+                <a:solidFill>
+                  <a:srgbClr val="FFFFFF"/>
+                </a:solidFill>
+                <a:latin typeface="Calibri" pitchFamily="34" charset="0"/>
+                <a:ea typeface="Calibri" pitchFamily="34" charset="-122"/>
+                <a:cs typeface="Calibri" pitchFamily="34" charset="-120"/>
+              </a:rPr>
+              <a:t>Kristian Kopperstad  </a:t>
+            </a:r>
+            <a:pPr indent="0" marL="0">
+              <a:buNone/>
+            </a:pPr>
+            <a:r>
+              <a:rPr lang="en-US" sz="1400" dirty="0">
+                <a:solidFill>
+                  <a:srgbClr val="7FD1D6"/>
+                </a:solidFill>
+                <a:latin typeface="Calibri" pitchFamily="34" charset="0"/>
+                <a:ea typeface="Calibri" pitchFamily="34" charset="-122"/>
+                <a:cs typeface="Calibri" pitchFamily="34" charset="-120"/>
+              </a:rPr>
+              <a:t>kkopperstad@seawise.no</a:t>
+            </a:r>
+            <a:endParaRPr lang="en-US" sz="1400" dirty="0"/>
           </a:p>
         </p:txBody>
       </p:sp>
@@ -5625,7 +5760,7 @@
             <a:lvl1pPr>
               <a:defRPr sz="1000">
                 <a:solidFill>
-                  <a:srgbClr val="5B6B7A"/>
+                  <a:srgbClr val="9FB3C4"/>
                 </a:solidFill>
                 <a:latin typeface="Calibri"/>
                 <a:ea typeface="Calibri"/>
@@ -5638,6 +5773,392 @@
             <a:fld id="{F7021451-1387-4CA6-816F-3879F97B5CBC}" type="slidenum">
               <a:rPr b="0" lang="en-US"/>
               <a:t>13</a:t>
+            </a:fld>
+            <a:endParaRPr lang="en-US"/>
+          </a:p>
+        </p:txBody>
+      </p:sp>
+    </p:spTree>
+  </p:cSld>
+  <p:clrMapOvr>
+    <a:masterClrMapping/>
+  </p:clrMapOvr>
+</p:sld>
+</file>
+
+<file path=ppt/slides/slide14.xml><?xml version="1.0" encoding="utf-8"?>
+<p:sld xmlns:a="http://schemas.openxmlformats.org/drawingml/2006/main" xmlns:r="http://schemas.openxmlformats.org/officeDocument/2006/relationships" xmlns:p="http://schemas.openxmlformats.org/presentationml/2006/main">
+  <p:cSld name="Slide 14">
+    <p:spTree>
+      <p:nvGrpSpPr>
+        <p:cNvPr id="1" name=""/>
+        <p:cNvGrpSpPr/>
+        <p:nvPr/>
+      </p:nvGrpSpPr>
+      <p:grpSpPr>
+        <a:xfrm>
+          <a:off x="0" y="0"/>
+          <a:ext cx="0" cy="0"/>
+          <a:chOff x="0" y="0"/>
+          <a:chExt cx="0" cy="0"/>
+        </a:xfrm>
+      </p:grpSpPr>
+      <p:sp>
+        <p:nvSpPr>
+          <p:cNvPr id="2" name="Text 1"/>
+          <p:cNvSpPr/>
+          <p:nvPr>
+            <p:ph idx="101" type="body" hasCustomPrompt="1"/>
+          </p:nvPr>
+        </p:nvSpPr>
+        <p:spPr>
+          <a:xfrm>
+            <a:off x="548640" y="365760"/>
+            <a:ext cx="9144000" cy="274320"/>
+          </a:xfrm>
+          <a:prstGeom prst="rect">
+            <a:avLst/>
+          </a:prstGeom>
+          <a:noFill/>
+          <a:ln/>
+        </p:spPr>
+        <p:txBody>
+          <a:bodyPr wrap="square" lIns="0" tIns="0" rIns="0" bIns="0" rtlCol="0"/>
+          <a:lstStyle/>
+          <a:p>
+            <a:pPr indent="0" marL="0">
+              <a:buNone/>
+            </a:pPr>
+            <a:r>
+              <a:rPr lang="en-US" sz="1200" b="1" spc="200" kern="0" dirty="0">
+                <a:solidFill>
+                  <a:srgbClr val="0E7C86"/>
+                </a:solidFill>
+                <a:latin typeface="Calibri" pitchFamily="34" charset="0"/>
+                <a:ea typeface="Calibri" pitchFamily="34" charset="-122"/>
+                <a:cs typeface="Calibri" pitchFamily="34" charset="-120"/>
+              </a:rPr>
+              <a:t>VEDLEGG</a:t>
+            </a:r>
+            <a:endParaRPr lang="en-US" sz="1200" dirty="0"/>
+          </a:p>
+        </p:txBody>
+      </p:sp>
+      <p:sp>
+        <p:nvSpPr>
+          <p:cNvPr id="3" name="Text 1"/>
+          <p:cNvSpPr/>
+          <p:nvPr>
+            <p:ph idx="102" type="title" hasCustomPrompt="1"/>
+          </p:nvPr>
+        </p:nvSpPr>
+        <p:spPr>
+          <a:xfrm>
+            <a:off x="548640" y="658368"/>
+            <a:ext cx="11094415" cy="1051560"/>
+          </a:xfrm>
+          <a:prstGeom prst="rect">
+            <a:avLst/>
+          </a:prstGeom>
+          <a:noFill/>
+          <a:ln/>
+        </p:spPr>
+        <p:txBody>
+          <a:bodyPr wrap="square" lIns="0" tIns="0" rIns="0" bIns="0" rtlCol="0" anchor="t"/>
+          <a:lstStyle/>
+          <a:p>
+            <a:pPr algn="l" indent="0" marL="0">
+              <a:buNone/>
+            </a:pPr>
+            <a:r>
+              <a:rPr lang="en-US" sz="3000" b="1" dirty="0">
+                <a:solidFill>
+                  <a:srgbClr val="0B1F33"/>
+                </a:solidFill>
+                <a:latin typeface="Arial" pitchFamily="34" charset="0"/>
+                <a:ea typeface="Arial" pitchFamily="34" charset="-122"/>
+                <a:cs typeface="Arial" pitchFamily="34" charset="-120"/>
+              </a:rPr>
+              <a:t>Kilder og forutsetninger</a:t>
+            </a:r>
+            <a:endParaRPr lang="en-US" sz="3000" dirty="0"/>
+          </a:p>
+        </p:txBody>
+      </p:sp>
+      <p:sp>
+        <p:nvSpPr>
+          <p:cNvPr id="4" name="Text 2"/>
+          <p:cNvSpPr txBox="1"/>
+          <p:nvPr/>
+        </p:nvSpPr>
+        <p:spPr>
+          <a:xfrm>
+            <a:off x="548640" y="1828800"/>
+            <a:ext cx="5303520" cy="3840480"/>
+          </a:xfrm>
+          <a:prstGeom prst="rect">
+            <a:avLst/>
+          </a:prstGeom>
+          <a:noFill/>
+          <a:ln/>
+        </p:spPr>
+        <p:txBody>
+          <a:bodyPr wrap="square" lIns="0" tIns="0" rIns="0" bIns="0" rtlCol="0" anchor="t"/>
+          <a:lstStyle/>
+          <a:p>
+            <a:pPr indent="0" marL="0">
+              <a:spcAft>
+                <a:spcPts val="800"/>
+              </a:spcAft>
+              <a:buNone/>
+            </a:pPr>
+            <a:r>
+              <a:rPr lang="en-US" sz="1700" b="1" dirty="0">
+                <a:solidFill>
+                  <a:srgbClr val="0B1F33"/>
+                </a:solidFill>
+                <a:latin typeface="Calibri" pitchFamily="34" charset="0"/>
+                <a:ea typeface="Calibri" pitchFamily="34" charset="-122"/>
+                <a:cs typeface="Calibri" pitchFamily="34" charset="-120"/>
+              </a:rPr>
+              <a:t>Kilder</a:t>
+            </a:r>
+            <a:endParaRPr lang="en-US" sz="1500" dirty="0"/>
+          </a:p>
+          <a:p>
+            <a:pPr marL="342900" indent="-342900">
+              <a:spcAft>
+                <a:spcPts val="800"/>
+              </a:spcAft>
+              <a:buSzPct val="100000"/>
+              <a:buChar char="•"/>
+            </a:pPr>
+            <a:r>
+              <a:rPr lang="en-US" sz="1500" dirty="0">
+                <a:solidFill>
+                  <a:srgbClr val="1B2A38"/>
+                </a:solidFill>
+                <a:latin typeface="Calibri" pitchFamily="34" charset="0"/>
+                <a:ea typeface="Calibri" pitchFamily="34" charset="-122"/>
+                <a:cs typeface="Calibri" pitchFamily="34" charset="-120"/>
+              </a:rPr>
+              <a:t>Fiskeridirektoratet: Nøkkeltal 2025, figur 23 – registrerte fiskefartøy etter lengde (foreløpige tall)</a:t>
+            </a:r>
+            <a:endParaRPr lang="en-US" sz="1500" dirty="0"/>
+          </a:p>
+          <a:p>
+            <a:pPr marL="342900" indent="-342900">
+              <a:spcAft>
+                <a:spcPts val="800"/>
+              </a:spcAft>
+              <a:buSzPct val="100000"/>
+              <a:buChar char="•"/>
+            </a:pPr>
+            <a:r>
+              <a:rPr lang="en-US" sz="1500" dirty="0">
+                <a:solidFill>
+                  <a:srgbClr val="1B2A38"/>
+                </a:solidFill>
+                <a:latin typeface="Calibri" pitchFamily="34" charset="0"/>
+                <a:ea typeface="Calibri" pitchFamily="34" charset="-122"/>
+                <a:cs typeface="Calibri" pitchFamily="34" charset="-120"/>
+              </a:rPr>
+              <a:t>EUs fartøyregister: fiskefartøy over 24 meter, 2021-tall</a:t>
+            </a:r>
+            <a:endParaRPr lang="en-US" sz="1500" dirty="0"/>
+          </a:p>
+          <a:p>
+            <a:pPr marL="342900" indent="-342900">
+              <a:spcAft>
+                <a:spcPts val="800"/>
+              </a:spcAft>
+              <a:buSzPct val="100000"/>
+              <a:buChar char="•"/>
+            </a:pPr>
+            <a:r>
+              <a:rPr lang="en-US" sz="1500" dirty="0">
+                <a:solidFill>
+                  <a:srgbClr val="1B2A38"/>
+                </a:solidFill>
+                <a:latin typeface="Calibri" pitchFamily="34" charset="0"/>
+                <a:ea typeface="Calibri" pitchFamily="34" charset="-122"/>
+                <a:cs typeface="Calibri" pitchFamily="34" charset="-120"/>
+              </a:rPr>
+              <a:t>CCOM X, PreMaster 3.0, SERTICA AI Assistant, AMOS Procure Smart, TM Master: leverandørenes egne nettsider, oktober 2026</a:t>
+            </a:r>
+            <a:endParaRPr lang="en-US" sz="1500" dirty="0"/>
+          </a:p>
+        </p:txBody>
+      </p:sp>
+      <p:sp>
+        <p:nvSpPr>
+          <p:cNvPr id="5" name="Text 3"/>
+          <p:cNvSpPr txBox="1"/>
+          <p:nvPr/>
+        </p:nvSpPr>
+        <p:spPr>
+          <a:xfrm>
+            <a:off x="6309360" y="1828800"/>
+            <a:ext cx="5333695" cy="3840480"/>
+          </a:xfrm>
+          <a:prstGeom prst="rect">
+            <a:avLst/>
+          </a:prstGeom>
+          <a:noFill/>
+          <a:ln/>
+        </p:spPr>
+        <p:txBody>
+          <a:bodyPr wrap="square" lIns="0" tIns="0" rIns="0" bIns="0" rtlCol="0" anchor="t"/>
+          <a:lstStyle/>
+          <a:p>
+            <a:pPr indent="0" marL="0">
+              <a:spcAft>
+                <a:spcPts val="800"/>
+              </a:spcAft>
+              <a:buNone/>
+            </a:pPr>
+            <a:r>
+              <a:rPr lang="en-US" sz="1700" b="1" dirty="0">
+                <a:solidFill>
+                  <a:srgbClr val="0B1F33"/>
+                </a:solidFill>
+                <a:latin typeface="Calibri" pitchFamily="34" charset="0"/>
+                <a:ea typeface="Calibri" pitchFamily="34" charset="-122"/>
+                <a:cs typeface="Calibri" pitchFamily="34" charset="-120"/>
+              </a:rPr>
+              <a:t>Forutsetninger</a:t>
+            </a:r>
+            <a:endParaRPr lang="en-US" sz="1500" dirty="0"/>
+          </a:p>
+          <a:p>
+            <a:pPr marL="342900" indent="-342900">
+              <a:spcAft>
+                <a:spcPts val="800"/>
+              </a:spcAft>
+              <a:buSzPct val="100000"/>
+              <a:buChar char="•"/>
+            </a:pPr>
+            <a:r>
+              <a:rPr lang="en-US" sz="1500" dirty="0">
+                <a:solidFill>
+                  <a:srgbClr val="1B2A38"/>
+                </a:solidFill>
+                <a:latin typeface="Calibri" pitchFamily="34" charset="0"/>
+                <a:ea typeface="Calibri" pitchFamily="34" charset="-122"/>
+                <a:cs typeface="Calibri" pitchFamily="34" charset="-120"/>
+              </a:rPr>
+              <a:t>Pris: 1 000 kr per modul per fartøy per måned, 14 000 kr for alle 14 moduler, ekskl. mva.</a:t>
+            </a:r>
+            <a:endParaRPr lang="en-US" sz="1500" dirty="0"/>
+          </a:p>
+          <a:p>
+            <a:pPr marL="342900" indent="-342900">
+              <a:spcAft>
+                <a:spcPts val="800"/>
+              </a:spcAft>
+              <a:buSzPct val="100000"/>
+              <a:buChar char="•"/>
+            </a:pPr>
+            <a:r>
+              <a:rPr lang="en-US" sz="1500" dirty="0">
+                <a:solidFill>
+                  <a:srgbClr val="1B2A38"/>
+                </a:solidFill>
+                <a:latin typeface="Calibri" pitchFamily="34" charset="0"/>
+                <a:ea typeface="Calibri" pitchFamily="34" charset="-122"/>
+                <a:cs typeface="Calibri" pitchFamily="34" charset="-120"/>
+              </a:rPr>
+              <a:t>Markedsverdi forutsetter full dekning og samme pris i alle markeder. Det er en størrelsesorden, ikke en prognose.</a:t>
+            </a:r>
+            <a:endParaRPr lang="en-US" sz="1500" dirty="0"/>
+          </a:p>
+          <a:p>
+            <a:pPr marL="342900" indent="-342900">
+              <a:spcAft>
+                <a:spcPts val="800"/>
+              </a:spcAft>
+              <a:buSzPct val="100000"/>
+              <a:buChar char="•"/>
+            </a:pPr>
+            <a:r>
+              <a:rPr lang="en-US" sz="1500" dirty="0">
+                <a:solidFill>
+                  <a:srgbClr val="1B2A38"/>
+                </a:solidFill>
+                <a:latin typeface="Calibri" pitchFamily="34" charset="0"/>
+                <a:ea typeface="Calibri" pitchFamily="34" charset="-122"/>
+                <a:cs typeface="Calibri" pitchFamily="34" charset="-120"/>
+              </a:rPr>
+              <a:t>Inntektseksemplene er regneeksempler før kostnader.</a:t>
+            </a:r>
+            <a:endParaRPr lang="en-US" sz="1500" dirty="0"/>
+          </a:p>
+          <a:p>
+            <a:pPr marL="342900" indent="-342900">
+              <a:spcAft>
+                <a:spcPts val="800"/>
+              </a:spcAft>
+              <a:buSzPct val="100000"/>
+              <a:buChar char="•"/>
+            </a:pPr>
+            <a:r>
+              <a:rPr lang="en-US" sz="1500" dirty="0">
+                <a:solidFill>
+                  <a:srgbClr val="1B2A38"/>
+                </a:solidFill>
+                <a:latin typeface="Calibri" pitchFamily="34" charset="0"/>
+                <a:ea typeface="Calibri" pitchFamily="34" charset="-122"/>
+                <a:cs typeface="Calibri" pitchFamily="34" charset="-120"/>
+              </a:rPr>
+              <a:t>Sammenligningen med konkurrenter bygger på offentlig informasjon, ikke på egen testing.</a:t>
+            </a:r>
+            <a:endParaRPr lang="en-US" sz="1500" dirty="0"/>
+          </a:p>
+        </p:txBody>
+      </p:sp>
+      <p:sp>
+        <p:nvSpPr>
+          <p:cNvPr id="25" name="Slide Number Placeholder 0"/>
+          <p:cNvSpPr>
+            <a:spLocks noGrp="1"/>
+          </p:cNvSpPr>
+          <p:nvPr>
+            <p:ph type="sldNum" sz="quarter" idx="4294967295"/>
+          </p:nvPr>
+        </p:nvSpPr>
+        <p:spPr>
+          <a:xfrm>
+            <a:off x="11094415" y="6400800"/>
+            <a:ext cx="548640" cy="274320"/>
+          </a:xfrm>
+          <a:prstGeom prst="rect">
+            <a:avLst/>
+          </a:prstGeom>
+          <a:extLst>
+            <a:ext uri="{C572A759-6A51-4108-AA02-DFA0A04FC94B}">
+              <ma14:wrappingTextBoxFlag xmlns:ma14="http://schemas.microsoft.com/office/mac/drawingml/2011/main" val="0"/>
+            </a:ext>
+          </a:extLst>
+        </p:spPr>
+        <p:txBody>
+          <a:bodyPr/>
+          <a:lstStyle>
+            <a:lvl1pPr>
+              <a:defRPr sz="1000">
+                <a:solidFill>
+                  <a:srgbClr val="5B6B7A"/>
+                </a:solidFill>
+                <a:latin typeface="Calibri"/>
+                <a:ea typeface="Calibri"/>
+                <a:cs typeface="Calibri"/>
+              </a:defRPr>
+            </a:lvl1pPr>
+          </a:lstStyle>
+          <a:p>
+            <a:pPr algn="r"/>
+            <a:fld id="{F7021451-1387-4CA6-816F-3879F97B5CBC}" type="slidenum">
+              <a:rPr b="0" lang="en-US"/>
+              <a:t>14</a:t>
             </a:fld>
             <a:endParaRPr lang="en-US"/>
           </a:p>
@@ -6562,7 +7083,7 @@
         <p:spPr>
           <a:xfrm>
             <a:off x="1463040" y="1874520"/>
-            <a:ext cx="4480560" cy="1188720"/>
+            <a:ext cx="3520440" cy="1280160"/>
           </a:xfrm>
           <a:prstGeom prst="rect">
             <a:avLst/>
@@ -6662,7 +7183,7 @@
         <p:spPr>
           <a:xfrm>
             <a:off x="1463040" y="3200400"/>
-            <a:ext cx="4480560" cy="1188720"/>
+            <a:ext cx="3520440" cy="1280160"/>
           </a:xfrm>
           <a:prstGeom prst="rect">
             <a:avLst/>
@@ -6762,7 +7283,7 @@
         <p:spPr>
           <a:xfrm>
             <a:off x="1463040" y="4526280"/>
-            <a:ext cx="4480560" cy="1188720"/>
+            <a:ext cx="3520440" cy="1280160"/>
           </a:xfrm>
           <a:prstGeom prst="rect">
             <a:avLst/>
@@ -6811,34 +7332,39 @@
       </p:sp>
       <p:sp>
         <p:nvSpPr>
-          <p:cNvPr id="13" name="SKJERMBILDE: Oversikten i Nautech (dashbord)"/>
+          <p:cNvPr id="13" name="Skjermbilde-ramme"/>
           <p:cNvSpPr/>
           <p:nvPr/>
         </p:nvSpPr>
         <p:spPr>
           <a:xfrm>
-            <a:off x="6172200" y="1828800"/>
-            <a:ext cx="5470855" cy="3931920"/>
-          </a:xfrm>
-          <a:prstGeom prst="roundRect">
-            <a:avLst>
-              <a:gd name="adj" fmla="val 2326"/>
-            </a:avLst>
+            <a:off x="5221224" y="1792224"/>
+            <a:ext cx="6458407" cy="4063937"/>
+          </a:xfrm>
+          <a:prstGeom prst="rect">
+            <a:avLst/>
           </a:prstGeom>
           <a:solidFill>
-            <a:srgbClr val="EEF3F6"/>
+            <a:srgbClr val="FFFFFF"/>
           </a:solidFill>
-          <a:ln w="19050">
+          <a:ln w="12700">
             <a:solidFill>
-              <a:srgbClr val="E8751A"/>
+              <a:srgbClr val="C9D5DE"/>
             </a:solidFill>
-            <a:prstDash val="dash"/>
+            <a:prstDash val="solid"/>
           </a:ln>
+          <a:effectLst>
+            <a:outerShdw sx="100000" sy="100000" kx="0" ky="0" algn="bl" rotWithShape="0" blurRad="101600" dist="38100" dir="5400000">
+              <a:srgbClr val="000000">
+                <a:alpha val="18000"/>
+              </a:srgbClr>
+            </a:outerShdw>
+          </a:effectLst>
         </p:spPr>
       </p:sp>
       <p:pic>
         <p:nvPicPr>
-          <p:cNvPr id="14" name="Kamera" descr="preencoded.png">    </p:cNvPr>
+          <p:cNvPr id="14" name="Skjermbilde command-center__dashboard.png" descr="/tmp/claude-0/-home-user-Claude/bbdec16f-2a10-550d-bb32-af07b09e4311/scratchpad/build/img/command-center__dashboard.png">    </p:cNvPr>
           <p:cNvPicPr>
             <a:picLocks noChangeAspect="1"/>
           </p:cNvPicPr>
@@ -6852,8 +7378,8 @@
         </p:blipFill>
         <p:spPr>
           <a:xfrm>
-            <a:off x="8633308" y="3108960"/>
-            <a:ext cx="548640" cy="548640"/>
+            <a:off x="5257800" y="1828800"/>
+            <a:ext cx="6385255" cy="3990785"/>
           </a:xfrm>
           <a:prstGeom prst="rect">
             <a:avLst/>
@@ -6868,8 +7394,8 @@
         </p:nvSpPr>
         <p:spPr>
           <a:xfrm>
-            <a:off x="6446520" y="3794760"/>
-            <a:ext cx="4922215" cy="822960"/>
+            <a:off x="5257800" y="5929313"/>
+            <a:ext cx="6385255" cy="274320"/>
           </a:xfrm>
           <a:prstGeom prst="rect">
             <a:avLst/>
@@ -6878,35 +7404,24 @@
           <a:ln/>
         </p:spPr>
         <p:txBody>
-          <a:bodyPr wrap="square" lIns="0" tIns="0" rIns="0" bIns="0" rtlCol="0" anchor="t"/>
-          <a:lstStyle/>
-          <a:p>
-            <a:pPr algn="ctr" indent="0" marL="0">
-              <a:buNone/>
-            </a:pPr>
-            <a:r>
-              <a:rPr lang="en-US" sz="1200" b="1" spc="100" kern="0" dirty="0">
-                <a:solidFill>
-                  <a:srgbClr val="E8751A"/>
-                </a:solidFill>
-              </a:rPr>
-              <a:t>SETT INN SKJERMBILDE</a:t>
-            </a:r>
-            <a:endParaRPr lang="en-US" sz="1200" dirty="0"/>
-          </a:p>
-          <a:p>
-            <a:pPr algn="ctr" indent="0" marL="0">
-              <a:buNone/>
-            </a:pPr>
-            <a:r>
-              <a:rPr lang="en-US" sz="1400" dirty="0">
-                <a:solidFill>
-                  <a:srgbClr val="1B2A38"/>
-                </a:solidFill>
-              </a:rPr>
-              <a:t>Oversikten i Nautech (dashbord)</a:t>
-            </a:r>
-            <a:endParaRPr lang="en-US" sz="1200" dirty="0"/>
+          <a:bodyPr wrap="square" lIns="0" tIns="0" rIns="0" bIns="0" rtlCol="0" anchor="ctr"/>
+          <a:lstStyle/>
+          <a:p>
+            <a:pPr indent="0" marL="0">
+              <a:buNone/>
+            </a:pPr>
+            <a:r>
+              <a:rPr lang="en-US" sz="1100" i="1" dirty="0">
+                <a:solidFill>
+                  <a:srgbClr val="5B6B7A"/>
+                </a:solidFill>
+                <a:latin typeface="Calibri" pitchFamily="34" charset="0"/>
+                <a:ea typeface="Calibri" pitchFamily="34" charset="-122"/>
+                <a:cs typeface="Calibri" pitchFamily="34" charset="-120"/>
+              </a:rPr>
+              <a:t>Oversikten i Nautech: fartøy, arbeidsordrer, sertifikater og hendelser på ett sted.</a:t>
+            </a:r>
+            <a:endParaRPr lang="en-US" sz="1100" dirty="0"/>
           </a:p>
         </p:txBody>
       </p:sp>
@@ -7133,7 +7648,7 @@
         <p:spPr>
           <a:xfrm>
             <a:off x="1325880" y="1828800"/>
-            <a:ext cx="4663440" cy="914400"/>
+            <a:ext cx="3657600" cy="960120"/>
           </a:xfrm>
           <a:prstGeom prst="rect">
             <a:avLst/>
@@ -7248,7 +7763,7 @@
         <p:spPr>
           <a:xfrm>
             <a:off x="1325880" y="2834640"/>
-            <a:ext cx="4663440" cy="914400"/>
+            <a:ext cx="3657600" cy="960120"/>
           </a:xfrm>
           <a:prstGeom prst="rect">
             <a:avLst/>
@@ -7363,7 +7878,7 @@
         <p:spPr>
           <a:xfrm>
             <a:off x="1325880" y="3840480"/>
-            <a:ext cx="4663440" cy="914400"/>
+            <a:ext cx="3657600" cy="960120"/>
           </a:xfrm>
           <a:prstGeom prst="rect">
             <a:avLst/>
@@ -7478,7 +7993,7 @@
         <p:spPr>
           <a:xfrm>
             <a:off x="1325880" y="4846320"/>
-            <a:ext cx="4663440" cy="914400"/>
+            <a:ext cx="3657600" cy="960120"/>
           </a:xfrm>
           <a:prstGeom prst="rect">
             <a:avLst/>
@@ -7527,34 +8042,39 @@
       </p:sp>
       <p:sp>
         <p:nvSpPr>
-          <p:cNvPr id="16" name="SKJERMBILDE: KI-assistenten: spørsmål om pumpa, med svar og kildehenvisning"/>
+          <p:cNvPr id="16" name="Skjermbilde-ramme"/>
           <p:cNvSpPr/>
           <p:nvPr/>
         </p:nvSpPr>
         <p:spPr>
           <a:xfrm>
-            <a:off x="6172200" y="1828800"/>
-            <a:ext cx="5470855" cy="3931920"/>
-          </a:xfrm>
-          <a:prstGeom prst="roundRect">
-            <a:avLst>
-              <a:gd name="adj" fmla="val 2326"/>
-            </a:avLst>
+            <a:off x="5221224" y="1792224"/>
+            <a:ext cx="6458407" cy="4063937"/>
+          </a:xfrm>
+          <a:prstGeom prst="rect">
+            <a:avLst/>
           </a:prstGeom>
           <a:solidFill>
-            <a:srgbClr val="EEF3F6"/>
+            <a:srgbClr val="FFFFFF"/>
           </a:solidFill>
-          <a:ln w="19050">
+          <a:ln w="12700">
             <a:solidFill>
-              <a:srgbClr val="E8751A"/>
+              <a:srgbClr val="C9D5DE"/>
             </a:solidFill>
-            <a:prstDash val="dash"/>
+            <a:prstDash val="solid"/>
           </a:ln>
+          <a:effectLst>
+            <a:outerShdw sx="100000" sy="100000" kx="0" ky="0" algn="bl" rotWithShape="0" blurRad="101600" dist="38100" dir="5400000">
+              <a:srgbClr val="000000">
+                <a:alpha val="18000"/>
+              </a:srgbClr>
+            </a:outerShdw>
+          </a:effectLst>
         </p:spPr>
       </p:sp>
       <p:pic>
         <p:nvPicPr>
-          <p:cNvPr id="17" name="Kamera" descr="preencoded.png">    </p:cNvPr>
+          <p:cNvPr id="17" name="Skjermbilde maintenance__defects.png" descr="/tmp/claude-0/-home-user-Claude/bbdec16f-2a10-550d-bb32-af07b09e4311/scratchpad/build/img/maintenance__defects.png">    </p:cNvPr>
           <p:cNvPicPr>
             <a:picLocks noChangeAspect="1"/>
           </p:cNvPicPr>
@@ -7568,8 +8088,8 @@
         </p:blipFill>
         <p:spPr>
           <a:xfrm>
-            <a:off x="8633308" y="3108960"/>
-            <a:ext cx="548640" cy="548640"/>
+            <a:off x="5257800" y="1828800"/>
+            <a:ext cx="6385255" cy="3990785"/>
           </a:xfrm>
           <a:prstGeom prst="rect">
             <a:avLst/>
@@ -7584,8 +8104,8 @@
         </p:nvSpPr>
         <p:spPr>
           <a:xfrm>
-            <a:off x="6446520" y="3794760"/>
-            <a:ext cx="4922215" cy="822960"/>
+            <a:off x="5257800" y="5929313"/>
+            <a:ext cx="6385255" cy="274320"/>
           </a:xfrm>
           <a:prstGeom prst="rect">
             <a:avLst/>
@@ -7594,35 +8114,24 @@
           <a:ln/>
         </p:spPr>
         <p:txBody>
-          <a:bodyPr wrap="square" lIns="0" tIns="0" rIns="0" bIns="0" rtlCol="0" anchor="t"/>
-          <a:lstStyle/>
-          <a:p>
-            <a:pPr algn="ctr" indent="0" marL="0">
-              <a:buNone/>
-            </a:pPr>
-            <a:r>
-              <a:rPr lang="en-US" sz="1200" b="1" spc="100" kern="0" dirty="0">
-                <a:solidFill>
-                  <a:srgbClr val="E8751A"/>
-                </a:solidFill>
-              </a:rPr>
-              <a:t>SETT INN SKJERMBILDE</a:t>
-            </a:r>
-            <a:endParaRPr lang="en-US" sz="1200" dirty="0"/>
-          </a:p>
-          <a:p>
-            <a:pPr algn="ctr" indent="0" marL="0">
-              <a:buNone/>
-            </a:pPr>
-            <a:r>
-              <a:rPr lang="en-US" sz="1400" dirty="0">
-                <a:solidFill>
-                  <a:srgbClr val="1B2A38"/>
-                </a:solidFill>
-              </a:rPr>
-              <a:t>KI-assistenten: spørsmål om pumpa, med svar og kildehenvisning</a:t>
-            </a:r>
-            <a:endParaRPr lang="en-US" sz="1200" dirty="0"/>
+          <a:bodyPr wrap="square" lIns="0" tIns="0" rIns="0" bIns="0" rtlCol="0" anchor="ctr"/>
+          <a:lstStyle/>
+          <a:p>
+            <a:pPr indent="0" marL="0">
+              <a:buNone/>
+            </a:pPr>
+            <a:r>
+              <a:rPr lang="en-US" sz="1100" i="1" dirty="0">
+                <a:solidFill>
+                  <a:srgbClr val="5B6B7A"/>
+                </a:solidFill>
+                <a:latin typeface="Calibri" pitchFamily="34" charset="0"/>
+                <a:ea typeface="Calibri" pitchFamily="34" charset="-122"/>
+                <a:cs typeface="Calibri" pitchFamily="34" charset="-120"/>
+              </a:rPr>
+              <a:t>Feil og avvik meldt om bord, med alvorlighetsgrad og status.</a:t>
+            </a:r>
+            <a:endParaRPr lang="en-US" sz="1100" dirty="0"/>
           </a:p>
         </p:txBody>
       </p:sp>
@@ -8769,7 +9278,7 @@
                 <a:ea typeface="Calibri" pitchFamily="34" charset="-122"/>
                 <a:cs typeface="Calibri" pitchFamily="34" charset="-120"/>
               </a:rPr>
-              <a:t>BYGGET FOR FISKEFLÅTEN</a:t>
+              <a:t>PRODUKTET I BRUK</a:t>
             </a:r>
             <a:endParaRPr lang="en-US" sz="1200" dirty="0"/>
           </a:p>
@@ -8810,7 +9319,7 @@
                 <a:ea typeface="Arial" pitchFamily="34" charset="-122"/>
                 <a:cs typeface="Arial" pitchFamily="34" charset="-120"/>
               </a:rPr>
-              <a:t>Fiskerimodulen: det generelle systemer ikke er laget for</a:t>
+              <a:t>Slik ser Nautech ut</a:t>
             </a:r>
             <a:endParaRPr lang="en-US" sz="3000" dirty="0"/>
           </a:p>
@@ -8818,66 +9327,39 @@
       </p:sp>
       <p:sp>
         <p:nvSpPr>
-          <p:cNvPr id="4" name="Text 2"/>
-          <p:cNvSpPr txBox="1"/>
-          <p:nvPr/>
-        </p:nvSpPr>
-        <p:spPr>
-          <a:xfrm>
-            <a:off x="548640" y="1828800"/>
-            <a:ext cx="5394960" cy="822960"/>
-          </a:xfrm>
-          <a:prstGeom prst="rect">
-            <a:avLst/>
-          </a:prstGeom>
-          <a:noFill/>
-          <a:ln/>
-        </p:spPr>
-        <p:txBody>
-          <a:bodyPr wrap="square" lIns="0" tIns="0" rIns="0" bIns="0" rtlCol="0" anchor="t"/>
-          <a:lstStyle/>
-          <a:p>
-            <a:pPr indent="0" marL="0">
-              <a:buNone/>
-            </a:pPr>
-            <a:r>
-              <a:rPr lang="en-US" sz="1600" dirty="0">
-                <a:solidFill>
-                  <a:srgbClr val="1B2A38"/>
-                </a:solidFill>
-                <a:latin typeface="Calibri" pitchFamily="34" charset="0"/>
-                <a:ea typeface="Calibri" pitchFamily="34" charset="-122"/>
-                <a:cs typeface="Calibri" pitchFamily="34" charset="-120"/>
-              </a:rPr>
-              <a:t>Fiskefartøy har krav og arbeidsoppgaver som handelsflåten ikke har. Nautech har dem innebygd.</a:t>
-            </a:r>
-            <a:endParaRPr lang="en-US" sz="1600" dirty="0"/>
-          </a:p>
-        </p:txBody>
-      </p:sp>
-      <p:sp>
-        <p:nvSpPr>
-          <p:cNvPr id="5" name="Ikon-sirkel"/>
+          <p:cNvPr id="4" name="Skjermbilde-ramme"/>
           <p:cNvSpPr/>
           <p:nvPr/>
         </p:nvSpPr>
         <p:spPr>
           <a:xfrm>
-            <a:off x="548640" y="2743200"/>
-            <a:ext cx="548640" cy="548640"/>
-          </a:xfrm>
-          <a:prstGeom prst="ellipse">
+            <a:off x="512064" y="1975104"/>
+            <a:ext cx="3588410" cy="2270189"/>
+          </a:xfrm>
+          <a:prstGeom prst="rect">
             <a:avLst/>
           </a:prstGeom>
           <a:solidFill>
-            <a:srgbClr val="0E7C86"/>
+            <a:srgbClr val="FFFFFF"/>
           </a:solidFill>
-          <a:ln/>
+          <a:ln w="12700">
+            <a:solidFill>
+              <a:srgbClr val="C9D5DE"/>
+            </a:solidFill>
+            <a:prstDash val="solid"/>
+          </a:ln>
+          <a:effectLst>
+            <a:outerShdw sx="100000" sy="100000" kx="0" ky="0" algn="bl" rotWithShape="0" blurRad="101600" dist="38100" dir="5400000">
+              <a:srgbClr val="000000">
+                <a:alpha val="18000"/>
+              </a:srgbClr>
+            </a:outerShdw>
+          </a:effectLst>
         </p:spPr>
       </p:sp>
       <p:pic>
         <p:nvPicPr>
-          <p:cNvPr id="6" name="Ikon FaFish" descr="preencoded.png">    </p:cNvPr>
+          <p:cNvPr id="5" name="Skjermbilde fleet__vessels.png" descr="/tmp/claude-0/-home-user-Claude/bbdec16f-2a10-550d-bb32-af07b09e4311/scratchpad/build/img/fleet__vessels.png">    </p:cNvPr>
           <p:cNvPicPr>
             <a:picLocks noChangeAspect="1"/>
           </p:cNvPicPr>
@@ -8891,8 +9373,8 @@
         </p:blipFill>
         <p:spPr>
           <a:xfrm>
-            <a:off x="680314" y="2874874"/>
-            <a:ext cx="285293" cy="285293"/>
+            <a:off x="548640" y="2011680"/>
+            <a:ext cx="3515258" cy="2197037"/>
           </a:xfrm>
           <a:prstGeom prst="rect">
             <a:avLst/>
@@ -8901,14 +9383,14 @@
       </p:pic>
       <p:sp>
         <p:nvSpPr>
-          <p:cNvPr id="7" name="Text 4"/>
+          <p:cNvPr id="6" name="Text 3"/>
           <p:cNvSpPr txBox="1"/>
           <p:nvPr/>
         </p:nvSpPr>
         <p:spPr>
           <a:xfrm>
-            <a:off x="1280160" y="2706624"/>
-            <a:ext cx="4663440" cy="731520"/>
+            <a:off x="548640" y="4483037"/>
+            <a:ext cx="3515258" cy="914400"/>
           </a:xfrm>
           <a:prstGeom prst="rect">
             <a:avLst/>
@@ -8924,7 +9406,7 @@
               <a:buNone/>
             </a:pPr>
             <a:r>
-              <a:rPr lang="en-US" sz="1600" b="1" dirty="0">
+              <a:rPr lang="en-US" sz="1700" b="1" dirty="0">
                 <a:solidFill>
                   <a:srgbClr val="0B1F33"/>
                 </a:solidFill>
@@ -8932,16 +9414,16 @@
                 <a:ea typeface="Calibri" pitchFamily="34" charset="-122"/>
                 <a:cs typeface="Calibri" pitchFamily="34" charset="-120"/>
               </a:rPr>
-              <a:t>Fangst per hal og tur</a:t>
-            </a:r>
-            <a:endParaRPr lang="en-US" sz="1600" dirty="0"/>
+              <a:t>Flåten</a:t>
+            </a:r>
+            <a:endParaRPr lang="en-US" sz="1700" dirty="0"/>
           </a:p>
           <a:p>
             <a:pPr indent="0" marL="0">
               <a:buNone/>
             </a:pPr>
             <a:r>
-              <a:rPr lang="en-US" sz="1400" dirty="0">
+              <a:rPr lang="en-US" sz="1500" dirty="0">
                 <a:solidFill>
                   <a:srgbClr val="1B2A38"/>
                 </a:solidFill>
@@ -8949,35 +9431,47 @@
                 <a:ea typeface="Calibri" pitchFamily="34" charset="-122"/>
                 <a:cs typeface="Calibri" pitchFamily="34" charset="-120"/>
               </a:rPr>
-              <a:t>Mengde, art, dyp og tid registreres om bord.</a:t>
-            </a:r>
-            <a:endParaRPr lang="en-US" sz="1600" dirty="0"/>
-          </a:p>
-        </p:txBody>
-      </p:sp>
-      <p:sp>
-        <p:nvSpPr>
-          <p:cNvPr id="8" name="Ikon-sirkel"/>
+              <a:t>Alle fartøy samlet: trålere, linebåter og ringnotfartøy.</a:t>
+            </a:r>
+            <a:endParaRPr lang="en-US" sz="1700" dirty="0"/>
+          </a:p>
+        </p:txBody>
+      </p:sp>
+      <p:sp>
+        <p:nvSpPr>
+          <p:cNvPr id="7" name="Skjermbilde-ramme"/>
           <p:cNvSpPr/>
           <p:nvPr/>
         </p:nvSpPr>
         <p:spPr>
           <a:xfrm>
-            <a:off x="548640" y="3520440"/>
-            <a:ext cx="548640" cy="548640"/>
-          </a:xfrm>
-          <a:prstGeom prst="ellipse">
+            <a:off x="4301642" y="1975104"/>
+            <a:ext cx="3588410" cy="2270189"/>
+          </a:xfrm>
+          <a:prstGeom prst="rect">
             <a:avLst/>
           </a:prstGeom>
           <a:solidFill>
-            <a:srgbClr val="0E7C86"/>
+            <a:srgbClr val="FFFFFF"/>
           </a:solidFill>
-          <a:ln/>
+          <a:ln w="12700">
+            <a:solidFill>
+              <a:srgbClr val="C9D5DE"/>
+            </a:solidFill>
+            <a:prstDash val="solid"/>
+          </a:ln>
+          <a:effectLst>
+            <a:outerShdw sx="100000" sy="100000" kx="0" ky="0" algn="bl" rotWithShape="0" blurRad="101600" dist="38100" dir="5400000">
+              <a:srgbClr val="000000">
+                <a:alpha val="18000"/>
+              </a:srgbClr>
+            </a:outerShdw>
+          </a:effectLst>
         </p:spPr>
       </p:sp>
       <p:pic>
         <p:nvPicPr>
-          <p:cNvPr id="9" name="Ikon FaListCheck" descr="preencoded.png">    </p:cNvPr>
+          <p:cNvPr id="8" name="Skjermbilde maintenance__work-orders.png" descr="/tmp/claude-0/-home-user-Claude/bbdec16f-2a10-550d-bb32-af07b09e4311/scratchpad/build/img/maintenance__work-orders.png">    </p:cNvPr>
           <p:cNvPicPr>
             <a:picLocks noChangeAspect="1"/>
           </p:cNvPicPr>
@@ -8991,8 +9485,8 @@
         </p:blipFill>
         <p:spPr>
           <a:xfrm>
-            <a:off x="680314" y="3652114"/>
-            <a:ext cx="285293" cy="285293"/>
+            <a:off x="4338218" y="2011680"/>
+            <a:ext cx="3515258" cy="2197037"/>
           </a:xfrm>
           <a:prstGeom prst="rect">
             <a:avLst/>
@@ -9001,14 +9495,14 @@
       </p:pic>
       <p:sp>
         <p:nvSpPr>
-          <p:cNvPr id="10" name="Text 6"/>
+          <p:cNvPr id="9" name="Text 5"/>
           <p:cNvSpPr txBox="1"/>
           <p:nvPr/>
         </p:nvSpPr>
         <p:spPr>
           <a:xfrm>
-            <a:off x="1280160" y="3483864"/>
-            <a:ext cx="4663440" cy="731520"/>
+            <a:off x="4338218" y="4483037"/>
+            <a:ext cx="3515258" cy="914400"/>
           </a:xfrm>
           <a:prstGeom prst="rect">
             <a:avLst/>
@@ -9024,7 +9518,7 @@
               <a:buNone/>
             </a:pPr>
             <a:r>
-              <a:rPr lang="en-US" sz="1600" b="1" dirty="0">
+              <a:rPr lang="en-US" sz="1700" b="1" dirty="0">
                 <a:solidFill>
                   <a:srgbClr val="0B1F33"/>
                 </a:solidFill>
@@ -9032,16 +9526,16 @@
                 <a:ea typeface="Calibri" pitchFamily="34" charset="-122"/>
                 <a:cs typeface="Calibri" pitchFamily="34" charset="-120"/>
               </a:rPr>
-              <a:t>Kvoter</a:t>
-            </a:r>
-            <a:endParaRPr lang="en-US" sz="1600" dirty="0"/>
+              <a:t>Arbeidsordrer</a:t>
+            </a:r>
+            <a:endParaRPr lang="en-US" sz="1700" dirty="0"/>
           </a:p>
           <a:p>
             <a:pPr indent="0" marL="0">
               <a:buNone/>
             </a:pPr>
             <a:r>
-              <a:rPr lang="en-US" sz="1400" dirty="0">
+              <a:rPr lang="en-US" sz="1500" dirty="0">
                 <a:solidFill>
                   <a:srgbClr val="1B2A38"/>
                 </a:solidFill>
@@ -9049,35 +9543,47 @@
                 <a:ea typeface="Calibri" pitchFamily="34" charset="-122"/>
                 <a:cs typeface="Calibri" pitchFamily="34" charset="-120"/>
               </a:rPr>
-              <a:t>Se hvor mye som er fisket og hva som gjenstår.</a:t>
-            </a:r>
-            <a:endParaRPr lang="en-US" sz="1600" dirty="0"/>
-          </a:p>
-        </p:txBody>
-      </p:sp>
-      <p:sp>
-        <p:nvSpPr>
-          <p:cNvPr id="11" name="Ikon-sirkel"/>
+              <a:t>Planlagt vedlikehold med ansvarlig, prioritet og frist.</a:t>
+            </a:r>
+            <a:endParaRPr lang="en-US" sz="1700" dirty="0"/>
+          </a:p>
+        </p:txBody>
+      </p:sp>
+      <p:sp>
+        <p:nvSpPr>
+          <p:cNvPr id="10" name="Skjermbilde-ramme"/>
           <p:cNvSpPr/>
           <p:nvPr/>
         </p:nvSpPr>
         <p:spPr>
           <a:xfrm>
-            <a:off x="548640" y="4297680"/>
-            <a:ext cx="548640" cy="548640"/>
-          </a:xfrm>
-          <a:prstGeom prst="ellipse">
+            <a:off x="8091221" y="1975104"/>
+            <a:ext cx="3588410" cy="2270189"/>
+          </a:xfrm>
+          <a:prstGeom prst="rect">
             <a:avLst/>
           </a:prstGeom>
           <a:solidFill>
-            <a:srgbClr val="0E7C86"/>
+            <a:srgbClr val="FFFFFF"/>
           </a:solidFill>
-          <a:ln/>
+          <a:ln w="12700">
+            <a:solidFill>
+              <a:srgbClr val="C9D5DE"/>
+            </a:solidFill>
+            <a:prstDash val="solid"/>
+          </a:ln>
+          <a:effectLst>
+            <a:outerShdw sx="100000" sy="100000" kx="0" ky="0" algn="bl" rotWithShape="0" blurRad="101600" dist="38100" dir="5400000">
+              <a:srgbClr val="000000">
+                <a:alpha val="18000"/>
+              </a:srgbClr>
+            </a:outerShdw>
+          </a:effectLst>
         </p:spPr>
       </p:sp>
       <p:pic>
         <p:nvPicPr>
-          <p:cNvPr id="12" name="Ikon FaClipboardCheck" descr="preencoded.png">    </p:cNvPr>
+          <p:cNvPr id="11" name="Skjermbilde safety__dashboard.png" descr="/tmp/claude-0/-home-user-Claude/bbdec16f-2a10-550d-bb32-af07b09e4311/scratchpad/build/img/safety__dashboard.png">    </p:cNvPr>
           <p:cNvPicPr>
             <a:picLocks noChangeAspect="1"/>
           </p:cNvPicPr>
@@ -9091,8 +9597,8 @@
         </p:blipFill>
         <p:spPr>
           <a:xfrm>
-            <a:off x="680314" y="4429354"/>
-            <a:ext cx="285293" cy="285293"/>
+            <a:off x="8127797" y="2011680"/>
+            <a:ext cx="3515258" cy="2197037"/>
           </a:xfrm>
           <a:prstGeom prst="rect">
             <a:avLst/>
@@ -9101,14 +9607,14 @@
       </p:pic>
       <p:sp>
         <p:nvSpPr>
-          <p:cNvPr id="13" name="Text 8"/>
+          <p:cNvPr id="12" name="Text 7"/>
           <p:cNvSpPr txBox="1"/>
           <p:nvPr/>
         </p:nvSpPr>
         <p:spPr>
           <a:xfrm>
-            <a:off x="1280160" y="4261104"/>
-            <a:ext cx="4663440" cy="731520"/>
+            <a:off x="8127797" y="4483037"/>
+            <a:ext cx="3515258" cy="914400"/>
           </a:xfrm>
           <a:prstGeom prst="rect">
             <a:avLst/>
@@ -9124,7 +9630,7 @@
               <a:buNone/>
             </a:pPr>
             <a:r>
-              <a:rPr lang="en-US" sz="1600" b="1" dirty="0">
+              <a:rPr lang="en-US" sz="1700" b="1" dirty="0">
                 <a:solidFill>
                   <a:srgbClr val="0B1F33"/>
                 </a:solidFill>
@@ -9132,16 +9638,16 @@
                 <a:ea typeface="Calibri" pitchFamily="34" charset="-122"/>
                 <a:cs typeface="Calibri" pitchFamily="34" charset="-120"/>
               </a:rPr>
-              <a:t>Rapportering og krav</a:t>
-            </a:r>
-            <a:endParaRPr lang="en-US" sz="1600" dirty="0"/>
+              <a:t>Sikkerhet</a:t>
+            </a:r>
+            <a:endParaRPr lang="en-US" sz="1700" dirty="0"/>
           </a:p>
           <a:p>
             <a:pPr indent="0" marL="0">
               <a:buNone/>
             </a:pPr>
             <a:r>
-              <a:rPr lang="en-US" sz="1400" dirty="0">
+              <a:rPr lang="en-US" sz="1500" dirty="0">
                 <a:solidFill>
                   <a:srgbClr val="1B2A38"/>
                 </a:solidFill>
@@ -9149,210 +9655,9 @@
                 <a:ea typeface="Calibri" pitchFamily="34" charset="-122"/>
                 <a:cs typeface="Calibri" pitchFamily="34" charset="-120"/>
               </a:rPr>
-              <a:t>Oversikt over ERS, VMS, HACCP, bifangst og landingsdeklarasjoner.</a:t>
-            </a:r>
-            <a:endParaRPr lang="en-US" sz="1600" dirty="0"/>
-          </a:p>
-        </p:txBody>
-      </p:sp>
-      <p:sp>
-        <p:nvSpPr>
-          <p:cNvPr id="14" name="Ikon-sirkel"/>
-          <p:cNvSpPr/>
-          <p:nvPr/>
-        </p:nvSpPr>
-        <p:spPr>
-          <a:xfrm>
-            <a:off x="548640" y="5074920"/>
-            <a:ext cx="548640" cy="548640"/>
-          </a:xfrm>
-          <a:prstGeom prst="ellipse">
-            <a:avLst/>
-          </a:prstGeom>
-          <a:solidFill>
-            <a:srgbClr val="0E7C86"/>
-          </a:solidFill>
-          <a:ln/>
-        </p:spPr>
-      </p:sp>
-      <p:pic>
-        <p:nvPicPr>
-          <p:cNvPr id="15" name="Ikon FaRoute" descr="preencoded.png">    </p:cNvPr>
-          <p:cNvPicPr>
-            <a:picLocks noChangeAspect="1"/>
-          </p:cNvPicPr>
-          <p:nvPr/>
-        </p:nvPicPr>
-        <p:blipFill>
-          <a:blip r:embed="rId4"/>
-          <a:stretch>
-            <a:fillRect/>
-          </a:stretch>
-        </p:blipFill>
-        <p:spPr>
-          <a:xfrm>
-            <a:off x="680314" y="5206594"/>
-            <a:ext cx="285293" cy="285293"/>
-          </a:xfrm>
-          <a:prstGeom prst="rect">
-            <a:avLst/>
-          </a:prstGeom>
-        </p:spPr>
-      </p:pic>
-      <p:sp>
-        <p:nvSpPr>
-          <p:cNvPr id="16" name="Text 10"/>
-          <p:cNvSpPr txBox="1"/>
-          <p:nvPr/>
-        </p:nvSpPr>
-        <p:spPr>
-          <a:xfrm>
-            <a:off x="1280160" y="5038344"/>
-            <a:ext cx="4663440" cy="731520"/>
-          </a:xfrm>
-          <a:prstGeom prst="rect">
-            <a:avLst/>
-          </a:prstGeom>
-          <a:noFill/>
-          <a:ln/>
-        </p:spPr>
-        <p:txBody>
-          <a:bodyPr wrap="square" lIns="0" tIns="0" rIns="0" bIns="0" rtlCol="0" anchor="t"/>
-          <a:lstStyle/>
-          <a:p>
-            <a:pPr indent="0" marL="0">
-              <a:buNone/>
-            </a:pPr>
-            <a:r>
-              <a:rPr lang="en-US" sz="1600" b="1" dirty="0">
-                <a:solidFill>
-                  <a:srgbClr val="0B1F33"/>
-                </a:solidFill>
-                <a:latin typeface="Calibri" pitchFamily="34" charset="0"/>
-                <a:ea typeface="Calibri" pitchFamily="34" charset="-122"/>
-                <a:cs typeface="Calibri" pitchFamily="34" charset="-120"/>
-              </a:rPr>
-              <a:t>Sporbarhet</a:t>
-            </a:r>
-            <a:endParaRPr lang="en-US" sz="1600" dirty="0"/>
-          </a:p>
-          <a:p>
-            <a:pPr indent="0" marL="0">
-              <a:buNone/>
-            </a:pPr>
-            <a:r>
-              <a:rPr lang="en-US" sz="1400" dirty="0">
-                <a:solidFill>
-                  <a:srgbClr val="1B2A38"/>
-                </a:solidFill>
-                <a:latin typeface="Calibri" pitchFamily="34" charset="0"/>
-                <a:ea typeface="Calibri" pitchFamily="34" charset="-122"/>
-                <a:cs typeface="Calibri" pitchFamily="34" charset="-120"/>
-              </a:rPr>
-              <a:t>Følg fisken fra fangst til salg.</a:t>
-            </a:r>
-            <a:endParaRPr lang="en-US" sz="1600" dirty="0"/>
-          </a:p>
-        </p:txBody>
-      </p:sp>
-      <p:sp>
-        <p:nvSpPr>
-          <p:cNvPr id="17" name="SKJERMBILDE: Fiskerimodulen: fangst per hal eller samsvar (ERS, VMS, HACCP)"/>
-          <p:cNvSpPr/>
-          <p:nvPr/>
-        </p:nvSpPr>
-        <p:spPr>
-          <a:xfrm>
-            <a:off x="6172200" y="1828800"/>
-            <a:ext cx="5470855" cy="3931920"/>
-          </a:xfrm>
-          <a:prstGeom prst="roundRect">
-            <a:avLst>
-              <a:gd name="adj" fmla="val 2326"/>
-            </a:avLst>
-          </a:prstGeom>
-          <a:solidFill>
-            <a:srgbClr val="EEF3F6"/>
-          </a:solidFill>
-          <a:ln w="19050">
-            <a:solidFill>
-              <a:srgbClr val="E8751A"/>
-            </a:solidFill>
-            <a:prstDash val="dash"/>
-          </a:ln>
-        </p:spPr>
-      </p:sp>
-      <p:pic>
-        <p:nvPicPr>
-          <p:cNvPr id="18" name="Kamera" descr="preencoded.png">    </p:cNvPr>
-          <p:cNvPicPr>
-            <a:picLocks noChangeAspect="1"/>
-          </p:cNvPicPr>
-          <p:nvPr/>
-        </p:nvPicPr>
-        <p:blipFill>
-          <a:blip r:embed="rId5"/>
-          <a:stretch>
-            <a:fillRect/>
-          </a:stretch>
-        </p:blipFill>
-        <p:spPr>
-          <a:xfrm>
-            <a:off x="8633308" y="3108960"/>
-            <a:ext cx="548640" cy="548640"/>
-          </a:xfrm>
-          <a:prstGeom prst="rect">
-            <a:avLst/>
-          </a:prstGeom>
-        </p:spPr>
-      </p:pic>
-      <p:sp>
-        <p:nvSpPr>
-          <p:cNvPr id="19" name="Text 12"/>
-          <p:cNvSpPr txBox="1"/>
-          <p:nvPr/>
-        </p:nvSpPr>
-        <p:spPr>
-          <a:xfrm>
-            <a:off x="6446520" y="3794760"/>
-            <a:ext cx="4922215" cy="822960"/>
-          </a:xfrm>
-          <a:prstGeom prst="rect">
-            <a:avLst/>
-          </a:prstGeom>
-          <a:noFill/>
-          <a:ln/>
-        </p:spPr>
-        <p:txBody>
-          <a:bodyPr wrap="square" lIns="0" tIns="0" rIns="0" bIns="0" rtlCol="0" anchor="t"/>
-          <a:lstStyle/>
-          <a:p>
-            <a:pPr algn="ctr" indent="0" marL="0">
-              <a:buNone/>
-            </a:pPr>
-            <a:r>
-              <a:rPr lang="en-US" sz="1200" b="1" spc="100" kern="0" dirty="0">
-                <a:solidFill>
-                  <a:srgbClr val="E8751A"/>
-                </a:solidFill>
-              </a:rPr>
-              <a:t>SETT INN SKJERMBILDE</a:t>
-            </a:r>
-            <a:endParaRPr lang="en-US" sz="1200" dirty="0"/>
-          </a:p>
-          <a:p>
-            <a:pPr algn="ctr" indent="0" marL="0">
-              <a:buNone/>
-            </a:pPr>
-            <a:r>
-              <a:rPr lang="en-US" sz="1400" dirty="0">
-                <a:solidFill>
-                  <a:srgbClr val="1B2A38"/>
-                </a:solidFill>
-              </a:rPr>
-              <a:t>Fiskerimodulen: fangst per hal eller samsvar (ERS, VMS, HACCP)</a:t>
-            </a:r>
-            <a:endParaRPr lang="en-US" sz="1200" dirty="0"/>
+              <a:t>Hendelser, øvelser og risikovurderinger med status.</a:t>
+            </a:r>
+            <a:endParaRPr lang="en-US" sz="1700" dirty="0"/>
           </a:p>
         </p:txBody>
       </p:sp>
@@ -9464,7 +9769,7 @@
                 <a:ea typeface="Calibri" pitchFamily="34" charset="-122"/>
                 <a:cs typeface="Calibri" pitchFamily="34" charset="-120"/>
               </a:rPr>
-              <a:t>KONKURRANSE</a:t>
+              <a:t>BYGGET FOR FISKEFLÅTEN</a:t>
             </a:r>
             <a:endParaRPr lang="en-US" sz="1200" dirty="0"/>
           </a:p>
@@ -9505,7 +9810,7 @@
                 <a:ea typeface="Arial" pitchFamily="34" charset="-122"/>
                 <a:cs typeface="Arial" pitchFamily="34" charset="-120"/>
               </a:rPr>
-              <a:t>Hvorfor Nautech vinner: bygget for fiskeflåten, med KI fra start</a:t>
+              <a:t>Fiskerimodulen: det generelle systemer ikke er laget for</a:t>
             </a:r>
             <a:endParaRPr lang="en-US" sz="3000" dirty="0"/>
           </a:p>
@@ -9513,14 +9818,53 @@
       </p:sp>
       <p:sp>
         <p:nvSpPr>
-          <p:cNvPr id="4" name="Ikon-sirkel"/>
+          <p:cNvPr id="4" name="Text 2"/>
+          <p:cNvSpPr txBox="1"/>
+          <p:nvPr/>
+        </p:nvSpPr>
+        <p:spPr>
+          <a:xfrm>
+            <a:off x="548640" y="1828800"/>
+            <a:ext cx="4434840" cy="822960"/>
+          </a:xfrm>
+          <a:prstGeom prst="rect">
+            <a:avLst/>
+          </a:prstGeom>
+          <a:noFill/>
+          <a:ln/>
+        </p:spPr>
+        <p:txBody>
+          <a:bodyPr wrap="square" lIns="0" tIns="0" rIns="0" bIns="0" rtlCol="0" anchor="t"/>
+          <a:lstStyle/>
+          <a:p>
+            <a:pPr indent="0" marL="0">
+              <a:buNone/>
+            </a:pPr>
+            <a:r>
+              <a:rPr lang="en-US" sz="1600" dirty="0">
+                <a:solidFill>
+                  <a:srgbClr val="1B2A38"/>
+                </a:solidFill>
+                <a:latin typeface="Calibri" pitchFamily="34" charset="0"/>
+                <a:ea typeface="Calibri" pitchFamily="34" charset="-122"/>
+                <a:cs typeface="Calibri" pitchFamily="34" charset="-120"/>
+              </a:rPr>
+              <a:t>Fiskefartøy har krav og arbeidsoppgaver som handelsflåten ikke har. Nautech har dem innebygd.</a:t>
+            </a:r>
+            <a:endParaRPr lang="en-US" sz="1600" dirty="0"/>
+          </a:p>
+        </p:txBody>
+      </p:sp>
+      <p:sp>
+        <p:nvSpPr>
+          <p:cNvPr id="5" name="Ikon-sirkel"/>
           <p:cNvSpPr/>
           <p:nvPr/>
         </p:nvSpPr>
         <p:spPr>
           <a:xfrm>
-            <a:off x="548640" y="1874520"/>
-            <a:ext cx="640080" cy="640080"/>
+            <a:off x="548640" y="2743200"/>
+            <a:ext cx="548640" cy="548640"/>
           </a:xfrm>
           <a:prstGeom prst="ellipse">
             <a:avLst/>
@@ -9533,7 +9877,7 @@
       </p:sp>
       <p:pic>
         <p:nvPicPr>
-          <p:cNvPr id="5" name="Ikon FaFish" descr="preencoded.png">    </p:cNvPr>
+          <p:cNvPr id="6" name="Ikon FaFish" descr="preencoded.png">    </p:cNvPr>
           <p:cNvPicPr>
             <a:picLocks noChangeAspect="1"/>
           </p:cNvPicPr>
@@ -9547,8 +9891,8 @@
         </p:blipFill>
         <p:spPr>
           <a:xfrm>
-            <a:off x="702259" y="2028139"/>
-            <a:ext cx="332842" cy="332842"/>
+            <a:off x="680314" y="2874874"/>
+            <a:ext cx="285293" cy="285293"/>
           </a:xfrm>
           <a:prstGeom prst="rect">
             <a:avLst/>
@@ -9557,14 +9901,14 @@
       </p:pic>
       <p:sp>
         <p:nvSpPr>
-          <p:cNvPr id="6" name="Text 3"/>
+          <p:cNvPr id="7" name="Text 4"/>
           <p:cNvSpPr txBox="1"/>
           <p:nvPr/>
         </p:nvSpPr>
         <p:spPr>
           <a:xfrm>
-            <a:off x="1417320" y="1828800"/>
-            <a:ext cx="4160520" cy="1234440"/>
+            <a:off x="1280160" y="2706624"/>
+            <a:ext cx="3703320" cy="731520"/>
           </a:xfrm>
           <a:prstGeom prst="rect">
             <a:avLst/>
@@ -9580,7 +9924,7 @@
               <a:buNone/>
             </a:pPr>
             <a:r>
-              <a:rPr lang="en-US" sz="1700" b="1" dirty="0">
+              <a:rPr lang="en-US" sz="1600" b="1" dirty="0">
                 <a:solidFill>
                   <a:srgbClr val="0B1F33"/>
                 </a:solidFill>
@@ -9588,9 +9932,9 @@
                 <a:ea typeface="Calibri" pitchFamily="34" charset="-122"/>
                 <a:cs typeface="Calibri" pitchFamily="34" charset="-120"/>
               </a:rPr>
-              <a:t>Bygget for fiskeflåten</a:t>
-            </a:r>
-            <a:endParaRPr lang="en-US" sz="1700" dirty="0"/>
+              <a:t>Fangst per hal og tur</a:t>
+            </a:r>
+            <a:endParaRPr lang="en-US" sz="1600" dirty="0"/>
           </a:p>
           <a:p>
             <a:pPr indent="0" marL="0">
@@ -9605,22 +9949,22 @@
                 <a:ea typeface="Calibri" pitchFamily="34" charset="-122"/>
                 <a:cs typeface="Calibri" pitchFamily="34" charset="-120"/>
               </a:rPr>
-              <a:t>Egen fiskerimodul med fangst per hal, kvoter, sporbarhet og oversikt over ERS, VMS og HACCP. Konkurrentene er brede systemer for mange typer fartøy.</a:t>
-            </a:r>
-            <a:endParaRPr lang="en-US" sz="1700" dirty="0"/>
-          </a:p>
-        </p:txBody>
-      </p:sp>
-      <p:sp>
-        <p:nvSpPr>
-          <p:cNvPr id="7" name="Ikon-sirkel"/>
+              <a:t>Mengde, art, dyp og tid registreres om bord.</a:t>
+            </a:r>
+            <a:endParaRPr lang="en-US" sz="1600" dirty="0"/>
+          </a:p>
+        </p:txBody>
+      </p:sp>
+      <p:sp>
+        <p:nvSpPr>
+          <p:cNvPr id="8" name="Ikon-sirkel"/>
           <p:cNvSpPr/>
           <p:nvPr/>
         </p:nvSpPr>
         <p:spPr>
           <a:xfrm>
-            <a:off x="548640" y="3200400"/>
-            <a:ext cx="640080" cy="640080"/>
+            <a:off x="548640" y="3520440"/>
+            <a:ext cx="548640" cy="548640"/>
           </a:xfrm>
           <a:prstGeom prst="ellipse">
             <a:avLst/>
@@ -9633,7 +9977,7 @@
       </p:sp>
       <p:pic>
         <p:nvPicPr>
-          <p:cNvPr id="8" name="Ikon FaBrain" descr="preencoded.png">    </p:cNvPr>
+          <p:cNvPr id="9" name="Ikon FaListCheck" descr="preencoded.png">    </p:cNvPr>
           <p:cNvPicPr>
             <a:picLocks noChangeAspect="1"/>
           </p:cNvPicPr>
@@ -9647,8 +9991,8 @@
         </p:blipFill>
         <p:spPr>
           <a:xfrm>
-            <a:off x="702259" y="3354019"/>
-            <a:ext cx="332842" cy="332842"/>
+            <a:off x="680314" y="3652114"/>
+            <a:ext cx="285293" cy="285293"/>
           </a:xfrm>
           <a:prstGeom prst="rect">
             <a:avLst/>
@@ -9657,14 +10001,14 @@
       </p:pic>
       <p:sp>
         <p:nvSpPr>
-          <p:cNvPr id="9" name="Text 5"/>
+          <p:cNvPr id="10" name="Text 6"/>
           <p:cNvSpPr txBox="1"/>
           <p:nvPr/>
         </p:nvSpPr>
         <p:spPr>
           <a:xfrm>
-            <a:off x="1417320" y="3154680"/>
-            <a:ext cx="4160520" cy="1234440"/>
+            <a:off x="1280160" y="3483864"/>
+            <a:ext cx="3703320" cy="731520"/>
           </a:xfrm>
           <a:prstGeom prst="rect">
             <a:avLst/>
@@ -9680,7 +10024,7 @@
               <a:buNone/>
             </a:pPr>
             <a:r>
-              <a:rPr lang="en-US" sz="1700" b="1" dirty="0">
+              <a:rPr lang="en-US" sz="1600" b="1" dirty="0">
                 <a:solidFill>
                   <a:srgbClr val="0B1F33"/>
                 </a:solidFill>
@@ -9688,9 +10032,9 @@
                 <a:ea typeface="Calibri" pitchFamily="34" charset="-122"/>
                 <a:cs typeface="Calibri" pitchFamily="34" charset="-120"/>
               </a:rPr>
-              <a:t>KI fra start – ikke lagt på i etterkant</a:t>
-            </a:r>
-            <a:endParaRPr lang="en-US" sz="1700" dirty="0"/>
+              <a:t>Kvoter</a:t>
+            </a:r>
+            <a:endParaRPr lang="en-US" sz="1600" dirty="0"/>
           </a:p>
           <a:p>
             <a:pPr indent="0" marL="0">
@@ -9705,22 +10049,22 @@
                 <a:ea typeface="Calibri" pitchFamily="34" charset="-122"/>
                 <a:cs typeface="Calibri" pitchFamily="34" charset="-120"/>
               </a:rPr>
-              <a:t>KI-en bruker kundens egne data og viser kilden. Flere konkurrenter er først nå i gang med KI.</a:t>
-            </a:r>
-            <a:endParaRPr lang="en-US" sz="1700" dirty="0"/>
-          </a:p>
-        </p:txBody>
-      </p:sp>
-      <p:sp>
-        <p:nvSpPr>
-          <p:cNvPr id="10" name="Ikon-sirkel"/>
+              <a:t>Se hvor mye som er fisket og hva som gjenstår.</a:t>
+            </a:r>
+            <a:endParaRPr lang="en-US" sz="1600" dirty="0"/>
+          </a:p>
+        </p:txBody>
+      </p:sp>
+      <p:sp>
+        <p:nvSpPr>
+          <p:cNvPr id="11" name="Ikon-sirkel"/>
           <p:cNvSpPr/>
           <p:nvPr/>
         </p:nvSpPr>
         <p:spPr>
           <a:xfrm>
-            <a:off x="548640" y="4526280"/>
-            <a:ext cx="640080" cy="640080"/>
+            <a:off x="548640" y="4297680"/>
+            <a:ext cx="548640" cy="548640"/>
           </a:xfrm>
           <a:prstGeom prst="ellipse">
             <a:avLst/>
@@ -9733,7 +10077,7 @@
       </p:sp>
       <p:pic>
         <p:nvPicPr>
-          <p:cNvPr id="11" name="Ikon FaLock" descr="preencoded.png">    </p:cNvPr>
+          <p:cNvPr id="12" name="Ikon FaClipboardCheck" descr="preencoded.png">    </p:cNvPr>
           <p:cNvPicPr>
             <a:picLocks noChangeAspect="1"/>
           </p:cNvPicPr>
@@ -9747,6 +10091,656 @@
         </p:blipFill>
         <p:spPr>
           <a:xfrm>
+            <a:off x="680314" y="4429354"/>
+            <a:ext cx="285293" cy="285293"/>
+          </a:xfrm>
+          <a:prstGeom prst="rect">
+            <a:avLst/>
+          </a:prstGeom>
+        </p:spPr>
+      </p:pic>
+      <p:sp>
+        <p:nvSpPr>
+          <p:cNvPr id="13" name="Text 8"/>
+          <p:cNvSpPr txBox="1"/>
+          <p:nvPr/>
+        </p:nvSpPr>
+        <p:spPr>
+          <a:xfrm>
+            <a:off x="1280160" y="4261104"/>
+            <a:ext cx="3703320" cy="731520"/>
+          </a:xfrm>
+          <a:prstGeom prst="rect">
+            <a:avLst/>
+          </a:prstGeom>
+          <a:noFill/>
+          <a:ln/>
+        </p:spPr>
+        <p:txBody>
+          <a:bodyPr wrap="square" lIns="0" tIns="0" rIns="0" bIns="0" rtlCol="0" anchor="t"/>
+          <a:lstStyle/>
+          <a:p>
+            <a:pPr indent="0" marL="0">
+              <a:buNone/>
+            </a:pPr>
+            <a:r>
+              <a:rPr lang="en-US" sz="1600" b="1" dirty="0">
+                <a:solidFill>
+                  <a:srgbClr val="0B1F33"/>
+                </a:solidFill>
+                <a:latin typeface="Calibri" pitchFamily="34" charset="0"/>
+                <a:ea typeface="Calibri" pitchFamily="34" charset="-122"/>
+                <a:cs typeface="Calibri" pitchFamily="34" charset="-120"/>
+              </a:rPr>
+              <a:t>Rapportering og krav</a:t>
+            </a:r>
+            <a:endParaRPr lang="en-US" sz="1600" dirty="0"/>
+          </a:p>
+          <a:p>
+            <a:pPr indent="0" marL="0">
+              <a:buNone/>
+            </a:pPr>
+            <a:r>
+              <a:rPr lang="en-US" sz="1400" dirty="0">
+                <a:solidFill>
+                  <a:srgbClr val="1B2A38"/>
+                </a:solidFill>
+                <a:latin typeface="Calibri" pitchFamily="34" charset="0"/>
+                <a:ea typeface="Calibri" pitchFamily="34" charset="-122"/>
+                <a:cs typeface="Calibri" pitchFamily="34" charset="-120"/>
+              </a:rPr>
+              <a:t>Oversikt over ERS, VMS, HACCP, bifangst og landingsdeklarasjoner.</a:t>
+            </a:r>
+            <a:endParaRPr lang="en-US" sz="1600" dirty="0"/>
+          </a:p>
+        </p:txBody>
+      </p:sp>
+      <p:sp>
+        <p:nvSpPr>
+          <p:cNvPr id="14" name="Ikon-sirkel"/>
+          <p:cNvSpPr/>
+          <p:nvPr/>
+        </p:nvSpPr>
+        <p:spPr>
+          <a:xfrm>
+            <a:off x="548640" y="5074920"/>
+            <a:ext cx="548640" cy="548640"/>
+          </a:xfrm>
+          <a:prstGeom prst="ellipse">
+            <a:avLst/>
+          </a:prstGeom>
+          <a:solidFill>
+            <a:srgbClr val="0E7C86"/>
+          </a:solidFill>
+          <a:ln/>
+        </p:spPr>
+      </p:sp>
+      <p:pic>
+        <p:nvPicPr>
+          <p:cNvPr id="15" name="Ikon FaRoute" descr="preencoded.png">    </p:cNvPr>
+          <p:cNvPicPr>
+            <a:picLocks noChangeAspect="1"/>
+          </p:cNvPicPr>
+          <p:nvPr/>
+        </p:nvPicPr>
+        <p:blipFill>
+          <a:blip r:embed="rId4"/>
+          <a:stretch>
+            <a:fillRect/>
+          </a:stretch>
+        </p:blipFill>
+        <p:spPr>
+          <a:xfrm>
+            <a:off x="680314" y="5206594"/>
+            <a:ext cx="285293" cy="285293"/>
+          </a:xfrm>
+          <a:prstGeom prst="rect">
+            <a:avLst/>
+          </a:prstGeom>
+        </p:spPr>
+      </p:pic>
+      <p:sp>
+        <p:nvSpPr>
+          <p:cNvPr id="16" name="Text 10"/>
+          <p:cNvSpPr txBox="1"/>
+          <p:nvPr/>
+        </p:nvSpPr>
+        <p:spPr>
+          <a:xfrm>
+            <a:off x="1280160" y="5038344"/>
+            <a:ext cx="3703320" cy="731520"/>
+          </a:xfrm>
+          <a:prstGeom prst="rect">
+            <a:avLst/>
+          </a:prstGeom>
+          <a:noFill/>
+          <a:ln/>
+        </p:spPr>
+        <p:txBody>
+          <a:bodyPr wrap="square" lIns="0" tIns="0" rIns="0" bIns="0" rtlCol="0" anchor="t"/>
+          <a:lstStyle/>
+          <a:p>
+            <a:pPr indent="0" marL="0">
+              <a:buNone/>
+            </a:pPr>
+            <a:r>
+              <a:rPr lang="en-US" sz="1600" b="1" dirty="0">
+                <a:solidFill>
+                  <a:srgbClr val="0B1F33"/>
+                </a:solidFill>
+                <a:latin typeface="Calibri" pitchFamily="34" charset="0"/>
+                <a:ea typeface="Calibri" pitchFamily="34" charset="-122"/>
+                <a:cs typeface="Calibri" pitchFamily="34" charset="-120"/>
+              </a:rPr>
+              <a:t>Sporbarhet</a:t>
+            </a:r>
+            <a:endParaRPr lang="en-US" sz="1600" dirty="0"/>
+          </a:p>
+          <a:p>
+            <a:pPr indent="0" marL="0">
+              <a:buNone/>
+            </a:pPr>
+            <a:r>
+              <a:rPr lang="en-US" sz="1400" dirty="0">
+                <a:solidFill>
+                  <a:srgbClr val="1B2A38"/>
+                </a:solidFill>
+                <a:latin typeface="Calibri" pitchFamily="34" charset="0"/>
+                <a:ea typeface="Calibri" pitchFamily="34" charset="-122"/>
+                <a:cs typeface="Calibri" pitchFamily="34" charset="-120"/>
+              </a:rPr>
+              <a:t>Følg fisken fra fangst til salg.</a:t>
+            </a:r>
+            <a:endParaRPr lang="en-US" sz="1600" dirty="0"/>
+          </a:p>
+        </p:txBody>
+      </p:sp>
+      <p:sp>
+        <p:nvSpPr>
+          <p:cNvPr id="17" name="Skjermbilde-ramme"/>
+          <p:cNvSpPr/>
+          <p:nvPr/>
+        </p:nvSpPr>
+        <p:spPr>
+          <a:xfrm>
+            <a:off x="5221224" y="1792224"/>
+            <a:ext cx="6458407" cy="4063937"/>
+          </a:xfrm>
+          <a:prstGeom prst="rect">
+            <a:avLst/>
+          </a:prstGeom>
+          <a:solidFill>
+            <a:srgbClr val="FFFFFF"/>
+          </a:solidFill>
+          <a:ln w="12700">
+            <a:solidFill>
+              <a:srgbClr val="C9D5DE"/>
+            </a:solidFill>
+            <a:prstDash val="solid"/>
+          </a:ln>
+          <a:effectLst>
+            <a:outerShdw sx="100000" sy="100000" kx="0" ky="0" algn="bl" rotWithShape="0" blurRad="101600" dist="38100" dir="5400000">
+              <a:srgbClr val="000000">
+                <a:alpha val="18000"/>
+              </a:srgbClr>
+            </a:outerShdw>
+          </a:effectLst>
+        </p:spPr>
+      </p:sp>
+      <p:pic>
+        <p:nvPicPr>
+          <p:cNvPr id="18" name="Skjermbilde fishery__hauls.png" descr="/tmp/claude-0/-home-user-Claude/bbdec16f-2a10-550d-bb32-af07b09e4311/scratchpad/build/img/fishery__hauls.png">    </p:cNvPr>
+          <p:cNvPicPr>
+            <a:picLocks noChangeAspect="1"/>
+          </p:cNvPicPr>
+          <p:nvPr/>
+        </p:nvPicPr>
+        <p:blipFill>
+          <a:blip r:embed="rId5"/>
+          <a:stretch>
+            <a:fillRect/>
+          </a:stretch>
+        </p:blipFill>
+        <p:spPr>
+          <a:xfrm>
+            <a:off x="5257800" y="1828800"/>
+            <a:ext cx="6385255" cy="3990785"/>
+          </a:xfrm>
+          <a:prstGeom prst="rect">
+            <a:avLst/>
+          </a:prstGeom>
+        </p:spPr>
+      </p:pic>
+      <p:sp>
+        <p:nvSpPr>
+          <p:cNvPr id="19" name="Text 12"/>
+          <p:cNvSpPr txBox="1"/>
+          <p:nvPr/>
+        </p:nvSpPr>
+        <p:spPr>
+          <a:xfrm>
+            <a:off x="5257800" y="5929313"/>
+            <a:ext cx="6385255" cy="274320"/>
+          </a:xfrm>
+          <a:prstGeom prst="rect">
+            <a:avLst/>
+          </a:prstGeom>
+          <a:noFill/>
+          <a:ln/>
+        </p:spPr>
+        <p:txBody>
+          <a:bodyPr wrap="square" lIns="0" tIns="0" rIns="0" bIns="0" rtlCol="0" anchor="ctr"/>
+          <a:lstStyle/>
+          <a:p>
+            <a:pPr indent="0" marL="0">
+              <a:buNone/>
+            </a:pPr>
+            <a:r>
+              <a:rPr lang="en-US" sz="1100" i="1" dirty="0">
+                <a:solidFill>
+                  <a:srgbClr val="5B6B7A"/>
+                </a:solidFill>
+                <a:latin typeface="Calibri" pitchFamily="34" charset="0"/>
+                <a:ea typeface="Calibri" pitchFamily="34" charset="-122"/>
+                <a:cs typeface="Calibri" pitchFamily="34" charset="-120"/>
+              </a:rPr>
+              <a:t>Fangst per hal: tidspunkt, dyp, temperatur og mengde.</a:t>
+            </a:r>
+            <a:endParaRPr lang="en-US" sz="1100" dirty="0"/>
+          </a:p>
+        </p:txBody>
+      </p:sp>
+      <p:sp>
+        <p:nvSpPr>
+          <p:cNvPr id="25" name="Slide Number Placeholder 0"/>
+          <p:cNvSpPr>
+            <a:spLocks noGrp="1"/>
+          </p:cNvSpPr>
+          <p:nvPr>
+            <p:ph type="sldNum" sz="quarter" idx="4294967295"/>
+          </p:nvPr>
+        </p:nvSpPr>
+        <p:spPr>
+          <a:xfrm>
+            <a:off x="11094415" y="6400800"/>
+            <a:ext cx="548640" cy="274320"/>
+          </a:xfrm>
+          <a:prstGeom prst="rect">
+            <a:avLst/>
+          </a:prstGeom>
+          <a:extLst>
+            <a:ext uri="{C572A759-6A51-4108-AA02-DFA0A04FC94B}">
+              <ma14:wrappingTextBoxFlag xmlns:ma14="http://schemas.microsoft.com/office/mac/drawingml/2011/main" val="0"/>
+            </a:ext>
+          </a:extLst>
+        </p:spPr>
+        <p:txBody>
+          <a:bodyPr/>
+          <a:lstStyle>
+            <a:lvl1pPr>
+              <a:defRPr sz="1000">
+                <a:solidFill>
+                  <a:srgbClr val="5B6B7A"/>
+                </a:solidFill>
+                <a:latin typeface="Calibri"/>
+                <a:ea typeface="Calibri"/>
+                <a:cs typeface="Calibri"/>
+              </a:defRPr>
+            </a:lvl1pPr>
+          </a:lstStyle>
+          <a:p>
+            <a:pPr algn="r"/>
+            <a:fld id="{F7021451-1387-4CA6-816F-3879F97B5CBC}" type="slidenum">
+              <a:rPr b="0" lang="en-US"/>
+              <a:t>7</a:t>
+            </a:fld>
+            <a:endParaRPr lang="en-US"/>
+          </a:p>
+        </p:txBody>
+      </p:sp>
+    </p:spTree>
+  </p:cSld>
+  <p:clrMapOvr>
+    <a:masterClrMapping/>
+  </p:clrMapOvr>
+</p:sld>
+</file>
+
+<file path=ppt/slides/slide8.xml><?xml version="1.0" encoding="utf-8"?>
+<p:sld xmlns:a="http://schemas.openxmlformats.org/drawingml/2006/main" xmlns:r="http://schemas.openxmlformats.org/officeDocument/2006/relationships" xmlns:p="http://schemas.openxmlformats.org/presentationml/2006/main">
+  <p:cSld name="Slide 8">
+    <p:spTree>
+      <p:nvGrpSpPr>
+        <p:cNvPr id="1" name=""/>
+        <p:cNvGrpSpPr/>
+        <p:nvPr/>
+      </p:nvGrpSpPr>
+      <p:grpSpPr>
+        <a:xfrm>
+          <a:off x="0" y="0"/>
+          <a:ext cx="0" cy="0"/>
+          <a:chOff x="0" y="0"/>
+          <a:chExt cx="0" cy="0"/>
+        </a:xfrm>
+      </p:grpSpPr>
+      <p:sp>
+        <p:nvSpPr>
+          <p:cNvPr id="2" name="Text 1"/>
+          <p:cNvSpPr/>
+          <p:nvPr>
+            <p:ph idx="101" type="body" hasCustomPrompt="1"/>
+          </p:nvPr>
+        </p:nvSpPr>
+        <p:spPr>
+          <a:xfrm>
+            <a:off x="548640" y="365760"/>
+            <a:ext cx="9144000" cy="274320"/>
+          </a:xfrm>
+          <a:prstGeom prst="rect">
+            <a:avLst/>
+          </a:prstGeom>
+          <a:noFill/>
+          <a:ln/>
+        </p:spPr>
+        <p:txBody>
+          <a:bodyPr wrap="square" lIns="0" tIns="0" rIns="0" bIns="0" rtlCol="0"/>
+          <a:lstStyle/>
+          <a:p>
+            <a:pPr indent="0" marL="0">
+              <a:buNone/>
+            </a:pPr>
+            <a:r>
+              <a:rPr lang="en-US" sz="1200" b="1" spc="200" kern="0" dirty="0">
+                <a:solidFill>
+                  <a:srgbClr val="0E7C86"/>
+                </a:solidFill>
+                <a:latin typeface="Calibri" pitchFamily="34" charset="0"/>
+                <a:ea typeface="Calibri" pitchFamily="34" charset="-122"/>
+                <a:cs typeface="Calibri" pitchFamily="34" charset="-120"/>
+              </a:rPr>
+              <a:t>KONKURRANSE</a:t>
+            </a:r>
+            <a:endParaRPr lang="en-US" sz="1200" dirty="0"/>
+          </a:p>
+        </p:txBody>
+      </p:sp>
+      <p:sp>
+        <p:nvSpPr>
+          <p:cNvPr id="3" name="Text 1"/>
+          <p:cNvSpPr/>
+          <p:nvPr>
+            <p:ph idx="102" type="title" hasCustomPrompt="1"/>
+          </p:nvPr>
+        </p:nvSpPr>
+        <p:spPr>
+          <a:xfrm>
+            <a:off x="548640" y="658368"/>
+            <a:ext cx="11094415" cy="1051560"/>
+          </a:xfrm>
+          <a:prstGeom prst="rect">
+            <a:avLst/>
+          </a:prstGeom>
+          <a:noFill/>
+          <a:ln/>
+        </p:spPr>
+        <p:txBody>
+          <a:bodyPr wrap="square" lIns="0" tIns="0" rIns="0" bIns="0" rtlCol="0" anchor="t"/>
+          <a:lstStyle/>
+          <a:p>
+            <a:pPr algn="l" indent="0" marL="0">
+              <a:buNone/>
+            </a:pPr>
+            <a:r>
+              <a:rPr lang="en-US" sz="3000" b="1" dirty="0">
+                <a:solidFill>
+                  <a:srgbClr val="0B1F33"/>
+                </a:solidFill>
+                <a:latin typeface="Arial" pitchFamily="34" charset="0"/>
+                <a:ea typeface="Arial" pitchFamily="34" charset="-122"/>
+                <a:cs typeface="Arial" pitchFamily="34" charset="-120"/>
+              </a:rPr>
+              <a:t>Hvorfor Nautech vinner: bygget for fiskeflåten, med KI fra start</a:t>
+            </a:r>
+            <a:endParaRPr lang="en-US" sz="3000" dirty="0"/>
+          </a:p>
+        </p:txBody>
+      </p:sp>
+      <p:sp>
+        <p:nvSpPr>
+          <p:cNvPr id="4" name="Ikon-sirkel"/>
+          <p:cNvSpPr/>
+          <p:nvPr/>
+        </p:nvSpPr>
+        <p:spPr>
+          <a:xfrm>
+            <a:off x="548640" y="1874520"/>
+            <a:ext cx="640080" cy="640080"/>
+          </a:xfrm>
+          <a:prstGeom prst="ellipse">
+            <a:avLst/>
+          </a:prstGeom>
+          <a:solidFill>
+            <a:srgbClr val="0E7C86"/>
+          </a:solidFill>
+          <a:ln/>
+        </p:spPr>
+      </p:sp>
+      <p:pic>
+        <p:nvPicPr>
+          <p:cNvPr id="5" name="Ikon FaFish" descr="preencoded.png">    </p:cNvPr>
+          <p:cNvPicPr>
+            <a:picLocks noChangeAspect="1"/>
+          </p:cNvPicPr>
+          <p:nvPr/>
+        </p:nvPicPr>
+        <p:blipFill>
+          <a:blip r:embed="rId1"/>
+          <a:stretch>
+            <a:fillRect/>
+          </a:stretch>
+        </p:blipFill>
+        <p:spPr>
+          <a:xfrm>
+            <a:off x="702259" y="2028139"/>
+            <a:ext cx="332842" cy="332842"/>
+          </a:xfrm>
+          <a:prstGeom prst="rect">
+            <a:avLst/>
+          </a:prstGeom>
+        </p:spPr>
+      </p:pic>
+      <p:sp>
+        <p:nvSpPr>
+          <p:cNvPr id="6" name="Text 3"/>
+          <p:cNvSpPr txBox="1"/>
+          <p:nvPr/>
+        </p:nvSpPr>
+        <p:spPr>
+          <a:xfrm>
+            <a:off x="1417320" y="1828800"/>
+            <a:ext cx="4160520" cy="1234440"/>
+          </a:xfrm>
+          <a:prstGeom prst="rect">
+            <a:avLst/>
+          </a:prstGeom>
+          <a:noFill/>
+          <a:ln/>
+        </p:spPr>
+        <p:txBody>
+          <a:bodyPr wrap="square" lIns="0" tIns="0" rIns="0" bIns="0" rtlCol="0" anchor="t"/>
+          <a:lstStyle/>
+          <a:p>
+            <a:pPr indent="0" marL="0">
+              <a:buNone/>
+            </a:pPr>
+            <a:r>
+              <a:rPr lang="en-US" sz="1700" b="1" dirty="0">
+                <a:solidFill>
+                  <a:srgbClr val="0B1F33"/>
+                </a:solidFill>
+                <a:latin typeface="Calibri" pitchFamily="34" charset="0"/>
+                <a:ea typeface="Calibri" pitchFamily="34" charset="-122"/>
+                <a:cs typeface="Calibri" pitchFamily="34" charset="-120"/>
+              </a:rPr>
+              <a:t>Bygget for fiskeflåten</a:t>
+            </a:r>
+            <a:endParaRPr lang="en-US" sz="1700" dirty="0"/>
+          </a:p>
+          <a:p>
+            <a:pPr indent="0" marL="0">
+              <a:buNone/>
+            </a:pPr>
+            <a:r>
+              <a:rPr lang="en-US" sz="1400" dirty="0">
+                <a:solidFill>
+                  <a:srgbClr val="1B2A38"/>
+                </a:solidFill>
+                <a:latin typeface="Calibri" pitchFamily="34" charset="0"/>
+                <a:ea typeface="Calibri" pitchFamily="34" charset="-122"/>
+                <a:cs typeface="Calibri" pitchFamily="34" charset="-120"/>
+              </a:rPr>
+              <a:t>Egen fiskerimodul med fangst per hal, kvoter, sporbarhet og oversikt over ERS, VMS og HACCP. Konkurrentene er brede systemer for mange typer fartøy.</a:t>
+            </a:r>
+            <a:endParaRPr lang="en-US" sz="1700" dirty="0"/>
+          </a:p>
+        </p:txBody>
+      </p:sp>
+      <p:sp>
+        <p:nvSpPr>
+          <p:cNvPr id="7" name="Ikon-sirkel"/>
+          <p:cNvSpPr/>
+          <p:nvPr/>
+        </p:nvSpPr>
+        <p:spPr>
+          <a:xfrm>
+            <a:off x="548640" y="3200400"/>
+            <a:ext cx="640080" cy="640080"/>
+          </a:xfrm>
+          <a:prstGeom prst="ellipse">
+            <a:avLst/>
+          </a:prstGeom>
+          <a:solidFill>
+            <a:srgbClr val="0E7C86"/>
+          </a:solidFill>
+          <a:ln/>
+        </p:spPr>
+      </p:sp>
+      <p:pic>
+        <p:nvPicPr>
+          <p:cNvPr id="8" name="Ikon FaBrain" descr="preencoded.png">    </p:cNvPr>
+          <p:cNvPicPr>
+            <a:picLocks noChangeAspect="1"/>
+          </p:cNvPicPr>
+          <p:nvPr/>
+        </p:nvPicPr>
+        <p:blipFill>
+          <a:blip r:embed="rId2"/>
+          <a:stretch>
+            <a:fillRect/>
+          </a:stretch>
+        </p:blipFill>
+        <p:spPr>
+          <a:xfrm>
+            <a:off x="702259" y="3354019"/>
+            <a:ext cx="332842" cy="332842"/>
+          </a:xfrm>
+          <a:prstGeom prst="rect">
+            <a:avLst/>
+          </a:prstGeom>
+        </p:spPr>
+      </p:pic>
+      <p:sp>
+        <p:nvSpPr>
+          <p:cNvPr id="9" name="Text 5"/>
+          <p:cNvSpPr txBox="1"/>
+          <p:nvPr/>
+        </p:nvSpPr>
+        <p:spPr>
+          <a:xfrm>
+            <a:off x="1417320" y="3154680"/>
+            <a:ext cx="4160520" cy="1234440"/>
+          </a:xfrm>
+          <a:prstGeom prst="rect">
+            <a:avLst/>
+          </a:prstGeom>
+          <a:noFill/>
+          <a:ln/>
+        </p:spPr>
+        <p:txBody>
+          <a:bodyPr wrap="square" lIns="0" tIns="0" rIns="0" bIns="0" rtlCol="0" anchor="t"/>
+          <a:lstStyle/>
+          <a:p>
+            <a:pPr indent="0" marL="0">
+              <a:buNone/>
+            </a:pPr>
+            <a:r>
+              <a:rPr lang="en-US" sz="1700" b="1" dirty="0">
+                <a:solidFill>
+                  <a:srgbClr val="0B1F33"/>
+                </a:solidFill>
+                <a:latin typeface="Calibri" pitchFamily="34" charset="0"/>
+                <a:ea typeface="Calibri" pitchFamily="34" charset="-122"/>
+                <a:cs typeface="Calibri" pitchFamily="34" charset="-120"/>
+              </a:rPr>
+              <a:t>KI fra start – ikke lagt på i etterkant</a:t>
+            </a:r>
+            <a:endParaRPr lang="en-US" sz="1700" dirty="0"/>
+          </a:p>
+          <a:p>
+            <a:pPr indent="0" marL="0">
+              <a:buNone/>
+            </a:pPr>
+            <a:r>
+              <a:rPr lang="en-US" sz="1400" dirty="0">
+                <a:solidFill>
+                  <a:srgbClr val="1B2A38"/>
+                </a:solidFill>
+                <a:latin typeface="Calibri" pitchFamily="34" charset="0"/>
+                <a:ea typeface="Calibri" pitchFamily="34" charset="-122"/>
+                <a:cs typeface="Calibri" pitchFamily="34" charset="-120"/>
+              </a:rPr>
+              <a:t>KI-en bruker kundens egne data og viser kilden. Flere konkurrenter er først nå i gang med KI.</a:t>
+            </a:r>
+            <a:endParaRPr lang="en-US" sz="1700" dirty="0"/>
+          </a:p>
+        </p:txBody>
+      </p:sp>
+      <p:sp>
+        <p:nvSpPr>
+          <p:cNvPr id="10" name="Ikon-sirkel"/>
+          <p:cNvSpPr/>
+          <p:nvPr/>
+        </p:nvSpPr>
+        <p:spPr>
+          <a:xfrm>
+            <a:off x="548640" y="4526280"/>
+            <a:ext cx="640080" cy="640080"/>
+          </a:xfrm>
+          <a:prstGeom prst="ellipse">
+            <a:avLst/>
+          </a:prstGeom>
+          <a:solidFill>
+            <a:srgbClr val="0E7C86"/>
+          </a:solidFill>
+          <a:ln/>
+        </p:spPr>
+      </p:sp>
+      <p:pic>
+        <p:nvPicPr>
+          <p:cNvPr id="11" name="Ikon FaLock" descr="preencoded.png">    </p:cNvPr>
+          <p:cNvPicPr>
+            <a:picLocks noChangeAspect="1"/>
+          </p:cNvPicPr>
+          <p:nvPr/>
+        </p:nvPicPr>
+        <p:blipFill>
+          <a:blip r:embed="rId3"/>
+          <a:stretch>
+            <a:fillRect/>
+          </a:stretch>
+        </p:blipFill>
+        <p:spPr>
+          <a:xfrm>
             <a:off x="702259" y="4679899"/>
             <a:ext cx="332842" cy="332842"/>
           </a:xfrm>
@@ -9813,7 +10807,7 @@
       </p:sp>
       <p:graphicFrame>
         <p:nvGraphicFramePr>
-          <p:cNvPr id="8" name="Table 0"/>
+          <p:cNvPr id="9" name="Table 0"/>
           <p:cNvGraphicFramePr>
             <a:graphicFrameLocks noGrp="1"/>
           </p:cNvGraphicFramePr>
@@ -11362,685 +12356,6 @@
             <a:pPr algn="r"/>
             <a:fld id="{F7021451-1387-4CA6-816F-3879F97B5CBC}" type="slidenum">
               <a:rPr b="0" lang="en-US"/>
-              <a:t>7</a:t>
-            </a:fld>
-            <a:endParaRPr lang="en-US"/>
-          </a:p>
-        </p:txBody>
-      </p:sp>
-    </p:spTree>
-  </p:cSld>
-  <p:clrMapOvr>
-    <a:masterClrMapping/>
-  </p:clrMapOvr>
-</p:sld>
-</file>
-
-<file path=ppt/slides/slide8.xml><?xml version="1.0" encoding="utf-8"?>
-<p:sld xmlns:a="http://schemas.openxmlformats.org/drawingml/2006/main" xmlns:r="http://schemas.openxmlformats.org/officeDocument/2006/relationships" xmlns:p="http://schemas.openxmlformats.org/presentationml/2006/main">
-  <p:cSld name="Slide 8">
-    <p:spTree>
-      <p:nvGrpSpPr>
-        <p:cNvPr id="1" name=""/>
-        <p:cNvGrpSpPr/>
-        <p:nvPr/>
-      </p:nvGrpSpPr>
-      <p:grpSpPr>
-        <a:xfrm>
-          <a:off x="0" y="0"/>
-          <a:ext cx="0" cy="0"/>
-          <a:chOff x="0" y="0"/>
-          <a:chExt cx="0" cy="0"/>
-        </a:xfrm>
-      </p:grpSpPr>
-      <p:sp>
-        <p:nvSpPr>
-          <p:cNvPr id="2" name="Text 1"/>
-          <p:cNvSpPr/>
-          <p:nvPr>
-            <p:ph idx="101" type="body" hasCustomPrompt="1"/>
-          </p:nvPr>
-        </p:nvSpPr>
-        <p:spPr>
-          <a:xfrm>
-            <a:off x="548640" y="365760"/>
-            <a:ext cx="9144000" cy="274320"/>
-          </a:xfrm>
-          <a:prstGeom prst="rect">
-            <a:avLst/>
-          </a:prstGeom>
-          <a:noFill/>
-          <a:ln/>
-        </p:spPr>
-        <p:txBody>
-          <a:bodyPr wrap="square" lIns="0" tIns="0" rIns="0" bIns="0" rtlCol="0"/>
-          <a:lstStyle/>
-          <a:p>
-            <a:pPr indent="0" marL="0">
-              <a:buNone/>
-            </a:pPr>
-            <a:r>
-              <a:rPr lang="en-US" sz="1200" b="1" spc="200" kern="0" dirty="0">
-                <a:solidFill>
-                  <a:srgbClr val="0E7C86"/>
-                </a:solidFill>
-                <a:latin typeface="Calibri" pitchFamily="34" charset="0"/>
-                <a:ea typeface="Calibri" pitchFamily="34" charset="-122"/>
-                <a:cs typeface="Calibri" pitchFamily="34" charset="-120"/>
-              </a:rPr>
-              <a:t>MARKED</a:t>
-            </a:r>
-            <a:endParaRPr lang="en-US" sz="1200" dirty="0"/>
-          </a:p>
-        </p:txBody>
-      </p:sp>
-      <p:sp>
-        <p:nvSpPr>
-          <p:cNvPr id="3" name="Text 1"/>
-          <p:cNvSpPr/>
-          <p:nvPr>
-            <p:ph idx="102" type="title" hasCustomPrompt="1"/>
-          </p:nvPr>
-        </p:nvSpPr>
-        <p:spPr>
-          <a:xfrm>
-            <a:off x="548640" y="658368"/>
-            <a:ext cx="11094415" cy="1051560"/>
-          </a:xfrm>
-          <a:prstGeom prst="rect">
-            <a:avLst/>
-          </a:prstGeom>
-          <a:noFill/>
-          <a:ln/>
-        </p:spPr>
-        <p:txBody>
-          <a:bodyPr wrap="square" lIns="0" tIns="0" rIns="0" bIns="0" rtlCol="0" anchor="t"/>
-          <a:lstStyle/>
-          <a:p>
-            <a:pPr algn="l" indent="0" marL="0">
-              <a:buNone/>
-            </a:pPr>
-            <a:r>
-              <a:rPr lang="en-US" sz="3000" b="1" dirty="0">
-                <a:solidFill>
-                  <a:srgbClr val="0B1F33"/>
-                </a:solidFill>
-                <a:latin typeface="Arial" pitchFamily="34" charset="0"/>
-                <a:ea typeface="Arial" pitchFamily="34" charset="-122"/>
-                <a:cs typeface="Arial" pitchFamily="34" charset="-120"/>
-              </a:rPr>
-              <a:t>Vi starter i Norge – og samme type fartøy finnes i hele Europa</a:t>
-            </a:r>
-            <a:endParaRPr lang="en-US" sz="3000" dirty="0"/>
-          </a:p>
-        </p:txBody>
-      </p:sp>
-      <p:sp>
-        <p:nvSpPr>
-          <p:cNvPr id="4" name="Kort"/>
-          <p:cNvSpPr/>
-          <p:nvPr/>
-        </p:nvSpPr>
-        <p:spPr>
-          <a:xfrm>
-            <a:off x="548640" y="1874520"/>
-            <a:ext cx="3246120" cy="3108960"/>
-          </a:xfrm>
-          <a:prstGeom prst="roundRect">
-            <a:avLst>
-              <a:gd name="adj" fmla="val 3529"/>
-            </a:avLst>
-          </a:prstGeom>
-          <a:solidFill>
-            <a:srgbClr val="EEF3F6"/>
-          </a:solidFill>
-          <a:ln/>
-        </p:spPr>
-      </p:sp>
-      <p:sp>
-        <p:nvSpPr>
-          <p:cNvPr id="5" name="Text 3"/>
-          <p:cNvSpPr txBox="1"/>
-          <p:nvPr/>
-        </p:nvSpPr>
-        <p:spPr>
-          <a:xfrm>
-            <a:off x="868680" y="2103120"/>
-            <a:ext cx="2606040" cy="2743200"/>
-          </a:xfrm>
-          <a:prstGeom prst="rect">
-            <a:avLst/>
-          </a:prstGeom>
-          <a:noFill/>
-          <a:ln/>
-        </p:spPr>
-        <p:txBody>
-          <a:bodyPr wrap="square" lIns="0" tIns="0" rIns="0" bIns="0" rtlCol="0" anchor="t"/>
-          <a:lstStyle/>
-          <a:p>
-            <a:pPr indent="0" marL="0">
-              <a:buNone/>
-            </a:pPr>
-            <a:r>
-              <a:rPr lang="en-US" sz="1300" b="1" spc="200" kern="0" dirty="0">
-                <a:solidFill>
-                  <a:srgbClr val="0E7C86"/>
-                </a:solidFill>
-                <a:latin typeface="Calibri" pitchFamily="34" charset="0"/>
-                <a:ea typeface="Calibri" pitchFamily="34" charset="-122"/>
-                <a:cs typeface="Calibri" pitchFamily="34" charset="-120"/>
-              </a:rPr>
-              <a:t>NORGE</a:t>
-            </a:r>
-            <a:endParaRPr lang="en-US" sz="1300" dirty="0"/>
-          </a:p>
-          <a:p>
-            <a:pPr indent="0" marL="0">
-              <a:buNone/>
-            </a:pPr>
-            <a:r>
-              <a:rPr lang="en-US" sz="4800" b="1" dirty="0">
-                <a:solidFill>
-                  <a:srgbClr val="0B1F33"/>
-                </a:solidFill>
-                <a:latin typeface="Arial" pitchFamily="34" charset="0"/>
-                <a:ea typeface="Arial" pitchFamily="34" charset="-122"/>
-                <a:cs typeface="Arial" pitchFamily="34" charset="-120"/>
-              </a:rPr>
-              <a:t>260</a:t>
-            </a:r>
-            <a:endParaRPr lang="en-US" sz="1300" dirty="0"/>
-          </a:p>
-          <a:p>
-            <a:pPr indent="0" marL="0">
-              <a:buNone/>
-            </a:pPr>
-            <a:r>
-              <a:rPr lang="en-US" sz="1500" dirty="0">
-                <a:solidFill>
-                  <a:srgbClr val="1B2A38"/>
-                </a:solidFill>
-                <a:latin typeface="Calibri" pitchFamily="34" charset="0"/>
-                <a:ea typeface="Calibri" pitchFamily="34" charset="-122"/>
-                <a:cs typeface="Calibri" pitchFamily="34" charset="-120"/>
-              </a:rPr>
-              <a:t>fiskefartøy på 28 meter eller mer</a:t>
-            </a:r>
-            <a:endParaRPr lang="en-US" sz="1300" dirty="0"/>
-          </a:p>
-          <a:p>
-            <a:pPr indent="0" marL="0">
-              <a:buNone/>
-            </a:pPr>
-            <a:r>
-              <a:rPr lang="en-US" sz="1000" dirty="0">
-                <a:solidFill>
-                  <a:srgbClr val="1B2A38"/>
-                </a:solidFill>
-                <a:latin typeface="Calibri" pitchFamily="34" charset="0"/>
-                <a:ea typeface="Calibri" pitchFamily="34" charset="-122"/>
-                <a:cs typeface="Calibri" pitchFamily="34" charset="-120"/>
-              </a:rPr>
-              <a:t> </a:t>
-            </a:r>
-            <a:endParaRPr lang="en-US" sz="1300" dirty="0"/>
-          </a:p>
-          <a:p>
-            <a:pPr indent="0" marL="0">
-              <a:buNone/>
-            </a:pPr>
-            <a:r>
-              <a:rPr lang="en-US" sz="2000" b="1" dirty="0">
-                <a:solidFill>
-                  <a:srgbClr val="0E7C86"/>
-                </a:solidFill>
-                <a:latin typeface="Calibri" pitchFamily="34" charset="0"/>
-                <a:ea typeface="Calibri" pitchFamily="34" charset="-122"/>
-                <a:cs typeface="Calibri" pitchFamily="34" charset="-120"/>
-              </a:rPr>
-              <a:t>≈ 44 MNOK per år</a:t>
-            </a:r>
-            <a:endParaRPr lang="en-US" sz="1300" dirty="0"/>
-          </a:p>
-        </p:txBody>
-      </p:sp>
-      <p:pic>
-        <p:nvPicPr>
-          <p:cNvPr id="6" name="Image 0" descr="preencoded.png">    </p:cNvPr>
-          <p:cNvPicPr>
-            <a:picLocks noChangeAspect="1"/>
-          </p:cNvPicPr>
-          <p:nvPr/>
-        </p:nvPicPr>
-        <p:blipFill>
-          <a:blip r:embed="rId1"/>
-          <a:stretch>
-            <a:fillRect/>
-          </a:stretch>
-        </p:blipFill>
-        <p:spPr>
-          <a:xfrm>
-            <a:off x="3950894" y="3246120"/>
-            <a:ext cx="365760" cy="365760"/>
-          </a:xfrm>
-          <a:prstGeom prst="rect">
-            <a:avLst/>
-          </a:prstGeom>
-        </p:spPr>
-      </p:pic>
-      <p:sp>
-        <p:nvSpPr>
-          <p:cNvPr id="7" name="Kort"/>
-          <p:cNvSpPr/>
-          <p:nvPr/>
-        </p:nvSpPr>
-        <p:spPr>
-          <a:xfrm>
-            <a:off x="4472788" y="1874520"/>
-            <a:ext cx="3246120" cy="3108960"/>
-          </a:xfrm>
-          <a:prstGeom prst="roundRect">
-            <a:avLst>
-              <a:gd name="adj" fmla="val 3529"/>
-            </a:avLst>
-          </a:prstGeom>
-          <a:solidFill>
-            <a:srgbClr val="EEF3F6"/>
-          </a:solidFill>
-          <a:ln/>
-        </p:spPr>
-      </p:sp>
-      <p:sp>
-        <p:nvSpPr>
-          <p:cNvPr id="8" name="Text 5"/>
-          <p:cNvSpPr txBox="1"/>
-          <p:nvPr/>
-        </p:nvSpPr>
-        <p:spPr>
-          <a:xfrm>
-            <a:off x="4792828" y="2103120"/>
-            <a:ext cx="2606040" cy="2743200"/>
-          </a:xfrm>
-          <a:prstGeom prst="rect">
-            <a:avLst/>
-          </a:prstGeom>
-          <a:noFill/>
-          <a:ln/>
-        </p:spPr>
-        <p:txBody>
-          <a:bodyPr wrap="square" lIns="0" tIns="0" rIns="0" bIns="0" rtlCol="0" anchor="t"/>
-          <a:lstStyle/>
-          <a:p>
-            <a:pPr indent="0" marL="0">
-              <a:buNone/>
-            </a:pPr>
-            <a:r>
-              <a:rPr lang="en-US" sz="1300" b="1" spc="200" kern="0" dirty="0">
-                <a:solidFill>
-                  <a:srgbClr val="0E7C86"/>
-                </a:solidFill>
-                <a:latin typeface="Calibri" pitchFamily="34" charset="0"/>
-                <a:ea typeface="Calibri" pitchFamily="34" charset="-122"/>
-                <a:cs typeface="Calibri" pitchFamily="34" charset="-120"/>
-              </a:rPr>
-              <a:t>EU</a:t>
-            </a:r>
-            <a:endParaRPr lang="en-US" sz="1300" dirty="0"/>
-          </a:p>
-          <a:p>
-            <a:pPr indent="0" marL="0">
-              <a:buNone/>
-            </a:pPr>
-            <a:r>
-              <a:rPr lang="en-US" sz="4800" b="1" dirty="0">
-                <a:solidFill>
-                  <a:srgbClr val="0B1F33"/>
-                </a:solidFill>
-                <a:latin typeface="Arial" pitchFamily="34" charset="0"/>
-                <a:ea typeface="Arial" pitchFamily="34" charset="-122"/>
-                <a:cs typeface="Arial" pitchFamily="34" charset="-120"/>
-              </a:rPr>
-              <a:t>2 270</a:t>
-            </a:r>
-            <a:endParaRPr lang="en-US" sz="1300" dirty="0"/>
-          </a:p>
-          <a:p>
-            <a:pPr indent="0" marL="0">
-              <a:buNone/>
-            </a:pPr>
-            <a:r>
-              <a:rPr lang="en-US" sz="1500" dirty="0">
-                <a:solidFill>
-                  <a:srgbClr val="1B2A38"/>
-                </a:solidFill>
-                <a:latin typeface="Calibri" pitchFamily="34" charset="0"/>
-                <a:ea typeface="Calibri" pitchFamily="34" charset="-122"/>
-                <a:cs typeface="Calibri" pitchFamily="34" charset="-120"/>
-              </a:rPr>
-              <a:t>fiskefartøy over 24 meter</a:t>
-            </a:r>
-            <a:endParaRPr lang="en-US" sz="1300" dirty="0"/>
-          </a:p>
-          <a:p>
-            <a:pPr indent="0" marL="0">
-              <a:buNone/>
-            </a:pPr>
-            <a:r>
-              <a:rPr lang="en-US" sz="1000" dirty="0">
-                <a:solidFill>
-                  <a:srgbClr val="1B2A38"/>
-                </a:solidFill>
-                <a:latin typeface="Calibri" pitchFamily="34" charset="0"/>
-                <a:ea typeface="Calibri" pitchFamily="34" charset="-122"/>
-                <a:cs typeface="Calibri" pitchFamily="34" charset="-120"/>
-              </a:rPr>
-              <a:t> </a:t>
-            </a:r>
-            <a:endParaRPr lang="en-US" sz="1300" dirty="0"/>
-          </a:p>
-          <a:p>
-            <a:pPr indent="0" marL="0">
-              <a:buNone/>
-            </a:pPr>
-            <a:r>
-              <a:rPr lang="en-US" sz="2000" b="1" dirty="0">
-                <a:solidFill>
-                  <a:srgbClr val="0E7C86"/>
-                </a:solidFill>
-                <a:latin typeface="Calibri" pitchFamily="34" charset="0"/>
-                <a:ea typeface="Calibri" pitchFamily="34" charset="-122"/>
-                <a:cs typeface="Calibri" pitchFamily="34" charset="-120"/>
-              </a:rPr>
-              <a:t>≈ 381 MNOK per år</a:t>
-            </a:r>
-            <a:endParaRPr lang="en-US" sz="1300" dirty="0"/>
-          </a:p>
-        </p:txBody>
-      </p:sp>
-      <p:pic>
-        <p:nvPicPr>
-          <p:cNvPr id="9" name="Image 1" descr="preencoded.png">    </p:cNvPr>
-          <p:cNvPicPr>
-            <a:picLocks noChangeAspect="1"/>
-          </p:cNvPicPr>
-          <p:nvPr/>
-        </p:nvPicPr>
-        <p:blipFill>
-          <a:blip r:embed="rId2"/>
-          <a:stretch>
-            <a:fillRect/>
-          </a:stretch>
-        </p:blipFill>
-        <p:spPr>
-          <a:xfrm>
-            <a:off x="7875041" y="3246120"/>
-            <a:ext cx="365760" cy="365760"/>
-          </a:xfrm>
-          <a:prstGeom prst="rect">
-            <a:avLst/>
-          </a:prstGeom>
-        </p:spPr>
-      </p:pic>
-      <p:sp>
-        <p:nvSpPr>
-          <p:cNvPr id="10" name="Kort"/>
-          <p:cNvSpPr/>
-          <p:nvPr/>
-        </p:nvSpPr>
-        <p:spPr>
-          <a:xfrm>
-            <a:off x="8396935" y="1874520"/>
-            <a:ext cx="3246120" cy="3108960"/>
-          </a:xfrm>
-          <a:prstGeom prst="roundRect">
-            <a:avLst>
-              <a:gd name="adj" fmla="val 3529"/>
-            </a:avLst>
-          </a:prstGeom>
-          <a:solidFill>
-            <a:srgbClr val="0B1F33"/>
-          </a:solidFill>
-          <a:ln/>
-        </p:spPr>
-      </p:sp>
-      <p:sp>
-        <p:nvSpPr>
-          <p:cNvPr id="11" name="Text 7"/>
-          <p:cNvSpPr txBox="1"/>
-          <p:nvPr/>
-        </p:nvSpPr>
-        <p:spPr>
-          <a:xfrm>
-            <a:off x="8716975" y="2103120"/>
-            <a:ext cx="2606040" cy="2743200"/>
-          </a:xfrm>
-          <a:prstGeom prst="rect">
-            <a:avLst/>
-          </a:prstGeom>
-          <a:noFill/>
-          <a:ln/>
-        </p:spPr>
-        <p:txBody>
-          <a:bodyPr wrap="square" lIns="0" tIns="0" rIns="0" bIns="0" rtlCol="0" anchor="t"/>
-          <a:lstStyle/>
-          <a:p>
-            <a:pPr indent="0" marL="0">
-              <a:buNone/>
-            </a:pPr>
-            <a:r>
-              <a:rPr lang="en-US" sz="1300" b="1" spc="200" kern="0" dirty="0">
-                <a:solidFill>
-                  <a:srgbClr val="7FD1D6"/>
-                </a:solidFill>
-                <a:latin typeface="Calibri" pitchFamily="34" charset="0"/>
-                <a:ea typeface="Calibri" pitchFamily="34" charset="-122"/>
-                <a:cs typeface="Calibri" pitchFamily="34" charset="-120"/>
-              </a:rPr>
-              <a:t>TIL SAMMEN</a:t>
-            </a:r>
-            <a:endParaRPr lang="en-US" sz="1300" dirty="0"/>
-          </a:p>
-          <a:p>
-            <a:pPr indent="0" marL="0">
-              <a:buNone/>
-            </a:pPr>
-            <a:r>
-              <a:rPr lang="en-US" sz="4800" b="1" dirty="0">
-                <a:solidFill>
-                  <a:srgbClr val="FFFFFF"/>
-                </a:solidFill>
-                <a:latin typeface="Arial" pitchFamily="34" charset="0"/>
-                <a:ea typeface="Arial" pitchFamily="34" charset="-122"/>
-                <a:cs typeface="Arial" pitchFamily="34" charset="-120"/>
-              </a:rPr>
-              <a:t>≈ 2 500</a:t>
-            </a:r>
-            <a:endParaRPr lang="en-US" sz="1300" dirty="0"/>
-          </a:p>
-          <a:p>
-            <a:pPr indent="0" marL="0">
-              <a:buNone/>
-            </a:pPr>
-            <a:r>
-              <a:rPr lang="en-US" sz="1500" dirty="0">
-                <a:solidFill>
-                  <a:srgbClr val="C9D6E0"/>
-                </a:solidFill>
-                <a:latin typeface="Calibri" pitchFamily="34" charset="0"/>
-                <a:ea typeface="Calibri" pitchFamily="34" charset="-122"/>
-                <a:cs typeface="Calibri" pitchFamily="34" charset="-120"/>
-              </a:rPr>
-              <a:t>fartøy i første målgruppe</a:t>
-            </a:r>
-            <a:endParaRPr lang="en-US" sz="1300" dirty="0"/>
-          </a:p>
-          <a:p>
-            <a:pPr indent="0" marL="0">
-              <a:buNone/>
-            </a:pPr>
-            <a:r>
-              <a:rPr lang="en-US" sz="1000" dirty="0">
-                <a:solidFill>
-                  <a:srgbClr val="1B2A38"/>
-                </a:solidFill>
-                <a:latin typeface="Calibri" pitchFamily="34" charset="0"/>
-                <a:ea typeface="Calibri" pitchFamily="34" charset="-122"/>
-                <a:cs typeface="Calibri" pitchFamily="34" charset="-120"/>
-              </a:rPr>
-              <a:t> </a:t>
-            </a:r>
-            <a:endParaRPr lang="en-US" sz="1300" dirty="0"/>
-          </a:p>
-          <a:p>
-            <a:pPr indent="0" marL="0">
-              <a:buNone/>
-            </a:pPr>
-            <a:r>
-              <a:rPr lang="en-US" sz="2000" b="1" dirty="0">
-                <a:solidFill>
-                  <a:srgbClr val="FFFFFF"/>
-                </a:solidFill>
-                <a:latin typeface="Calibri" pitchFamily="34" charset="0"/>
-                <a:ea typeface="Calibri" pitchFamily="34" charset="-122"/>
-                <a:cs typeface="Calibri" pitchFamily="34" charset="-120"/>
-              </a:rPr>
-              <a:t>≈ 425 MNOK per år</a:t>
-            </a:r>
-            <a:endParaRPr lang="en-US" sz="1300" dirty="0"/>
-          </a:p>
-        </p:txBody>
-      </p:sp>
-      <p:sp>
-        <p:nvSpPr>
-          <p:cNvPr id="12" name="Text 8"/>
-          <p:cNvSpPr txBox="1"/>
-          <p:nvPr/>
-        </p:nvSpPr>
-        <p:spPr>
-          <a:xfrm>
-            <a:off x="548640" y="5212080"/>
-            <a:ext cx="11094415" cy="365760"/>
-          </a:xfrm>
-          <a:prstGeom prst="rect">
-            <a:avLst/>
-          </a:prstGeom>
-          <a:noFill/>
-          <a:ln/>
-        </p:spPr>
-        <p:txBody>
-          <a:bodyPr wrap="square" lIns="0" tIns="0" rIns="0" bIns="0" rtlCol="0" anchor="t"/>
-          <a:lstStyle/>
-          <a:p>
-            <a:pPr indent="0" marL="0">
-              <a:buNone/>
-            </a:pPr>
-            <a:r>
-              <a:rPr lang="en-US" sz="1500" b="1" dirty="0">
-                <a:solidFill>
-                  <a:srgbClr val="1B2A38"/>
-                </a:solidFill>
-                <a:latin typeface="Calibri" pitchFamily="34" charset="0"/>
-                <a:ea typeface="Calibri" pitchFamily="34" charset="-122"/>
-                <a:cs typeface="Calibri" pitchFamily="34" charset="-120"/>
-              </a:rPr>
-              <a:t>Ikke tallfestet ennå: </a:t>
-            </a:r>
-            <a:pPr indent="0" marL="0">
-              <a:buNone/>
-            </a:pPr>
-            <a:r>
-              <a:rPr lang="en-US" sz="1500" dirty="0">
-                <a:solidFill>
-                  <a:srgbClr val="1B2A38"/>
-                </a:solidFill>
-                <a:latin typeface="Calibri" pitchFamily="34" charset="0"/>
-                <a:ea typeface="Calibri" pitchFamily="34" charset="-122"/>
-                <a:cs typeface="Calibri" pitchFamily="34" charset="-120"/>
-              </a:rPr>
-              <a:t>havbruks- og servicefartøy, Island, Færøyane og Storbritannia.</a:t>
-            </a:r>
-            <a:endParaRPr lang="en-US" sz="1500" dirty="0"/>
-          </a:p>
-        </p:txBody>
-      </p:sp>
-      <p:sp>
-        <p:nvSpPr>
-          <p:cNvPr id="13" name="Text 9"/>
-          <p:cNvSpPr txBox="1"/>
-          <p:nvPr/>
-        </p:nvSpPr>
-        <p:spPr>
-          <a:xfrm>
-            <a:off x="548640" y="5989320"/>
-            <a:ext cx="11094415" cy="320040"/>
-          </a:xfrm>
-          <a:prstGeom prst="rect">
-            <a:avLst/>
-          </a:prstGeom>
-          <a:noFill/>
-          <a:ln/>
-        </p:spPr>
-        <p:txBody>
-          <a:bodyPr wrap="square" lIns="0" tIns="0" rIns="0" bIns="0" rtlCol="0" anchor="b"/>
-          <a:lstStyle/>
-          <a:p>
-            <a:pPr indent="0" marL="0">
-              <a:buNone/>
-            </a:pPr>
-            <a:r>
-              <a:rPr lang="en-US" sz="1100" dirty="0">
-                <a:solidFill>
-                  <a:srgbClr val="5B6B7A"/>
-                </a:solidFill>
-              </a:rPr>
-              <a:t>Årlig abonnementsverdi ved 168 000 kr per fartøy (alle moduler) og full dekning. Kilder: Fiskeridirektoratet, Nøkkeltal 2025 (foreløpige tall); EUs fartøyregister, 2021-tall.</a:t>
-            </a:r>
-            <a:endParaRPr lang="en-US" sz="1100" dirty="0"/>
-          </a:p>
-        </p:txBody>
-      </p:sp>
-      <p:sp>
-        <p:nvSpPr>
-          <p:cNvPr id="25" name="Slide Number Placeholder 0"/>
-          <p:cNvSpPr>
-            <a:spLocks noGrp="1"/>
-          </p:cNvSpPr>
-          <p:nvPr>
-            <p:ph type="sldNum" sz="quarter" idx="4294967295"/>
-          </p:nvPr>
-        </p:nvSpPr>
-        <p:spPr>
-          <a:xfrm>
-            <a:off x="11094415" y="6400800"/>
-            <a:ext cx="548640" cy="274320"/>
-          </a:xfrm>
-          <a:prstGeom prst="rect">
-            <a:avLst/>
-          </a:prstGeom>
-          <a:extLst>
-            <a:ext uri="{C572A759-6A51-4108-AA02-DFA0A04FC94B}">
-              <ma14:wrappingTextBoxFlag xmlns:ma14="http://schemas.microsoft.com/office/mac/drawingml/2011/main" val="0"/>
-            </a:ext>
-          </a:extLst>
-        </p:spPr>
-        <p:txBody>
-          <a:bodyPr/>
-          <a:lstStyle>
-            <a:lvl1pPr>
-              <a:defRPr sz="1000">
-                <a:solidFill>
-                  <a:srgbClr val="5B6B7A"/>
-                </a:solidFill>
-                <a:latin typeface="Calibri"/>
-                <a:ea typeface="Calibri"/>
-                <a:cs typeface="Calibri"/>
-              </a:defRPr>
-            </a:lvl1pPr>
-          </a:lstStyle>
-          <a:p>
-            <a:pPr algn="r"/>
-            <a:fld id="{F7021451-1387-4CA6-816F-3879F97B5CBC}" type="slidenum">
-              <a:rPr b="0" lang="en-US"/>
               <a:t>8</a:t>
             </a:fld>
             <a:endParaRPr lang="en-US"/>
@@ -12107,7 +12422,7 @@
                 <a:ea typeface="Calibri" pitchFamily="34" charset="-122"/>
                 <a:cs typeface="Calibri" pitchFamily="34" charset="-120"/>
               </a:rPr>
-              <a:t>FORRETNINGSMODELL</a:t>
+              <a:t>MARKED</a:t>
             </a:r>
             <a:endParaRPr lang="en-US" sz="1200" dirty="0"/>
           </a:p>
@@ -12148,7 +12463,7 @@
                 <a:ea typeface="Arial" pitchFamily="34" charset="-122"/>
                 <a:cs typeface="Arial" pitchFamily="34" charset="-120"/>
               </a:rPr>
-              <a:t>Abonnement per fartøy og modul – inntekten vokser med flåten</a:t>
+              <a:t>Vi starter i Norge – og samme type fartøy finnes i hele Europa</a:t>
             </a:r>
             <a:endParaRPr lang="en-US" sz="3000" dirty="0"/>
           </a:p>
@@ -12156,14 +12471,36 @@
       </p:sp>
       <p:sp>
         <p:nvSpPr>
-          <p:cNvPr id="4" name="Text 2"/>
+          <p:cNvPr id="4" name="Kort"/>
+          <p:cNvSpPr/>
+          <p:nvPr/>
+        </p:nvSpPr>
+        <p:spPr>
+          <a:xfrm>
+            <a:off x="548640" y="1874520"/>
+            <a:ext cx="3246120" cy="3108960"/>
+          </a:xfrm>
+          <a:prstGeom prst="roundRect">
+            <a:avLst>
+              <a:gd name="adj" fmla="val 3529"/>
+            </a:avLst>
+          </a:prstGeom>
+          <a:solidFill>
+            <a:srgbClr val="EEF3F6"/>
+          </a:solidFill>
+          <a:ln/>
+        </p:spPr>
+      </p:sp>
+      <p:sp>
+        <p:nvSpPr>
+          <p:cNvPr id="5" name="Text 3"/>
           <p:cNvSpPr txBox="1"/>
           <p:nvPr/>
         </p:nvSpPr>
         <p:spPr>
           <a:xfrm>
-            <a:off x="548640" y="1828800"/>
-            <a:ext cx="5120640" cy="1737360"/>
+            <a:off x="868680" y="2103120"/>
+            <a:ext cx="2606040" cy="2743200"/>
           </a:xfrm>
           <a:prstGeom prst="rect">
             <a:avLst/>
@@ -12179,77 +12516,91 @@
               <a:buNone/>
             </a:pPr>
             <a:r>
-              <a:rPr lang="en-US" sz="5400" b="1" dirty="0">
+              <a:rPr lang="en-US" sz="1300" b="1" spc="200" kern="0" dirty="0">
                 <a:solidFill>
                   <a:srgbClr val="0E7C86"/>
+                </a:solidFill>
+                <a:latin typeface="Calibri" pitchFamily="34" charset="0"/>
+                <a:ea typeface="Calibri" pitchFamily="34" charset="-122"/>
+                <a:cs typeface="Calibri" pitchFamily="34" charset="-120"/>
+              </a:rPr>
+              <a:t>NORGE</a:t>
+            </a:r>
+            <a:endParaRPr lang="en-US" sz="1300" dirty="0"/>
+          </a:p>
+          <a:p>
+            <a:pPr indent="0" marL="0">
+              <a:buNone/>
+            </a:pPr>
+            <a:r>
+              <a:rPr lang="en-US" sz="4800" b="1" dirty="0">
+                <a:solidFill>
+                  <a:srgbClr val="0B1F33"/>
                 </a:solidFill>
                 <a:latin typeface="Arial" pitchFamily="34" charset="0"/>
                 <a:ea typeface="Arial" pitchFamily="34" charset="-122"/>
                 <a:cs typeface="Arial" pitchFamily="34" charset="-120"/>
               </a:rPr>
-              <a:t>14 000 kr</a:t>
-            </a:r>
-            <a:endParaRPr lang="en-US" sz="5400" dirty="0"/>
+              <a:t>260</a:t>
+            </a:r>
+            <a:endParaRPr lang="en-US" sz="1300" dirty="0"/>
           </a:p>
           <a:p>
             <a:pPr indent="0" marL="0">
               <a:buNone/>
             </a:pPr>
             <a:r>
-              <a:rPr lang="en-US" sz="2000" dirty="0">
-                <a:solidFill>
-                  <a:srgbClr val="0B1F33"/>
-                </a:solidFill>
-                <a:latin typeface="Calibri" pitchFamily="34" charset="0"/>
-                <a:ea typeface="Calibri" pitchFamily="34" charset="-122"/>
-                <a:cs typeface="Calibri" pitchFamily="34" charset="-120"/>
-              </a:rPr>
-              <a:t>per fartøy per måned for alle 14 moduler</a:t>
-            </a:r>
-            <a:endParaRPr lang="en-US" sz="5400" dirty="0"/>
+              <a:rPr lang="en-US" sz="1500" dirty="0">
+                <a:solidFill>
+                  <a:srgbClr val="1B2A38"/>
+                </a:solidFill>
+                <a:latin typeface="Calibri" pitchFamily="34" charset="0"/>
+                <a:ea typeface="Calibri" pitchFamily="34" charset="-122"/>
+                <a:cs typeface="Calibri" pitchFamily="34" charset="-120"/>
+              </a:rPr>
+              <a:t>fiskefartøy på 28 meter eller mer</a:t>
+            </a:r>
+            <a:endParaRPr lang="en-US" sz="1300" dirty="0"/>
           </a:p>
           <a:p>
             <a:pPr indent="0" marL="0">
               <a:buNone/>
             </a:pPr>
             <a:r>
-              <a:rPr lang="en-US" sz="1500" dirty="0">
-                <a:solidFill>
-                  <a:srgbClr val="5B6B7A"/>
-                </a:solidFill>
-                <a:latin typeface="Calibri" pitchFamily="34" charset="0"/>
-                <a:ea typeface="Calibri" pitchFamily="34" charset="-122"/>
-                <a:cs typeface="Calibri" pitchFamily="34" charset="-120"/>
-              </a:rPr>
-              <a:t>= 168 000 kr per fartøy per år, ekskl. mva.</a:t>
-            </a:r>
-            <a:endParaRPr lang="en-US" sz="5400" dirty="0"/>
-          </a:p>
-        </p:txBody>
-      </p:sp>
-      <p:sp>
-        <p:nvSpPr>
-          <p:cNvPr id="5" name="Ikon-sirkel"/>
-          <p:cNvSpPr/>
-          <p:nvPr/>
-        </p:nvSpPr>
-        <p:spPr>
-          <a:xfrm>
-            <a:off x="548640" y="3794760"/>
-            <a:ext cx="411480" cy="411480"/>
-          </a:xfrm>
-          <a:prstGeom prst="ellipse">
-            <a:avLst/>
-          </a:prstGeom>
-          <a:solidFill>
-            <a:srgbClr val="DDE7EE"/>
-          </a:solidFill>
-          <a:ln/>
-        </p:spPr>
+              <a:rPr lang="en-US" sz="1000" dirty="0">
+                <a:solidFill>
+                  <a:srgbClr val="1B2A38"/>
+                </a:solidFill>
+                <a:latin typeface="Calibri" pitchFamily="34" charset="0"/>
+                <a:ea typeface="Calibri" pitchFamily="34" charset="-122"/>
+                <a:cs typeface="Calibri" pitchFamily="34" charset="-120"/>
+              </a:rPr>
+              <a:t> </a:t>
+            </a:r>
+            <a:endParaRPr lang="en-US" sz="1300" dirty="0"/>
+          </a:p>
+          <a:p>
+            <a:pPr indent="0" marL="0">
+              <a:buNone/>
+            </a:pPr>
+            <a:r>
+              <a:rPr lang="en-US" sz="2000" b="1" dirty="0">
+                <a:solidFill>
+                  <a:srgbClr val="0E7C86"/>
+                </a:solidFill>
+                <a:latin typeface="Calibri" pitchFamily="34" charset="0"/>
+                <a:ea typeface="Calibri" pitchFamily="34" charset="-122"/>
+                <a:cs typeface="Calibri" pitchFamily="34" charset="-120"/>
+              </a:rPr>
+              <a:t>≈ 44 MNOK per år</a:t>
+            </a:r>
+            <a:endParaRPr lang="en-US" sz="1300" dirty="0"/>
+          </a:p>
+        </p:txBody>
       </p:sp>
       <p:pic>
         <p:nvPicPr>
-          <p:cNvPr id="6" name="Ikon FaCheck" descr="preencoded.png">    </p:cNvPr>
+          <p:cNvPr id="6" name="Image 0" descr="preencoded.png">    </p:cNvPr>
           <p:cNvPicPr>
             <a:picLocks noChangeAspect="1"/>
           </p:cNvPicPr>
@@ -12263,8 +12614,8 @@
         </p:blipFill>
         <p:spPr>
           <a:xfrm>
-            <a:off x="647395" y="3893515"/>
-            <a:ext cx="213970" cy="213970"/>
+            <a:off x="3950894" y="3246120"/>
+            <a:ext cx="365760" cy="365760"/>
           </a:xfrm>
           <a:prstGeom prst="rect">
             <a:avLst/>
@@ -12273,14 +12624,36 @@
       </p:pic>
       <p:sp>
         <p:nvSpPr>
-          <p:cNvPr id="7" name="Text 4"/>
+          <p:cNvPr id="7" name="Kort"/>
+          <p:cNvSpPr/>
+          <p:nvPr/>
+        </p:nvSpPr>
+        <p:spPr>
+          <a:xfrm>
+            <a:off x="4472788" y="1874520"/>
+            <a:ext cx="3246120" cy="3108960"/>
+          </a:xfrm>
+          <a:prstGeom prst="roundRect">
+            <a:avLst>
+              <a:gd name="adj" fmla="val 3529"/>
+            </a:avLst>
+          </a:prstGeom>
+          <a:solidFill>
+            <a:srgbClr val="EEF3F6"/>
+          </a:solidFill>
+          <a:ln/>
+        </p:spPr>
+      </p:sp>
+      <p:sp>
+        <p:nvSpPr>
+          <p:cNvPr id="8" name="Text 5"/>
           <p:cNvSpPr txBox="1"/>
           <p:nvPr/>
         </p:nvSpPr>
         <p:spPr>
           <a:xfrm>
-            <a:off x="1143000" y="3776472"/>
-            <a:ext cx="4572000" cy="548640"/>
+            <a:off x="4792828" y="2103120"/>
+            <a:ext cx="2606040" cy="2743200"/>
           </a:xfrm>
           <a:prstGeom prst="rect">
             <a:avLst/>
@@ -12289,13 +12662,47 @@
           <a:ln/>
         </p:spPr>
         <p:txBody>
-          <a:bodyPr wrap="square" lIns="0" tIns="0" rIns="0" bIns="0" rtlCol="0" anchor="ctr"/>
+          <a:bodyPr wrap="square" lIns="0" tIns="0" rIns="0" bIns="0" rtlCol="0" anchor="t"/>
           <a:lstStyle/>
           <a:p>
             <a:pPr indent="0" marL="0">
               <a:buNone/>
             </a:pPr>
             <a:r>
+              <a:rPr lang="en-US" sz="1300" b="1" spc="200" kern="0" dirty="0">
+                <a:solidFill>
+                  <a:srgbClr val="0E7C86"/>
+                </a:solidFill>
+                <a:latin typeface="Calibri" pitchFamily="34" charset="0"/>
+                <a:ea typeface="Calibri" pitchFamily="34" charset="-122"/>
+                <a:cs typeface="Calibri" pitchFamily="34" charset="-120"/>
+              </a:rPr>
+              <a:t>EU</a:t>
+            </a:r>
+            <a:endParaRPr lang="en-US" sz="1300" dirty="0"/>
+          </a:p>
+          <a:p>
+            <a:pPr indent="0" marL="0">
+              <a:buNone/>
+            </a:pPr>
+            <a:r>
+              <a:rPr lang="en-US" sz="4800" b="1" dirty="0">
+                <a:solidFill>
+                  <a:srgbClr val="0B1F33"/>
+                </a:solidFill>
+                <a:latin typeface="Arial" pitchFamily="34" charset="0"/>
+                <a:ea typeface="Arial" pitchFamily="34" charset="-122"/>
+                <a:cs typeface="Arial" pitchFamily="34" charset="-120"/>
+              </a:rPr>
+              <a:t>2 270</a:t>
+            </a:r>
+            <a:endParaRPr lang="en-US" sz="1300" dirty="0"/>
+          </a:p>
+          <a:p>
+            <a:pPr indent="0" marL="0">
+              <a:buNone/>
+            </a:pPr>
+            <a:r>
               <a:rPr lang="en-US" sz="1500" dirty="0">
                 <a:solidFill>
                   <a:srgbClr val="1B2A38"/>
@@ -12304,35 +12711,49 @@
                 <a:ea typeface="Calibri" pitchFamily="34" charset="-122"/>
                 <a:cs typeface="Calibri" pitchFamily="34" charset="-120"/>
               </a:rPr>
-              <a:t>Moduler fra 1 000 kr per måned – kunden kan starte smått</a:t>
-            </a:r>
-            <a:endParaRPr lang="en-US" sz="1500" dirty="0"/>
-          </a:p>
-        </p:txBody>
-      </p:sp>
-      <p:sp>
-        <p:nvSpPr>
-          <p:cNvPr id="8" name="Ikon-sirkel"/>
-          <p:cNvSpPr/>
-          <p:nvPr/>
-        </p:nvSpPr>
-        <p:spPr>
-          <a:xfrm>
-            <a:off x="548640" y="4416552"/>
-            <a:ext cx="411480" cy="411480"/>
-          </a:xfrm>
-          <a:prstGeom prst="ellipse">
-            <a:avLst/>
-          </a:prstGeom>
-          <a:solidFill>
-            <a:srgbClr val="DDE7EE"/>
-          </a:solidFill>
-          <a:ln/>
-        </p:spPr>
+              <a:t>fiskefartøy over 24 meter</a:t>
+            </a:r>
+            <a:endParaRPr lang="en-US" sz="1300" dirty="0"/>
+          </a:p>
+          <a:p>
+            <a:pPr indent="0" marL="0">
+              <a:buNone/>
+            </a:pPr>
+            <a:r>
+              <a:rPr lang="en-US" sz="1000" dirty="0">
+                <a:solidFill>
+                  <a:srgbClr val="1B2A38"/>
+                </a:solidFill>
+                <a:latin typeface="Calibri" pitchFamily="34" charset="0"/>
+                <a:ea typeface="Calibri" pitchFamily="34" charset="-122"/>
+                <a:cs typeface="Calibri" pitchFamily="34" charset="-120"/>
+              </a:rPr>
+              <a:t> </a:t>
+            </a:r>
+            <a:endParaRPr lang="en-US" sz="1300" dirty="0"/>
+          </a:p>
+          <a:p>
+            <a:pPr indent="0" marL="0">
+              <a:buNone/>
+            </a:pPr>
+            <a:r>
+              <a:rPr lang="en-US" sz="2000" b="1" dirty="0">
+                <a:solidFill>
+                  <a:srgbClr val="0E7C86"/>
+                </a:solidFill>
+                <a:latin typeface="Calibri" pitchFamily="34" charset="0"/>
+                <a:ea typeface="Calibri" pitchFamily="34" charset="-122"/>
+                <a:cs typeface="Calibri" pitchFamily="34" charset="-120"/>
+              </a:rPr>
+              <a:t>≈ 381 MNOK per år</a:t>
+            </a:r>
+            <a:endParaRPr lang="en-US" sz="1300" dirty="0"/>
+          </a:p>
+        </p:txBody>
       </p:sp>
       <p:pic>
         <p:nvPicPr>
-          <p:cNvPr id="9" name="Ikon FaCheck" descr="preencoded.png">    </p:cNvPr>
+          <p:cNvPr id="9" name="Image 1" descr="preencoded.png">    </p:cNvPr>
           <p:cNvPicPr>
             <a:picLocks noChangeAspect="1"/>
           </p:cNvPicPr>
@@ -12346,8 +12767,8 @@
         </p:blipFill>
         <p:spPr>
           <a:xfrm>
-            <a:off x="647395" y="4515307"/>
-            <a:ext cx="213970" cy="213970"/>
+            <a:off x="7875041" y="3246120"/>
+            <a:ext cx="365760" cy="365760"/>
           </a:xfrm>
           <a:prstGeom prst="rect">
             <a:avLst/>
@@ -12356,14 +12777,36 @@
       </p:pic>
       <p:sp>
         <p:nvSpPr>
-          <p:cNvPr id="10" name="Text 6"/>
+          <p:cNvPr id="10" name="Kort"/>
+          <p:cNvSpPr/>
+          <p:nvPr/>
+        </p:nvSpPr>
+        <p:spPr>
+          <a:xfrm>
+            <a:off x="8396935" y="1874520"/>
+            <a:ext cx="3246120" cy="3108960"/>
+          </a:xfrm>
+          <a:prstGeom prst="roundRect">
+            <a:avLst>
+              <a:gd name="adj" fmla="val 3529"/>
+            </a:avLst>
+          </a:prstGeom>
+          <a:solidFill>
+            <a:srgbClr val="0B1F33"/>
+          </a:solidFill>
+          <a:ln/>
+        </p:spPr>
+      </p:sp>
+      <p:sp>
+        <p:nvSpPr>
+          <p:cNvPr id="11" name="Text 7"/>
           <p:cNvSpPr txBox="1"/>
           <p:nvPr/>
         </p:nvSpPr>
         <p:spPr>
           <a:xfrm>
-            <a:off x="1143000" y="4398264"/>
-            <a:ext cx="4572000" cy="548640"/>
+            <a:off x="8716975" y="2103120"/>
+            <a:ext cx="2606040" cy="2743200"/>
           </a:xfrm>
           <a:prstGeom prst="rect">
             <a:avLst/>
@@ -12372,22 +12815,143 @@
           <a:ln/>
         </p:spPr>
         <p:txBody>
-          <a:bodyPr wrap="square" lIns="0" tIns="0" rIns="0" bIns="0" rtlCol="0" anchor="ctr"/>
+          <a:bodyPr wrap="square" lIns="0" tIns="0" rIns="0" bIns="0" rtlCol="0" anchor="t"/>
           <a:lstStyle/>
           <a:p>
             <a:pPr indent="0" marL="0">
               <a:buNone/>
             </a:pPr>
             <a:r>
+              <a:rPr lang="en-US" sz="1300" b="1" spc="200" kern="0" dirty="0">
+                <a:solidFill>
+                  <a:srgbClr val="7FD1D6"/>
+                </a:solidFill>
+                <a:latin typeface="Calibri" pitchFamily="34" charset="0"/>
+                <a:ea typeface="Calibri" pitchFamily="34" charset="-122"/>
+                <a:cs typeface="Calibri" pitchFamily="34" charset="-120"/>
+              </a:rPr>
+              <a:t>TIL SAMMEN</a:t>
+            </a:r>
+            <a:endParaRPr lang="en-US" sz="1300" dirty="0"/>
+          </a:p>
+          <a:p>
+            <a:pPr indent="0" marL="0">
+              <a:buNone/>
+            </a:pPr>
+            <a:r>
+              <a:rPr lang="en-US" sz="4800" b="1" dirty="0">
+                <a:solidFill>
+                  <a:srgbClr val="FFFFFF"/>
+                </a:solidFill>
+                <a:latin typeface="Arial" pitchFamily="34" charset="0"/>
+                <a:ea typeface="Arial" pitchFamily="34" charset="-122"/>
+                <a:cs typeface="Arial" pitchFamily="34" charset="-120"/>
+              </a:rPr>
+              <a:t>≈ 2 500</a:t>
+            </a:r>
+            <a:endParaRPr lang="en-US" sz="1300" dirty="0"/>
+          </a:p>
+          <a:p>
+            <a:pPr indent="0" marL="0">
+              <a:buNone/>
+            </a:pPr>
+            <a:r>
               <a:rPr lang="en-US" sz="1500" dirty="0">
                 <a:solidFill>
+                  <a:srgbClr val="C9D6E0"/>
+                </a:solidFill>
+                <a:latin typeface="Calibri" pitchFamily="34" charset="0"/>
+                <a:ea typeface="Calibri" pitchFamily="34" charset="-122"/>
+                <a:cs typeface="Calibri" pitchFamily="34" charset="-120"/>
+              </a:rPr>
+              <a:t>fartøy i første målgruppe</a:t>
+            </a:r>
+            <a:endParaRPr lang="en-US" sz="1300" dirty="0"/>
+          </a:p>
+          <a:p>
+            <a:pPr indent="0" marL="0">
+              <a:buNone/>
+            </a:pPr>
+            <a:r>
+              <a:rPr lang="en-US" sz="1000" dirty="0">
+                <a:solidFill>
                   <a:srgbClr val="1B2A38"/>
                 </a:solidFill>
                 <a:latin typeface="Calibri" pitchFamily="34" charset="0"/>
                 <a:ea typeface="Calibri" pitchFamily="34" charset="-122"/>
                 <a:cs typeface="Calibri" pitchFamily="34" charset="-120"/>
               </a:rPr>
-              <a:t>Vokser med flere fartøy og flere moduler hos samme rederi</a:t>
+              <a:t> </a:t>
+            </a:r>
+            <a:endParaRPr lang="en-US" sz="1300" dirty="0"/>
+          </a:p>
+          <a:p>
+            <a:pPr indent="0" marL="0">
+              <a:buNone/>
+            </a:pPr>
+            <a:r>
+              <a:rPr lang="en-US" sz="2000" b="1" dirty="0">
+                <a:solidFill>
+                  <a:srgbClr val="FFFFFF"/>
+                </a:solidFill>
+                <a:latin typeface="Calibri" pitchFamily="34" charset="0"/>
+                <a:ea typeface="Calibri" pitchFamily="34" charset="-122"/>
+                <a:cs typeface="Calibri" pitchFamily="34" charset="-120"/>
+              </a:rPr>
+              <a:t>≈ 425 MNOK per år</a:t>
+            </a:r>
+            <a:endParaRPr lang="en-US" sz="1300" dirty="0"/>
+          </a:p>
+        </p:txBody>
+      </p:sp>
+      <p:sp>
+        <p:nvSpPr>
+          <p:cNvPr id="12" name="Text 8"/>
+          <p:cNvSpPr txBox="1"/>
+          <p:nvPr/>
+        </p:nvSpPr>
+        <p:spPr>
+          <a:xfrm>
+            <a:off x="548640" y="5212080"/>
+            <a:ext cx="11094415" cy="365760"/>
+          </a:xfrm>
+          <a:prstGeom prst="rect">
+            <a:avLst/>
+          </a:prstGeom>
+          <a:noFill/>
+          <a:ln/>
+        </p:spPr>
+        <p:txBody>
+          <a:bodyPr wrap="square" lIns="0" tIns="0" rIns="0" bIns="0" rtlCol="0" anchor="t"/>
+          <a:lstStyle/>
+          <a:p>
+            <a:pPr indent="0" marL="0">
+              <a:buNone/>
+            </a:pPr>
+            <a:r>
+              <a:rPr lang="en-US" sz="1500" b="1" dirty="0">
+                <a:solidFill>
+                  <a:srgbClr val="1B2A38"/>
+                </a:solidFill>
+                <a:latin typeface="Calibri" pitchFamily="34" charset="0"/>
+                <a:ea typeface="Calibri" pitchFamily="34" charset="-122"/>
+                <a:cs typeface="Calibri" pitchFamily="34" charset="-120"/>
+              </a:rPr>
+              <a:t>Ikke tallfestet ennå: </a:t>
+            </a:r>
+            <a:pPr indent="0" marL="0">
+              <a:buNone/>
+            </a:pPr>
+            <a:r>
+              <a:rPr lang="en-US" sz="1500" dirty="0">
+                <a:solidFill>
+                  <a:srgbClr val="1B2A38"/>
+                </a:solidFill>
+                <a:latin typeface="Calibri" pitchFamily="34" charset="0"/>
+                <a:ea typeface="Calibri" pitchFamily="34" charset="-122"/>
+                <a:cs typeface="Calibri" pitchFamily="34" charset="-120"/>
+              </a:rPr>
+              <a:t>havbruks- og servicefartøy, Island, Færøyane og Storbritannia.</a:t>
             </a:r>
             <a:endParaRPr lang="en-US" sz="1500" dirty="0"/>
           </a:p>
@@ -12395,106 +12959,7 @@
       </p:sp>
       <p:sp>
         <p:nvSpPr>
-          <p:cNvPr id="11" name="Ikon-sirkel"/>
-          <p:cNvSpPr/>
-          <p:nvPr/>
-        </p:nvSpPr>
-        <p:spPr>
-          <a:xfrm>
-            <a:off x="548640" y="5038344"/>
-            <a:ext cx="411480" cy="411480"/>
-          </a:xfrm>
-          <a:prstGeom prst="ellipse">
-            <a:avLst/>
-          </a:prstGeom>
-          <a:solidFill>
-            <a:srgbClr val="DDE7EE"/>
-          </a:solidFill>
-          <a:ln/>
-        </p:spPr>
-      </p:sp>
-      <p:pic>
-        <p:nvPicPr>
-          <p:cNvPr id="12" name="Ikon FaCheck" descr="preencoded.png">    </p:cNvPr>
-          <p:cNvPicPr>
-            <a:picLocks noChangeAspect="1"/>
-          </p:cNvPicPr>
-          <p:nvPr/>
-        </p:nvPicPr>
-        <p:blipFill>
-          <a:blip r:embed="rId3"/>
-          <a:stretch>
-            <a:fillRect/>
-          </a:stretch>
-        </p:blipFill>
-        <p:spPr>
-          <a:xfrm>
-            <a:off x="647395" y="5137099"/>
-            <a:ext cx="213970" cy="213970"/>
-          </a:xfrm>
-          <a:prstGeom prst="rect">
-            <a:avLst/>
-          </a:prstGeom>
-        </p:spPr>
-      </p:pic>
-      <p:sp>
-        <p:nvSpPr>
-          <p:cNvPr id="13" name="Text 8"/>
-          <p:cNvSpPr txBox="1"/>
-          <p:nvPr/>
-        </p:nvSpPr>
-        <p:spPr>
-          <a:xfrm>
-            <a:off x="1143000" y="5020056"/>
-            <a:ext cx="4572000" cy="548640"/>
-          </a:xfrm>
-          <a:prstGeom prst="rect">
-            <a:avLst/>
-          </a:prstGeom>
-          <a:noFill/>
-          <a:ln/>
-        </p:spPr>
-        <p:txBody>
-          <a:bodyPr wrap="square" lIns="0" tIns="0" rIns="0" bIns="0" rtlCol="0" anchor="ctr"/>
-          <a:lstStyle/>
-          <a:p>
-            <a:pPr indent="0" marL="0">
-              <a:buNone/>
-            </a:pPr>
-            <a:r>
-              <a:rPr lang="en-US" sz="1500" dirty="0">
-                <a:solidFill>
-                  <a:srgbClr val="1B2A38"/>
-                </a:solidFill>
-                <a:latin typeface="Calibri" pitchFamily="34" charset="0"/>
-                <a:ea typeface="Calibri" pitchFamily="34" charset="-122"/>
-                <a:cs typeface="Calibri" pitchFamily="34" charset="-120"/>
-              </a:rPr>
-              <a:t>Vedlikeholdssystemer byttes sjelden når de først er tatt i bruk</a:t>
-            </a:r>
-            <a:endParaRPr lang="en-US" sz="1500" dirty="0"/>
-          </a:p>
-        </p:txBody>
-      </p:sp>
-      <p:graphicFrame>
-        <p:nvGraphicFramePr>
-          <p:cNvPr id="14" name="Chart 0" descr=""/>
-          <p:cNvGraphicFramePr/>
-          <p:nvPr/>
-        </p:nvGraphicFramePr>
-        <p:xfrm>
-          <a:off x="6035040" y="1783080"/>
-          <a:ext cx="5608015" cy="4023360"/>
-        </p:xfrm>
-        <a:graphic xmlns:a="http://schemas.openxmlformats.org/drawingml/2006/main">
-          <a:graphicData uri="http://schemas.openxmlformats.org/drawingml/2006/chart">
-            <c:chart xmlns:c="http://schemas.openxmlformats.org/drawingml/2006/chart" r:id="rId4"/>
-          </a:graphicData>
-        </a:graphic>
-      </p:graphicFrame>
-      <p:sp>
-        <p:nvSpPr>
-          <p:cNvPr id="15" name="Text 9"/>
+          <p:cNvPr id="13" name="Text 9"/>
           <p:cNvSpPr txBox="1"/>
           <p:nvPr/>
         </p:nvSpPr>
@@ -12522,7 +12987,7 @@
                   <a:srgbClr val="5B6B7A"/>
                 </a:solidFill>
               </a:rPr>
-              <a:t>Regneeksempler, ikke prognose. 260 fartøy tilsvarer hele det norske markedet over 28 meter.</a:t>
+              <a:t>Årlig abonnementsverdi ved 168 000 kr per fartøy (alle moduler) og full dekning. Kilder: Fiskeridirektoratet, Nøkkeltal 2025 (foreløpige tall); EUs fartøyregister, 2021-tall.</a:t>
             </a:r>
             <a:endParaRPr lang="en-US" sz="1100" dirty="0"/>
           </a:p>
